--- a/icbb-website/materials/research-methods/unit-04-slides.pptx
+++ b/icbb-website/materials/research-methods/unit-04-slides.pptx
@@ -1145,7 +1145,7 @@
           <a:p>
             <a:r>
               <a:rPr lang="en-US" dirty="0"/>
-              <a:t>Take-away: Search concepts, never sentences. And a search you cannot reproduce next month, because you did not record it, is not a method — it is a memory.</a:t>
+              <a:t>The point: Search concepts, never sentences. And a search you cannot reproduce next month, because you did not record it, is not a method — it is a memory.</a:t>
             </a:r>
             <a:endParaRPr lang="en-US" dirty="0"/>
           </a:p>
@@ -1233,7 +1233,7 @@
           <a:p>
             <a:r>
               <a:rPr lang="en-US" dirty="0"/>
-              <a:t>Take-away: Truncate at the point where the stem is still unambiguous, then look at what you actually retrieved. Wildcards are not free.</a:t>
+              <a:t>The point: Truncate at the point where the stem is still unambiguous, then look at what you actually retrieved. Wildcards are not free.</a:t>
             </a:r>
             <a:endParaRPr lang="en-US" dirty="0"/>
           </a:p>
@@ -1497,7 +1497,7 @@
           <a:p>
             <a:r>
               <a:rPr lang="en-US" dirty="0"/>
-              <a:t>Read these out at the start and return to them at the end of the unit.</a:t>
+              <a:t>Read these at the start, and return to them at the end of the unit.</a:t>
             </a:r>
             <a:endParaRPr lang="en-US" dirty="0"/>
           </a:p>
@@ -2305,14 +2305,14 @@
         </p:nvSpPr>
         <p:spPr>
           <a:xfrm>
-            <a:off x="0" y="0"/>
-            <a:ext cx="118872" cy="5148072"/>
+            <a:off x="566928" y="4590288"/>
+            <a:ext cx="8010144" cy="10973"/>
           </a:xfrm>
           <a:prstGeom prst="rect">
             <a:avLst/>
           </a:prstGeom>
           <a:solidFill>
-            <a:srgbClr val="0066CC"/>
+            <a:srgbClr val="D8D3CB"/>
           </a:solidFill>
           <a:ln/>
         </p:spPr>
@@ -2327,7 +2327,7 @@
         </p:nvPicPr>
         <p:blipFill>
           <a:blip r:embed="rId1">
-            <a:alphaModFix amt="18000"/>
+            <a:alphaModFix amt="38000"/>
           </a:blip>
           <a:stretch>
             <a:fillRect/>
@@ -2335,8 +2335,8 @@
         </p:blipFill>
         <p:spPr>
           <a:xfrm>
-            <a:off x="6903720" y="3977640"/>
-            <a:ext cx="1920240" cy="1280160"/>
+            <a:off x="7973568" y="4709160"/>
+            <a:ext cx="566928" cy="374904"/>
           </a:xfrm>
           <a:prstGeom prst="rect">
             <a:avLst/>
@@ -2355,8 +2355,8 @@
         </p:nvSpPr>
         <p:spPr>
           <a:xfrm>
-            <a:off x="8503920" y="4709160"/>
-            <a:ext cx="800000" cy="300000"/>
+            <a:off x="566928" y="4700016"/>
+            <a:ext cx="914400" cy="274320"/>
           </a:xfrm>
           <a:prstGeom prst="rect">
             <a:avLst/>
@@ -2371,10 +2371,13 @@
           <a:bodyPr/>
           <a:lstStyle>
             <a:lvl1pPr>
-              <a:defRPr sz="1000">
-                <a:solidFill>
-                  <a:srgbClr val="6B7280"/>
-                </a:solidFill>
+              <a:defRPr sz="900">
+                <a:solidFill>
+                  <a:srgbClr val="5F6B76"/>
+                </a:solidFill>
+                <a:latin typeface="Corbel"/>
+                <a:ea typeface="Corbel"/>
+                <a:cs typeface="Corbel"/>
               </a:defRPr>
             </a:lvl1pPr>
           </a:lstStyle>
@@ -2402,7 +2405,7 @@
     <p:bg>
       <p:bgPr>
         <a:solidFill>
-          <a:srgbClr val="004D99"/>
+          <a:srgbClr val="132330"/>
         </a:solidFill>
       </p:bgPr>
     </p:bg>
@@ -2428,14 +2431,14 @@
         </p:nvSpPr>
         <p:spPr>
           <a:xfrm>
-            <a:off x="0" y="4526280"/>
-            <a:ext cx="9144000" cy="621792"/>
+            <a:off x="685800" y="1481328"/>
+            <a:ext cx="1051560" cy="25603"/>
           </a:xfrm>
           <a:prstGeom prst="rect">
             <a:avLst/>
           </a:prstGeom>
           <a:solidFill>
-            <a:srgbClr val="00A86B"/>
+            <a:srgbClr val="9A6A3C"/>
           </a:solidFill>
           <a:ln/>
         </p:spPr>
@@ -2450,7 +2453,7 @@
         </p:nvPicPr>
         <p:blipFill>
           <a:blip r:embed="rId1">
-            <a:alphaModFix amt="75000"/>
+            <a:alphaModFix amt="45000"/>
           </a:blip>
           <a:stretch>
             <a:fillRect/>
@@ -2458,8 +2461,8 @@
         </p:blipFill>
         <p:spPr>
           <a:xfrm>
-            <a:off x="7452360" y="384048"/>
-            <a:ext cx="1371600" cy="914400"/>
+            <a:off x="7863840" y="4315968"/>
+            <a:ext cx="676656" cy="448056"/>
           </a:xfrm>
           <a:prstGeom prst="rect">
             <a:avLst/>
@@ -2503,8 +2506,8 @@
         </p:nvSpPr>
         <p:spPr>
           <a:xfrm>
-            <a:off x="8503920" y="4709160"/>
-            <a:ext cx="800000" cy="300000"/>
+            <a:off x="566928" y="4700016"/>
+            <a:ext cx="914400" cy="274320"/>
           </a:xfrm>
           <a:prstGeom prst="rect">
             <a:avLst/>
@@ -2519,10 +2522,13 @@
           <a:bodyPr/>
           <a:lstStyle>
             <a:lvl1pPr>
-              <a:defRPr sz="1000">
-                <a:solidFill>
-                  <a:srgbClr val="6B7280"/>
-                </a:solidFill>
+              <a:defRPr sz="900">
+                <a:solidFill>
+                  <a:srgbClr val="5F6B76"/>
+                </a:solidFill>
+                <a:latin typeface="Corbel"/>
+                <a:ea typeface="Corbel"/>
+                <a:cs typeface="Corbel"/>
               </a:defRPr>
             </a:lvl1pPr>
           </a:lstStyle>
@@ -2823,8 +2829,8 @@
         </p:nvSpPr>
         <p:spPr>
           <a:xfrm>
-            <a:off x="548640" y="1005840"/>
-            <a:ext cx="6675120" cy="274320"/>
+            <a:off x="685800" y="1024128"/>
+            <a:ext cx="6766560" cy="292608"/>
           </a:xfrm>
           <a:prstGeom prst="rect">
             <a:avLst/>
@@ -2840,14 +2846,17 @@
               <a:buNone/>
             </a:pPr>
             <a:r>
-              <a:rPr lang="en-US" sz="1200" b="1" spc="200" kern="0" dirty="0">
-                <a:solidFill>
-                  <a:srgbClr val="00A86B"/>
-                </a:solidFill>
-              </a:rPr>
-              <a:t>ICBB-RM101  ·  UNIT 4 OF 10</a:t>
-            </a:r>
-            <a:endParaRPr lang="en-US" sz="1200" dirty="0"/>
+              <a:rPr lang="en-US" sz="1150" spc="240" kern="0" dirty="0">
+                <a:solidFill>
+                  <a:srgbClr val="C8A67B"/>
+                </a:solidFill>
+                <a:latin typeface="Corbel" pitchFamily="34" charset="0"/>
+                <a:ea typeface="Corbel" pitchFamily="34" charset="-122"/>
+                <a:cs typeface="Corbel" pitchFamily="34" charset="-120"/>
+              </a:rPr>
+              <a:t>ICBB-RM101   ·   Unit 4 of 10</a:t>
+            </a:r>
+            <a:endParaRPr lang="en-US" sz="1150" dirty="0"/>
           </a:p>
         </p:txBody>
       </p:sp>
@@ -2859,8 +2868,8 @@
         </p:nvSpPr>
         <p:spPr>
           <a:xfrm>
-            <a:off x="548640" y="1371600"/>
-            <a:ext cx="6766560" cy="1371600"/>
+            <a:off x="685800" y="1700784"/>
+            <a:ext cx="6858000" cy="1417320"/>
           </a:xfrm>
           <a:prstGeom prst="rect">
             <a:avLst/>
@@ -2873,17 +2882,23 @@
           <a:lstStyle/>
           <a:p>
             <a:pPr indent="0" marL="0">
+              <a:lnSpc>
+                <a:spcPct val="102000"/>
+              </a:lnSpc>
               <a:buNone/>
             </a:pPr>
             <a:r>
-              <a:rPr lang="en-US" sz="3400" b="1" dirty="0">
+              <a:rPr lang="en-US" sz="3300" dirty="0">
                 <a:solidFill>
                   <a:srgbClr val="FFFFFF"/>
                 </a:solidFill>
+                <a:latin typeface="Constantia" pitchFamily="34" charset="0"/>
+                <a:ea typeface="Constantia" pitchFamily="34" charset="-122"/>
+                <a:cs typeface="Constantia" pitchFamily="34" charset="-120"/>
               </a:rPr>
               <a:t>Literature Databases, Searching and Reference Management</a:t>
             </a:r>
-            <a:endParaRPr lang="en-US" sz="3400" dirty="0"/>
+            <a:endParaRPr lang="en-US" sz="3300" dirty="0"/>
           </a:p>
         </p:txBody>
       </p:sp>
@@ -2895,8 +2910,8 @@
         </p:nvSpPr>
         <p:spPr>
           <a:xfrm>
-            <a:off x="548640" y="2788920"/>
-            <a:ext cx="6766560" cy="1188720"/>
+            <a:off x="685800" y="3127248"/>
+            <a:ext cx="6309360" cy="1051560"/>
           </a:xfrm>
           <a:prstGeom prst="rect">
             <a:avLst/>
@@ -2910,19 +2925,22 @@
           <a:p>
             <a:pPr indent="0" marL="0">
               <a:lnSpc>
-                <a:spcPct val="120000"/>
+                <a:spcPct val="128000"/>
               </a:lnSpc>
               <a:buNone/>
             </a:pPr>
             <a:r>
-              <a:rPr lang="en-US" sz="1400" dirty="0">
-                <a:solidFill>
-                  <a:srgbClr val="DCE7F5"/>
-                </a:solidFill>
+              <a:rPr lang="en-US" sz="1350" dirty="0">
+                <a:solidFill>
+                  <a:srgbClr val="B9C2CB"/>
+                </a:solidFill>
+                <a:latin typeface="Corbel" pitchFamily="34" charset="0"/>
+                <a:ea typeface="Corbel" pitchFamily="34" charset="-122"/>
+                <a:cs typeface="Corbel" pitchFamily="34" charset="-120"/>
               </a:rPr>
               <a:t>The databases that matter, how to build a search that is both sensitive and precise, how to document it for PRISMA, and how to manage references so the bibliography is never done by hand.</a:t>
             </a:r>
-            <a:endParaRPr lang="en-US" sz="1400" dirty="0"/>
+            <a:endParaRPr lang="en-US" sz="1350" dirty="0"/>
           </a:p>
         </p:txBody>
       </p:sp>
@@ -2934,8 +2952,8 @@
         </p:nvSpPr>
         <p:spPr>
           <a:xfrm>
-            <a:off x="548640" y="4645152"/>
-            <a:ext cx="5486400" cy="365760"/>
+            <a:off x="685800" y="4407408"/>
+            <a:ext cx="4572000" cy="274320"/>
           </a:xfrm>
           <a:prstGeom prst="rect">
             <a:avLst/>
@@ -2951,14 +2969,17 @@
               <a:buNone/>
             </a:pPr>
             <a:r>
-              <a:rPr lang="en-US" sz="1200" b="1" dirty="0">
-                <a:solidFill>
-                  <a:srgbClr val="FFFFFF"/>
-                </a:solidFill>
-              </a:rPr>
-              <a:t>Jesse Anak  ·  ICBB</a:t>
-            </a:r>
-            <a:endParaRPr lang="en-US" sz="1200" dirty="0"/>
+              <a:rPr lang="en-US" sz="1050" spc="120" kern="0" dirty="0">
+                <a:solidFill>
+                  <a:srgbClr val="8894A0"/>
+                </a:solidFill>
+                <a:latin typeface="Corbel" pitchFamily="34" charset="0"/>
+                <a:ea typeface="Corbel" pitchFamily="34" charset="-122"/>
+                <a:cs typeface="Corbel" pitchFamily="34" charset="-120"/>
+              </a:rPr>
+              <a:t>Jesse Anak   ·   ICBB</a:t>
+            </a:r>
+            <a:endParaRPr lang="en-US" sz="1050" dirty="0"/>
           </a:p>
         </p:txBody>
       </p:sp>
@@ -2995,8 +3016,8 @@
         </p:nvSpPr>
         <p:spPr>
           <a:xfrm>
-            <a:off x="502920" y="292608"/>
-            <a:ext cx="8046720" cy="228600"/>
+            <a:off x="566928" y="384048"/>
+            <a:ext cx="7772400" cy="237744"/>
           </a:xfrm>
           <a:prstGeom prst="rect">
             <a:avLst/>
@@ -3012,14 +3033,17 @@
               <a:buNone/>
             </a:pPr>
             <a:r>
-              <a:rPr lang="en-US" sz="1100" b="1" spc="150" kern="0" dirty="0">
-                <a:solidFill>
-                  <a:srgbClr val="0066CC"/>
-                </a:solidFill>
+              <a:rPr lang="en-US" sz="1000" spc="200" kern="0" dirty="0">
+                <a:solidFill>
+                  <a:srgbClr val="9A6A3C"/>
+                </a:solidFill>
+                <a:latin typeface="Corbel" pitchFamily="34" charset="0"/>
+                <a:ea typeface="Corbel" pitchFamily="34" charset="-122"/>
+                <a:cs typeface="Corbel" pitchFamily="34" charset="-120"/>
               </a:rPr>
               <a:t>UNIT 4</a:t>
             </a:r>
-            <a:endParaRPr lang="en-US" sz="1100" dirty="0"/>
+            <a:endParaRPr lang="en-US" sz="1000" dirty="0"/>
           </a:p>
         </p:txBody>
       </p:sp>
@@ -3031,8 +3055,8 @@
         </p:nvSpPr>
         <p:spPr>
           <a:xfrm>
-            <a:off x="502920" y="548640"/>
-            <a:ext cx="8046720" cy="548640"/>
+            <a:off x="566928" y="658368"/>
+            <a:ext cx="7772400" cy="658368"/>
           </a:xfrm>
           <a:prstGeom prst="rect">
             <a:avLst/>
@@ -3045,19 +3069,45 @@
           <a:lstStyle/>
           <a:p>
             <a:pPr indent="0" marL="0">
+              <a:lnSpc>
+                <a:spcPct val="100000"/>
+              </a:lnSpc>
               <a:buNone/>
             </a:pPr>
             <a:r>
-              <a:rPr lang="en-US" sz="2200" b="1" dirty="0">
-                <a:solidFill>
-                  <a:srgbClr val="111827"/>
-                </a:solidFill>
+              <a:rPr lang="en-US" sz="2500" dirty="0">
+                <a:solidFill>
+                  <a:srgbClr val="1C3140"/>
+                </a:solidFill>
+                <a:latin typeface="Constantia" pitchFamily="34" charset="0"/>
+                <a:ea typeface="Constantia" pitchFamily="34" charset="-122"/>
+                <a:cs typeface="Constantia" pitchFamily="34" charset="-120"/>
               </a:rPr>
               <a:t>Sensitivity versus precision</a:t>
             </a:r>
-            <a:endParaRPr lang="en-US" sz="2200" dirty="0"/>
-          </a:p>
-        </p:txBody>
+            <a:endParaRPr lang="en-US" sz="2500" dirty="0"/>
+          </a:p>
+        </p:txBody>
+      </p:sp>
+      <p:sp>
+        <p:nvSpPr>
+          <p:cNvPr id="4" name="Shape 2"/>
+          <p:cNvSpPr/>
+          <p:nvPr/>
+        </p:nvSpPr>
+        <p:spPr>
+          <a:xfrm>
+            <a:off x="566928" y="1335024"/>
+            <a:ext cx="566928" cy="20117"/>
+          </a:xfrm>
+          <a:prstGeom prst="rect">
+            <a:avLst/>
+          </a:prstGeom>
+          <a:solidFill>
+            <a:srgbClr val="9A6A3C"/>
+          </a:solidFill>
+          <a:ln/>
+        </p:spPr>
       </p:sp>
       <p:graphicFrame>
         <p:nvGraphicFramePr>
@@ -3074,17 +3124,17 @@
           </p:nvPr>
         </p:nvGraphicFramePr>
         <p:xfrm>
-          <a:off x="502920" y="1234440"/>
-          <a:ext cx="8138160" cy="914400"/>
+          <a:off x="566928" y="1627632"/>
+          <a:ext cx="8010144" cy="914400"/>
         </p:xfrm>
         <a:graphic>
           <a:graphicData uri="http://schemas.openxmlformats.org/drawingml/2006/table">
             <a:tbl>
               <a:tblPr/>
               <a:tblGrid>
-                <a:gridCol w="2712720"/>
-                <a:gridCol w="2712720"/>
-                <a:gridCol w="2712720"/>
+                <a:gridCol w="2670048"/>
+                <a:gridCol w="2670048"/>
+                <a:gridCol w="2670048"/>
               </a:tblGrid>
               <a:tr h="0">
                 <a:tc>
@@ -3098,45 +3148,52 @@
                       <a:r>
                         <a:rPr lang="en-US" sz="1100" b="1" dirty="0">
                           <a:solidFill>
-                            <a:srgbClr val="FFFFFF"/>
+                            <a:srgbClr val="1C3140"/>
                           </a:solidFill>
+                          <a:latin typeface="Corbel" pitchFamily="34" charset="0"/>
+                          <a:ea typeface="Corbel" pitchFamily="34" charset="-122"/>
+                          <a:cs typeface="Corbel" pitchFamily="34" charset="-120"/>
                         </a:rPr>
                         <a:t>Goal</a:t>
                       </a:r>
-                      <a:endParaRPr lang="en-US" sz="1100" dirty="0"/>
+                      <a:endParaRPr lang="en-US" sz="1100" dirty="0">
+                        <a:latin typeface="Corbel" charset="0"/>
+                        <a:ea typeface="Corbel" charset="0"/>
+                        <a:cs typeface="Corbel" charset="0"/>
+                      </a:endParaRPr>
                     </a:p>
                   </a:txBody>
-                  <a:tcPr marL="91440" marR="91440" marT="45720" marB="45720" anchor="t">
-                    <a:lnL w="6350" cap="flat" cmpd="sng" algn="ctr">
+                  <a:tcPr marL="76200" marR="76200" marT="76200" marB="76200" anchor="t">
+                    <a:lnL w="5080" cap="flat" cmpd="sng" algn="ctr">
                       <a:solidFill>
-                        <a:srgbClr val="D1D5DB"/>
+                        <a:srgbClr val="D8D3CB"/>
                       </a:solidFill>
                       <a:prstDash val="solid"/>
                       <a:round/>
                       <a:headEnd type="none" w="med" len="med"/>
                       <a:tailEnd type="none" w="med" len="med"/>
                     </a:lnL>
-                    <a:lnR w="6350" cap="flat" cmpd="sng" algn="ctr">
+                    <a:lnR w="5080" cap="flat" cmpd="sng" algn="ctr">
                       <a:solidFill>
-                        <a:srgbClr val="D1D5DB"/>
+                        <a:srgbClr val="D8D3CB"/>
                       </a:solidFill>
                       <a:prstDash val="solid"/>
                       <a:round/>
                       <a:headEnd type="none" w="med" len="med"/>
                       <a:tailEnd type="none" w="med" len="med"/>
                     </a:lnR>
-                    <a:lnT w="6350" cap="flat" cmpd="sng" algn="ctr">
+                    <a:lnT w="5080" cap="flat" cmpd="sng" algn="ctr">
                       <a:solidFill>
-                        <a:srgbClr val="D1D5DB"/>
+                        <a:srgbClr val="D8D3CB"/>
                       </a:solidFill>
                       <a:prstDash val="solid"/>
                       <a:round/>
                       <a:headEnd type="none" w="med" len="med"/>
                       <a:tailEnd type="none" w="med" len="med"/>
                     </a:lnT>
-                    <a:lnB w="6350" cap="flat" cmpd="sng" algn="ctr">
+                    <a:lnB w="5080" cap="flat" cmpd="sng" algn="ctr">
                       <a:solidFill>
-                        <a:srgbClr val="D1D5DB"/>
+                        <a:srgbClr val="D8D3CB"/>
                       </a:solidFill>
                       <a:prstDash val="solid"/>
                       <a:round/>
@@ -3144,7 +3201,7 @@
                       <a:tailEnd type="none" w="med" len="med"/>
                     </a:lnB>
                     <a:solidFill>
-                      <a:srgbClr val="004D99"/>
+                      <a:srgbClr val="F6F4F0"/>
                     </a:solidFill>
                   </a:tcPr>
                 </a:tc>
@@ -3159,45 +3216,52 @@
                       <a:r>
                         <a:rPr lang="en-US" sz="1100" b="1" dirty="0">
                           <a:solidFill>
-                            <a:srgbClr val="FFFFFF"/>
+                            <a:srgbClr val="1C3140"/>
                           </a:solidFill>
+                          <a:latin typeface="Corbel" pitchFamily="34" charset="0"/>
+                          <a:ea typeface="Corbel" pitchFamily="34" charset="-122"/>
+                          <a:cs typeface="Corbel" pitchFamily="34" charset="-120"/>
                         </a:rPr>
                         <a:t>Strategy</a:t>
                       </a:r>
-                      <a:endParaRPr lang="en-US" sz="1100" dirty="0"/>
+                      <a:endParaRPr lang="en-US" sz="1100" dirty="0">
+                        <a:latin typeface="Corbel" charset="0"/>
+                        <a:ea typeface="Corbel" charset="0"/>
+                        <a:cs typeface="Corbel" charset="0"/>
+                      </a:endParaRPr>
                     </a:p>
                   </a:txBody>
-                  <a:tcPr marL="91440" marR="91440" marT="45720" marB="45720" anchor="t">
-                    <a:lnL w="6350" cap="flat" cmpd="sng" algn="ctr">
+                  <a:tcPr marL="76200" marR="76200" marT="76200" marB="76200" anchor="t">
+                    <a:lnL w="5080" cap="flat" cmpd="sng" algn="ctr">
                       <a:solidFill>
-                        <a:srgbClr val="D1D5DB"/>
+                        <a:srgbClr val="D8D3CB"/>
                       </a:solidFill>
                       <a:prstDash val="solid"/>
                       <a:round/>
                       <a:headEnd type="none" w="med" len="med"/>
                       <a:tailEnd type="none" w="med" len="med"/>
                     </a:lnL>
-                    <a:lnR w="6350" cap="flat" cmpd="sng" algn="ctr">
+                    <a:lnR w="5080" cap="flat" cmpd="sng" algn="ctr">
                       <a:solidFill>
-                        <a:srgbClr val="D1D5DB"/>
+                        <a:srgbClr val="D8D3CB"/>
                       </a:solidFill>
                       <a:prstDash val="solid"/>
                       <a:round/>
                       <a:headEnd type="none" w="med" len="med"/>
                       <a:tailEnd type="none" w="med" len="med"/>
                     </a:lnR>
-                    <a:lnT w="6350" cap="flat" cmpd="sng" algn="ctr">
+                    <a:lnT w="5080" cap="flat" cmpd="sng" algn="ctr">
                       <a:solidFill>
-                        <a:srgbClr val="D1D5DB"/>
+                        <a:srgbClr val="D8D3CB"/>
                       </a:solidFill>
                       <a:prstDash val="solid"/>
                       <a:round/>
                       <a:headEnd type="none" w="med" len="med"/>
                       <a:tailEnd type="none" w="med" len="med"/>
                     </a:lnT>
-                    <a:lnB w="6350" cap="flat" cmpd="sng" algn="ctr">
+                    <a:lnB w="5080" cap="flat" cmpd="sng" algn="ctr">
                       <a:solidFill>
-                        <a:srgbClr val="D1D5DB"/>
+                        <a:srgbClr val="D8D3CB"/>
                       </a:solidFill>
                       <a:prstDash val="solid"/>
                       <a:round/>
@@ -3205,7 +3269,7 @@
                       <a:tailEnd type="none" w="med" len="med"/>
                     </a:lnB>
                     <a:solidFill>
-                      <a:srgbClr val="004D99"/>
+                      <a:srgbClr val="F6F4F0"/>
                     </a:solidFill>
                   </a:tcPr>
                 </a:tc>
@@ -3220,45 +3284,52 @@
                       <a:r>
                         <a:rPr lang="en-US" sz="1100" b="1" dirty="0">
                           <a:solidFill>
-                            <a:srgbClr val="FFFFFF"/>
+                            <a:srgbClr val="1C3140"/>
                           </a:solidFill>
+                          <a:latin typeface="Corbel" pitchFamily="34" charset="0"/>
+                          <a:ea typeface="Corbel" pitchFamily="34" charset="-122"/>
+                          <a:cs typeface="Corbel" pitchFamily="34" charset="-120"/>
                         </a:rPr>
                         <a:t>Cost</a:t>
                       </a:r>
-                      <a:endParaRPr lang="en-US" sz="1100" dirty="0"/>
+                      <a:endParaRPr lang="en-US" sz="1100" dirty="0">
+                        <a:latin typeface="Corbel" charset="0"/>
+                        <a:ea typeface="Corbel" charset="0"/>
+                        <a:cs typeface="Corbel" charset="0"/>
+                      </a:endParaRPr>
                     </a:p>
                   </a:txBody>
-                  <a:tcPr marL="91440" marR="91440" marT="45720" marB="45720" anchor="t">
-                    <a:lnL w="6350" cap="flat" cmpd="sng" algn="ctr">
+                  <a:tcPr marL="76200" marR="76200" marT="76200" marB="76200" anchor="t">
+                    <a:lnL w="5080" cap="flat" cmpd="sng" algn="ctr">
                       <a:solidFill>
-                        <a:srgbClr val="D1D5DB"/>
+                        <a:srgbClr val="D8D3CB"/>
                       </a:solidFill>
                       <a:prstDash val="solid"/>
                       <a:round/>
                       <a:headEnd type="none" w="med" len="med"/>
                       <a:tailEnd type="none" w="med" len="med"/>
                     </a:lnL>
-                    <a:lnR w="6350" cap="flat" cmpd="sng" algn="ctr">
+                    <a:lnR w="5080" cap="flat" cmpd="sng" algn="ctr">
                       <a:solidFill>
-                        <a:srgbClr val="D1D5DB"/>
+                        <a:srgbClr val="D8D3CB"/>
                       </a:solidFill>
                       <a:prstDash val="solid"/>
                       <a:round/>
                       <a:headEnd type="none" w="med" len="med"/>
                       <a:tailEnd type="none" w="med" len="med"/>
                     </a:lnR>
-                    <a:lnT w="6350" cap="flat" cmpd="sng" algn="ctr">
+                    <a:lnT w="5080" cap="flat" cmpd="sng" algn="ctr">
                       <a:solidFill>
-                        <a:srgbClr val="D1D5DB"/>
+                        <a:srgbClr val="D8D3CB"/>
                       </a:solidFill>
                       <a:prstDash val="solid"/>
                       <a:round/>
                       <a:headEnd type="none" w="med" len="med"/>
                       <a:tailEnd type="none" w="med" len="med"/>
                     </a:lnT>
-                    <a:lnB w="6350" cap="flat" cmpd="sng" algn="ctr">
+                    <a:lnB w="5080" cap="flat" cmpd="sng" algn="ctr">
                       <a:solidFill>
-                        <a:srgbClr val="D1D5DB"/>
+                        <a:srgbClr val="D8D3CB"/>
                       </a:solidFill>
                       <a:prstDash val="solid"/>
                       <a:round/>
@@ -3266,7 +3337,7 @@
                       <a:tailEnd type="none" w="med" len="med"/>
                     </a:lnB>
                     <a:solidFill>
-                      <a:srgbClr val="004D99"/>
+                      <a:srgbClr val="F6F4F0"/>
                     </a:solidFill>
                   </a:tcPr>
                 </a:tc>
@@ -3283,45 +3354,52 @@
                       <a:r>
                         <a:rPr lang="en-US" sz="1100" dirty="0">
                           <a:solidFill>
-                            <a:srgbClr val="374151"/>
+                            <a:srgbClr val="23282E"/>
                           </a:solidFill>
+                          <a:latin typeface="Corbel" pitchFamily="34" charset="0"/>
+                          <a:ea typeface="Corbel" pitchFamily="34" charset="-122"/>
+                          <a:cs typeface="Corbel" pitchFamily="34" charset="-120"/>
                         </a:rPr>
                         <a:t>High sensitivity (systematic review)</a:t>
                       </a:r>
-                      <a:endParaRPr lang="en-US" sz="1100" dirty="0"/>
+                      <a:endParaRPr lang="en-US" sz="1100" dirty="0">
+                        <a:latin typeface="Corbel" charset="0"/>
+                        <a:ea typeface="Corbel" charset="0"/>
+                        <a:cs typeface="Corbel" charset="0"/>
+                      </a:endParaRPr>
                     </a:p>
                   </a:txBody>
-                  <a:tcPr marL="91440" marR="91440" marT="45720" marB="45720" anchor="t">
-                    <a:lnL w="6350" cap="flat" cmpd="sng" algn="ctr">
+                  <a:tcPr marL="76200" marR="76200" marT="76200" marB="76200" anchor="t">
+                    <a:lnL w="5080" cap="flat" cmpd="sng" algn="ctr">
                       <a:solidFill>
-                        <a:srgbClr val="D1D5DB"/>
+                        <a:srgbClr val="D8D3CB"/>
                       </a:solidFill>
                       <a:prstDash val="solid"/>
                       <a:round/>
                       <a:headEnd type="none" w="med" len="med"/>
                       <a:tailEnd type="none" w="med" len="med"/>
                     </a:lnL>
-                    <a:lnR w="6350" cap="flat" cmpd="sng" algn="ctr">
+                    <a:lnR w="5080" cap="flat" cmpd="sng" algn="ctr">
                       <a:solidFill>
-                        <a:srgbClr val="D1D5DB"/>
+                        <a:srgbClr val="D8D3CB"/>
                       </a:solidFill>
                       <a:prstDash val="solid"/>
                       <a:round/>
                       <a:headEnd type="none" w="med" len="med"/>
                       <a:tailEnd type="none" w="med" len="med"/>
                     </a:lnR>
-                    <a:lnT w="6350" cap="flat" cmpd="sng" algn="ctr">
+                    <a:lnT w="5080" cap="flat" cmpd="sng" algn="ctr">
                       <a:solidFill>
-                        <a:srgbClr val="D1D5DB"/>
+                        <a:srgbClr val="D8D3CB"/>
                       </a:solidFill>
                       <a:prstDash val="solid"/>
                       <a:round/>
                       <a:headEnd type="none" w="med" len="med"/>
                       <a:tailEnd type="none" w="med" len="med"/>
                     </a:lnT>
-                    <a:lnB w="6350" cap="flat" cmpd="sng" algn="ctr">
+                    <a:lnB w="5080" cap="flat" cmpd="sng" algn="ctr">
                       <a:solidFill>
-                        <a:srgbClr val="D1D5DB"/>
+                        <a:srgbClr val="D8D3CB"/>
                       </a:solidFill>
                       <a:prstDash val="solid"/>
                       <a:round/>
@@ -3344,45 +3422,52 @@
                       <a:r>
                         <a:rPr lang="en-US" sz="1100" dirty="0">
                           <a:solidFill>
-                            <a:srgbClr val="374151"/>
+                            <a:srgbClr val="23282E"/>
                           </a:solidFill>
+                          <a:latin typeface="Corbel" pitchFamily="34" charset="0"/>
+                          <a:ea typeface="Corbel" pitchFamily="34" charset="-122"/>
+                          <a:cs typeface="Corbel" pitchFamily="34" charset="-120"/>
                         </a:rPr>
                         <a:t>Many synonyms, truncation, explode MeSH, no limits</a:t>
                       </a:r>
-                      <a:endParaRPr lang="en-US" sz="1100" dirty="0"/>
+                      <a:endParaRPr lang="en-US" sz="1100" dirty="0">
+                        <a:latin typeface="Corbel" charset="0"/>
+                        <a:ea typeface="Corbel" charset="0"/>
+                        <a:cs typeface="Corbel" charset="0"/>
+                      </a:endParaRPr>
                     </a:p>
                   </a:txBody>
-                  <a:tcPr marL="91440" marR="91440" marT="45720" marB="45720" anchor="t">
-                    <a:lnL w="6350" cap="flat" cmpd="sng" algn="ctr">
+                  <a:tcPr marL="76200" marR="76200" marT="76200" marB="76200" anchor="t">
+                    <a:lnL w="5080" cap="flat" cmpd="sng" algn="ctr">
                       <a:solidFill>
-                        <a:srgbClr val="D1D5DB"/>
+                        <a:srgbClr val="D8D3CB"/>
                       </a:solidFill>
                       <a:prstDash val="solid"/>
                       <a:round/>
                       <a:headEnd type="none" w="med" len="med"/>
                       <a:tailEnd type="none" w="med" len="med"/>
                     </a:lnL>
-                    <a:lnR w="6350" cap="flat" cmpd="sng" algn="ctr">
+                    <a:lnR w="5080" cap="flat" cmpd="sng" algn="ctr">
                       <a:solidFill>
-                        <a:srgbClr val="D1D5DB"/>
+                        <a:srgbClr val="D8D3CB"/>
                       </a:solidFill>
                       <a:prstDash val="solid"/>
                       <a:round/>
                       <a:headEnd type="none" w="med" len="med"/>
                       <a:tailEnd type="none" w="med" len="med"/>
                     </a:lnR>
-                    <a:lnT w="6350" cap="flat" cmpd="sng" algn="ctr">
+                    <a:lnT w="5080" cap="flat" cmpd="sng" algn="ctr">
                       <a:solidFill>
-                        <a:srgbClr val="D1D5DB"/>
+                        <a:srgbClr val="D8D3CB"/>
                       </a:solidFill>
                       <a:prstDash val="solid"/>
                       <a:round/>
                       <a:headEnd type="none" w="med" len="med"/>
                       <a:tailEnd type="none" w="med" len="med"/>
                     </a:lnT>
-                    <a:lnB w="6350" cap="flat" cmpd="sng" algn="ctr">
+                    <a:lnB w="5080" cap="flat" cmpd="sng" algn="ctr">
                       <a:solidFill>
-                        <a:srgbClr val="D1D5DB"/>
+                        <a:srgbClr val="D8D3CB"/>
                       </a:solidFill>
                       <a:prstDash val="solid"/>
                       <a:round/>
@@ -3405,45 +3490,52 @@
                       <a:r>
                         <a:rPr lang="en-US" sz="1100" dirty="0">
                           <a:solidFill>
-                            <a:srgbClr val="374151"/>
+                            <a:srgbClr val="23282E"/>
                           </a:solidFill>
+                          <a:latin typeface="Corbel" pitchFamily="34" charset="0"/>
+                          <a:ea typeface="Corbel" pitchFamily="34" charset="-122"/>
+                          <a:cs typeface="Corbel" pitchFamily="34" charset="-120"/>
                         </a:rPr>
                         <a:t>Thousands of records to screen</a:t>
                       </a:r>
-                      <a:endParaRPr lang="en-US" sz="1100" dirty="0"/>
+                      <a:endParaRPr lang="en-US" sz="1100" dirty="0">
+                        <a:latin typeface="Corbel" charset="0"/>
+                        <a:ea typeface="Corbel" charset="0"/>
+                        <a:cs typeface="Corbel" charset="0"/>
+                      </a:endParaRPr>
                     </a:p>
                   </a:txBody>
-                  <a:tcPr marL="91440" marR="91440" marT="45720" marB="45720" anchor="t">
-                    <a:lnL w="6350" cap="flat" cmpd="sng" algn="ctr">
+                  <a:tcPr marL="76200" marR="76200" marT="76200" marB="76200" anchor="t">
+                    <a:lnL w="5080" cap="flat" cmpd="sng" algn="ctr">
                       <a:solidFill>
-                        <a:srgbClr val="D1D5DB"/>
+                        <a:srgbClr val="D8D3CB"/>
                       </a:solidFill>
                       <a:prstDash val="solid"/>
                       <a:round/>
                       <a:headEnd type="none" w="med" len="med"/>
                       <a:tailEnd type="none" w="med" len="med"/>
                     </a:lnL>
-                    <a:lnR w="6350" cap="flat" cmpd="sng" algn="ctr">
+                    <a:lnR w="5080" cap="flat" cmpd="sng" algn="ctr">
                       <a:solidFill>
-                        <a:srgbClr val="D1D5DB"/>
+                        <a:srgbClr val="D8D3CB"/>
                       </a:solidFill>
                       <a:prstDash val="solid"/>
                       <a:round/>
                       <a:headEnd type="none" w="med" len="med"/>
                       <a:tailEnd type="none" w="med" len="med"/>
                     </a:lnR>
-                    <a:lnT w="6350" cap="flat" cmpd="sng" algn="ctr">
+                    <a:lnT w="5080" cap="flat" cmpd="sng" algn="ctr">
                       <a:solidFill>
-                        <a:srgbClr val="D1D5DB"/>
+                        <a:srgbClr val="D8D3CB"/>
                       </a:solidFill>
                       <a:prstDash val="solid"/>
                       <a:round/>
                       <a:headEnd type="none" w="med" len="med"/>
                       <a:tailEnd type="none" w="med" len="med"/>
                     </a:lnT>
-                    <a:lnB w="6350" cap="flat" cmpd="sng" algn="ctr">
+                    <a:lnB w="5080" cap="flat" cmpd="sng" algn="ctr">
                       <a:solidFill>
-                        <a:srgbClr val="D1D5DB"/>
+                        <a:srgbClr val="D8D3CB"/>
                       </a:solidFill>
                       <a:prstDash val="solid"/>
                       <a:round/>
@@ -3468,230 +3560,52 @@
                       <a:r>
                         <a:rPr lang="en-US" sz="1100" dirty="0">
                           <a:solidFill>
-                            <a:srgbClr val="374151"/>
+                            <a:srgbClr val="23282E"/>
                           </a:solidFill>
+                          <a:latin typeface="Corbel" pitchFamily="34" charset="0"/>
+                          <a:ea typeface="Corbel" pitchFamily="34" charset="-122"/>
+                          <a:cs typeface="Corbel" pitchFamily="34" charset="-120"/>
                         </a:rPr>
                         <a:t>High precision (quick scoping)</a:t>
                       </a:r>
-                      <a:endParaRPr lang="en-US" sz="1100" dirty="0"/>
+                      <a:endParaRPr lang="en-US" sz="1100" dirty="0">
+                        <a:latin typeface="Corbel" charset="0"/>
+                        <a:ea typeface="Corbel" charset="0"/>
+                        <a:cs typeface="Corbel" charset="0"/>
+                      </a:endParaRPr>
                     </a:p>
                   </a:txBody>
-                  <a:tcPr marL="91440" marR="91440" marT="45720" marB="45720" anchor="t">
-                    <a:lnL w="6350" cap="flat" cmpd="sng" algn="ctr">
+                  <a:tcPr marL="76200" marR="76200" marT="76200" marB="76200" anchor="t">
+                    <a:lnL w="5080" cap="flat" cmpd="sng" algn="ctr">
                       <a:solidFill>
-                        <a:srgbClr val="D1D5DB"/>
+                        <a:srgbClr val="D8D3CB"/>
                       </a:solidFill>
                       <a:prstDash val="solid"/>
                       <a:round/>
                       <a:headEnd type="none" w="med" len="med"/>
                       <a:tailEnd type="none" w="med" len="med"/>
                     </a:lnL>
-                    <a:lnR w="6350" cap="flat" cmpd="sng" algn="ctr">
+                    <a:lnR w="5080" cap="flat" cmpd="sng" algn="ctr">
                       <a:solidFill>
-                        <a:srgbClr val="D1D5DB"/>
+                        <a:srgbClr val="D8D3CB"/>
                       </a:solidFill>
                       <a:prstDash val="solid"/>
                       <a:round/>
                       <a:headEnd type="none" w="med" len="med"/>
                       <a:tailEnd type="none" w="med" len="med"/>
                     </a:lnR>
-                    <a:lnT w="6350" cap="flat" cmpd="sng" algn="ctr">
+                    <a:lnT w="5080" cap="flat" cmpd="sng" algn="ctr">
                       <a:solidFill>
-                        <a:srgbClr val="D1D5DB"/>
+                        <a:srgbClr val="D8D3CB"/>
                       </a:solidFill>
                       <a:prstDash val="solid"/>
                       <a:round/>
                       <a:headEnd type="none" w="med" len="med"/>
                       <a:tailEnd type="none" w="med" len="med"/>
                     </a:lnT>
-                    <a:lnB w="6350" cap="flat" cmpd="sng" algn="ctr">
+                    <a:lnB w="5080" cap="flat" cmpd="sng" algn="ctr">
                       <a:solidFill>
-                        <a:srgbClr val="D1D5DB"/>
-                      </a:solidFill>
-                      <a:prstDash val="solid"/>
-                      <a:round/>
-                      <a:headEnd type="none" w="med" len="med"/>
-                      <a:tailEnd type="none" w="med" len="med"/>
-                    </a:lnB>
-                    <a:solidFill>
-                      <a:srgbClr val="F9FAFB"/>
-                    </a:solidFill>
-                  </a:tcPr>
-                </a:tc>
-                <a:tc>
-                  <a:txBody>
-                    <a:bodyPr/>
-                    <a:lstStyle/>
-                    <a:p>
-                      <a:pPr indent="0" marL="0">
-                        <a:buNone/>
-                      </a:pPr>
-                      <a:r>
-                        <a:rPr lang="en-US" sz="1100" dirty="0">
-                          <a:solidFill>
-                            <a:srgbClr val="374151"/>
-                          </a:solidFill>
-                        </a:rPr>
-                        <a:t>Few terms, major topic, title field, recent years</a:t>
-                      </a:r>
-                      <a:endParaRPr lang="en-US" sz="1100" dirty="0"/>
-                    </a:p>
-                  </a:txBody>
-                  <a:tcPr marL="91440" marR="91440" marT="45720" marB="45720" anchor="t">
-                    <a:lnL w="6350" cap="flat" cmpd="sng" algn="ctr">
-                      <a:solidFill>
-                        <a:srgbClr val="D1D5DB"/>
-                      </a:solidFill>
-                      <a:prstDash val="solid"/>
-                      <a:round/>
-                      <a:headEnd type="none" w="med" len="med"/>
-                      <a:tailEnd type="none" w="med" len="med"/>
-                    </a:lnL>
-                    <a:lnR w="6350" cap="flat" cmpd="sng" algn="ctr">
-                      <a:solidFill>
-                        <a:srgbClr val="D1D5DB"/>
-                      </a:solidFill>
-                      <a:prstDash val="solid"/>
-                      <a:round/>
-                      <a:headEnd type="none" w="med" len="med"/>
-                      <a:tailEnd type="none" w="med" len="med"/>
-                    </a:lnR>
-                    <a:lnT w="6350" cap="flat" cmpd="sng" algn="ctr">
-                      <a:solidFill>
-                        <a:srgbClr val="D1D5DB"/>
-                      </a:solidFill>
-                      <a:prstDash val="solid"/>
-                      <a:round/>
-                      <a:headEnd type="none" w="med" len="med"/>
-                      <a:tailEnd type="none" w="med" len="med"/>
-                    </a:lnT>
-                    <a:lnB w="6350" cap="flat" cmpd="sng" algn="ctr">
-                      <a:solidFill>
-                        <a:srgbClr val="D1D5DB"/>
-                      </a:solidFill>
-                      <a:prstDash val="solid"/>
-                      <a:round/>
-                      <a:headEnd type="none" w="med" len="med"/>
-                      <a:tailEnd type="none" w="med" len="med"/>
-                    </a:lnB>
-                    <a:solidFill>
-                      <a:srgbClr val="F9FAFB"/>
-                    </a:solidFill>
-                  </a:tcPr>
-                </a:tc>
-                <a:tc>
-                  <a:txBody>
-                    <a:bodyPr/>
-                    <a:lstStyle/>
-                    <a:p>
-                      <a:pPr indent="0" marL="0">
-                        <a:buNone/>
-                      </a:pPr>
-                      <a:r>
-                        <a:rPr lang="en-US" sz="1100" dirty="0">
-                          <a:solidFill>
-                            <a:srgbClr val="374151"/>
-                          </a:solidFill>
-                        </a:rPr>
-                        <a:t>Relevant studies will be missed</a:t>
-                      </a:r>
-                      <a:endParaRPr lang="en-US" sz="1100" dirty="0"/>
-                    </a:p>
-                  </a:txBody>
-                  <a:tcPr marL="91440" marR="91440" marT="45720" marB="45720" anchor="t">
-                    <a:lnL w="6350" cap="flat" cmpd="sng" algn="ctr">
-                      <a:solidFill>
-                        <a:srgbClr val="D1D5DB"/>
-                      </a:solidFill>
-                      <a:prstDash val="solid"/>
-                      <a:round/>
-                      <a:headEnd type="none" w="med" len="med"/>
-                      <a:tailEnd type="none" w="med" len="med"/>
-                    </a:lnL>
-                    <a:lnR w="6350" cap="flat" cmpd="sng" algn="ctr">
-                      <a:solidFill>
-                        <a:srgbClr val="D1D5DB"/>
-                      </a:solidFill>
-                      <a:prstDash val="solid"/>
-                      <a:round/>
-                      <a:headEnd type="none" w="med" len="med"/>
-                      <a:tailEnd type="none" w="med" len="med"/>
-                    </a:lnR>
-                    <a:lnT w="6350" cap="flat" cmpd="sng" algn="ctr">
-                      <a:solidFill>
-                        <a:srgbClr val="D1D5DB"/>
-                      </a:solidFill>
-                      <a:prstDash val="solid"/>
-                      <a:round/>
-                      <a:headEnd type="none" w="med" len="med"/>
-                      <a:tailEnd type="none" w="med" len="med"/>
-                    </a:lnT>
-                    <a:lnB w="6350" cap="flat" cmpd="sng" algn="ctr">
-                      <a:solidFill>
-                        <a:srgbClr val="D1D5DB"/>
-                      </a:solidFill>
-                      <a:prstDash val="solid"/>
-                      <a:round/>
-                      <a:headEnd type="none" w="med" len="med"/>
-                      <a:tailEnd type="none" w="med" len="med"/>
-                    </a:lnB>
-                    <a:solidFill>
-                      <a:srgbClr val="F9FAFB"/>
-                    </a:solidFill>
-                  </a:tcPr>
-                </a:tc>
-              </a:tr>
-              <a:tr h="0">
-                <a:tc>
-                  <a:txBody>
-                    <a:bodyPr/>
-                    <a:lstStyle/>
-                    <a:p>
-                      <a:pPr indent="0" marL="0">
-                        <a:buNone/>
-                      </a:pPr>
-                      <a:r>
-                        <a:rPr lang="en-US" sz="1100" dirty="0">
-                          <a:solidFill>
-                            <a:srgbClr val="374151"/>
-                          </a:solidFill>
-                        </a:rPr>
-                        <a:t>Balanced (thesis chapter)</a:t>
-                      </a:r>
-                      <a:endParaRPr lang="en-US" sz="1100" dirty="0"/>
-                    </a:p>
-                  </a:txBody>
-                  <a:tcPr marL="91440" marR="91440" marT="45720" marB="45720" anchor="t">
-                    <a:lnL w="6350" cap="flat" cmpd="sng" algn="ctr">
-                      <a:solidFill>
-                        <a:srgbClr val="D1D5DB"/>
-                      </a:solidFill>
-                      <a:prstDash val="solid"/>
-                      <a:round/>
-                      <a:headEnd type="none" w="med" len="med"/>
-                      <a:tailEnd type="none" w="med" len="med"/>
-                    </a:lnL>
-                    <a:lnR w="6350" cap="flat" cmpd="sng" algn="ctr">
-                      <a:solidFill>
-                        <a:srgbClr val="D1D5DB"/>
-                      </a:solidFill>
-                      <a:prstDash val="solid"/>
-                      <a:round/>
-                      <a:headEnd type="none" w="med" len="med"/>
-                      <a:tailEnd type="none" w="med" len="med"/>
-                    </a:lnR>
-                    <a:lnT w="6350" cap="flat" cmpd="sng" algn="ctr">
-                      <a:solidFill>
-                        <a:srgbClr val="D1D5DB"/>
-                      </a:solidFill>
-                      <a:prstDash val="solid"/>
-                      <a:round/>
-                      <a:headEnd type="none" w="med" len="med"/>
-                      <a:tailEnd type="none" w="med" len="med"/>
-                    </a:lnT>
-                    <a:lnB w="6350" cap="flat" cmpd="sng" algn="ctr">
-                      <a:solidFill>
-                        <a:srgbClr val="D1D5DB"/>
+                        <a:srgbClr val="D8D3CB"/>
                       </a:solidFill>
                       <a:prstDash val="solid"/>
                       <a:round/>
@@ -3714,45 +3628,52 @@
                       <a:r>
                         <a:rPr lang="en-US" sz="1100" dirty="0">
                           <a:solidFill>
-                            <a:srgbClr val="374151"/>
+                            <a:srgbClr val="23282E"/>
                           </a:solidFill>
+                          <a:latin typeface="Corbel" pitchFamily="34" charset="0"/>
+                          <a:ea typeface="Corbel" pitchFamily="34" charset="-122"/>
+                          <a:cs typeface="Corbel" pitchFamily="34" charset="-120"/>
                         </a:rPr>
-                        <a:t>MeSH OR free-text per concept, sensible date limit</a:t>
+                        <a:t>Few terms, major topic, title field, recent years</a:t>
                       </a:r>
-                      <a:endParaRPr lang="en-US" sz="1100" dirty="0"/>
+                      <a:endParaRPr lang="en-US" sz="1100" dirty="0">
+                        <a:latin typeface="Corbel" charset="0"/>
+                        <a:ea typeface="Corbel" charset="0"/>
+                        <a:cs typeface="Corbel" charset="0"/>
+                      </a:endParaRPr>
                     </a:p>
                   </a:txBody>
-                  <a:tcPr marL="91440" marR="91440" marT="45720" marB="45720" anchor="t">
-                    <a:lnL w="6350" cap="flat" cmpd="sng" algn="ctr">
+                  <a:tcPr marL="76200" marR="76200" marT="76200" marB="76200" anchor="t">
+                    <a:lnL w="5080" cap="flat" cmpd="sng" algn="ctr">
                       <a:solidFill>
-                        <a:srgbClr val="D1D5DB"/>
+                        <a:srgbClr val="D8D3CB"/>
                       </a:solidFill>
                       <a:prstDash val="solid"/>
                       <a:round/>
                       <a:headEnd type="none" w="med" len="med"/>
                       <a:tailEnd type="none" w="med" len="med"/>
                     </a:lnL>
-                    <a:lnR w="6350" cap="flat" cmpd="sng" algn="ctr">
+                    <a:lnR w="5080" cap="flat" cmpd="sng" algn="ctr">
                       <a:solidFill>
-                        <a:srgbClr val="D1D5DB"/>
+                        <a:srgbClr val="D8D3CB"/>
                       </a:solidFill>
                       <a:prstDash val="solid"/>
                       <a:round/>
                       <a:headEnd type="none" w="med" len="med"/>
                       <a:tailEnd type="none" w="med" len="med"/>
                     </a:lnR>
-                    <a:lnT w="6350" cap="flat" cmpd="sng" algn="ctr">
+                    <a:lnT w="5080" cap="flat" cmpd="sng" algn="ctr">
                       <a:solidFill>
-                        <a:srgbClr val="D1D5DB"/>
+                        <a:srgbClr val="D8D3CB"/>
                       </a:solidFill>
                       <a:prstDash val="solid"/>
                       <a:round/>
                       <a:headEnd type="none" w="med" len="med"/>
                       <a:tailEnd type="none" w="med" len="med"/>
                     </a:lnT>
-                    <a:lnB w="6350" cap="flat" cmpd="sng" algn="ctr">
+                    <a:lnB w="5080" cap="flat" cmpd="sng" algn="ctr">
                       <a:solidFill>
-                        <a:srgbClr val="D1D5DB"/>
+                        <a:srgbClr val="D8D3CB"/>
                       </a:solidFill>
                       <a:prstDash val="solid"/>
                       <a:round/>
@@ -3775,45 +3696,258 @@
                       <a:r>
                         <a:rPr lang="en-US" sz="1100" dirty="0">
                           <a:solidFill>
-                            <a:srgbClr val="374151"/>
+                            <a:srgbClr val="23282E"/>
                           </a:solidFill>
+                          <a:latin typeface="Corbel" pitchFamily="34" charset="0"/>
+                          <a:ea typeface="Corbel" pitchFamily="34" charset="-122"/>
+                          <a:cs typeface="Corbel" pitchFamily="34" charset="-120"/>
                         </a:rPr>
-                        <a:t>Manageable; state the limits used</a:t>
+                        <a:t>Relevant studies will be missed</a:t>
                       </a:r>
-                      <a:endParaRPr lang="en-US" sz="1100" dirty="0"/>
+                      <a:endParaRPr lang="en-US" sz="1100" dirty="0">
+                        <a:latin typeface="Corbel" charset="0"/>
+                        <a:ea typeface="Corbel" charset="0"/>
+                        <a:cs typeface="Corbel" charset="0"/>
+                      </a:endParaRPr>
                     </a:p>
                   </a:txBody>
-                  <a:tcPr marL="91440" marR="91440" marT="45720" marB="45720" anchor="t">
-                    <a:lnL w="6350" cap="flat" cmpd="sng" algn="ctr">
+                  <a:tcPr marL="76200" marR="76200" marT="76200" marB="76200" anchor="t">
+                    <a:lnL w="5080" cap="flat" cmpd="sng" algn="ctr">
                       <a:solidFill>
-                        <a:srgbClr val="D1D5DB"/>
+                        <a:srgbClr val="D8D3CB"/>
                       </a:solidFill>
                       <a:prstDash val="solid"/>
                       <a:round/>
                       <a:headEnd type="none" w="med" len="med"/>
                       <a:tailEnd type="none" w="med" len="med"/>
                     </a:lnL>
-                    <a:lnR w="6350" cap="flat" cmpd="sng" algn="ctr">
+                    <a:lnR w="5080" cap="flat" cmpd="sng" algn="ctr">
                       <a:solidFill>
-                        <a:srgbClr val="D1D5DB"/>
+                        <a:srgbClr val="D8D3CB"/>
                       </a:solidFill>
                       <a:prstDash val="solid"/>
                       <a:round/>
                       <a:headEnd type="none" w="med" len="med"/>
                       <a:tailEnd type="none" w="med" len="med"/>
                     </a:lnR>
-                    <a:lnT w="6350" cap="flat" cmpd="sng" algn="ctr">
+                    <a:lnT w="5080" cap="flat" cmpd="sng" algn="ctr">
                       <a:solidFill>
-                        <a:srgbClr val="D1D5DB"/>
+                        <a:srgbClr val="D8D3CB"/>
                       </a:solidFill>
                       <a:prstDash val="solid"/>
                       <a:round/>
                       <a:headEnd type="none" w="med" len="med"/>
                       <a:tailEnd type="none" w="med" len="med"/>
                     </a:lnT>
-                    <a:lnB w="6350" cap="flat" cmpd="sng" algn="ctr">
+                    <a:lnB w="5080" cap="flat" cmpd="sng" algn="ctr">
                       <a:solidFill>
-                        <a:srgbClr val="D1D5DB"/>
+                        <a:srgbClr val="D8D3CB"/>
+                      </a:solidFill>
+                      <a:prstDash val="solid"/>
+                      <a:round/>
+                      <a:headEnd type="none" w="med" len="med"/>
+                      <a:tailEnd type="none" w="med" len="med"/>
+                    </a:lnB>
+                    <a:solidFill>
+                      <a:srgbClr val="FFFFFF"/>
+                    </a:solidFill>
+                  </a:tcPr>
+                </a:tc>
+              </a:tr>
+              <a:tr h="0">
+                <a:tc>
+                  <a:txBody>
+                    <a:bodyPr/>
+                    <a:lstStyle/>
+                    <a:p>
+                      <a:pPr indent="0" marL="0">
+                        <a:buNone/>
+                      </a:pPr>
+                      <a:r>
+                        <a:rPr lang="en-US" sz="1100" dirty="0">
+                          <a:solidFill>
+                            <a:srgbClr val="23282E"/>
+                          </a:solidFill>
+                          <a:latin typeface="Corbel" pitchFamily="34" charset="0"/>
+                          <a:ea typeface="Corbel" pitchFamily="34" charset="-122"/>
+                          <a:cs typeface="Corbel" pitchFamily="34" charset="-120"/>
+                        </a:rPr>
+                        <a:t>Balanced (thesis chapter)</a:t>
+                      </a:r>
+                      <a:endParaRPr lang="en-US" sz="1100" dirty="0">
+                        <a:latin typeface="Corbel" charset="0"/>
+                        <a:ea typeface="Corbel" charset="0"/>
+                        <a:cs typeface="Corbel" charset="0"/>
+                      </a:endParaRPr>
+                    </a:p>
+                  </a:txBody>
+                  <a:tcPr marL="76200" marR="76200" marT="76200" marB="76200" anchor="t">
+                    <a:lnL w="5080" cap="flat" cmpd="sng" algn="ctr">
+                      <a:solidFill>
+                        <a:srgbClr val="D8D3CB"/>
+                      </a:solidFill>
+                      <a:prstDash val="solid"/>
+                      <a:round/>
+                      <a:headEnd type="none" w="med" len="med"/>
+                      <a:tailEnd type="none" w="med" len="med"/>
+                    </a:lnL>
+                    <a:lnR w="5080" cap="flat" cmpd="sng" algn="ctr">
+                      <a:solidFill>
+                        <a:srgbClr val="D8D3CB"/>
+                      </a:solidFill>
+                      <a:prstDash val="solid"/>
+                      <a:round/>
+                      <a:headEnd type="none" w="med" len="med"/>
+                      <a:tailEnd type="none" w="med" len="med"/>
+                    </a:lnR>
+                    <a:lnT w="5080" cap="flat" cmpd="sng" algn="ctr">
+                      <a:solidFill>
+                        <a:srgbClr val="D8D3CB"/>
+                      </a:solidFill>
+                      <a:prstDash val="solid"/>
+                      <a:round/>
+                      <a:headEnd type="none" w="med" len="med"/>
+                      <a:tailEnd type="none" w="med" len="med"/>
+                    </a:lnT>
+                    <a:lnB w="5080" cap="flat" cmpd="sng" algn="ctr">
+                      <a:solidFill>
+                        <a:srgbClr val="D8D3CB"/>
+                      </a:solidFill>
+                      <a:prstDash val="solid"/>
+                      <a:round/>
+                      <a:headEnd type="none" w="med" len="med"/>
+                      <a:tailEnd type="none" w="med" len="med"/>
+                    </a:lnB>
+                    <a:solidFill>
+                      <a:srgbClr val="FFFFFF"/>
+                    </a:solidFill>
+                  </a:tcPr>
+                </a:tc>
+                <a:tc>
+                  <a:txBody>
+                    <a:bodyPr/>
+                    <a:lstStyle/>
+                    <a:p>
+                      <a:pPr indent="0" marL="0">
+                        <a:buNone/>
+                      </a:pPr>
+                      <a:r>
+                        <a:rPr lang="en-US" sz="1100" dirty="0">
+                          <a:solidFill>
+                            <a:srgbClr val="23282E"/>
+                          </a:solidFill>
+                          <a:latin typeface="Corbel" pitchFamily="34" charset="0"/>
+                          <a:ea typeface="Corbel" pitchFamily="34" charset="-122"/>
+                          <a:cs typeface="Corbel" pitchFamily="34" charset="-120"/>
+                        </a:rPr>
+                        <a:t>MeSH OR free-text per concept, sensible date limit</a:t>
+                      </a:r>
+                      <a:endParaRPr lang="en-US" sz="1100" dirty="0">
+                        <a:latin typeface="Corbel" charset="0"/>
+                        <a:ea typeface="Corbel" charset="0"/>
+                        <a:cs typeface="Corbel" charset="0"/>
+                      </a:endParaRPr>
+                    </a:p>
+                  </a:txBody>
+                  <a:tcPr marL="76200" marR="76200" marT="76200" marB="76200" anchor="t">
+                    <a:lnL w="5080" cap="flat" cmpd="sng" algn="ctr">
+                      <a:solidFill>
+                        <a:srgbClr val="D8D3CB"/>
+                      </a:solidFill>
+                      <a:prstDash val="solid"/>
+                      <a:round/>
+                      <a:headEnd type="none" w="med" len="med"/>
+                      <a:tailEnd type="none" w="med" len="med"/>
+                    </a:lnL>
+                    <a:lnR w="5080" cap="flat" cmpd="sng" algn="ctr">
+                      <a:solidFill>
+                        <a:srgbClr val="D8D3CB"/>
+                      </a:solidFill>
+                      <a:prstDash val="solid"/>
+                      <a:round/>
+                      <a:headEnd type="none" w="med" len="med"/>
+                      <a:tailEnd type="none" w="med" len="med"/>
+                    </a:lnR>
+                    <a:lnT w="5080" cap="flat" cmpd="sng" algn="ctr">
+                      <a:solidFill>
+                        <a:srgbClr val="D8D3CB"/>
+                      </a:solidFill>
+                      <a:prstDash val="solid"/>
+                      <a:round/>
+                      <a:headEnd type="none" w="med" len="med"/>
+                      <a:tailEnd type="none" w="med" len="med"/>
+                    </a:lnT>
+                    <a:lnB w="5080" cap="flat" cmpd="sng" algn="ctr">
+                      <a:solidFill>
+                        <a:srgbClr val="D8D3CB"/>
+                      </a:solidFill>
+                      <a:prstDash val="solid"/>
+                      <a:round/>
+                      <a:headEnd type="none" w="med" len="med"/>
+                      <a:tailEnd type="none" w="med" len="med"/>
+                    </a:lnB>
+                    <a:solidFill>
+                      <a:srgbClr val="FFFFFF"/>
+                    </a:solidFill>
+                  </a:tcPr>
+                </a:tc>
+                <a:tc>
+                  <a:txBody>
+                    <a:bodyPr/>
+                    <a:lstStyle/>
+                    <a:p>
+                      <a:pPr indent="0" marL="0">
+                        <a:buNone/>
+                      </a:pPr>
+                      <a:r>
+                        <a:rPr lang="en-US" sz="1100" dirty="0">
+                          <a:solidFill>
+                            <a:srgbClr val="23282E"/>
+                          </a:solidFill>
+                          <a:latin typeface="Corbel" pitchFamily="34" charset="0"/>
+                          <a:ea typeface="Corbel" pitchFamily="34" charset="-122"/>
+                          <a:cs typeface="Corbel" pitchFamily="34" charset="-120"/>
+                        </a:rPr>
+                        <a:t>Manageable; state the limits used</a:t>
+                      </a:r>
+                      <a:endParaRPr lang="en-US" sz="1100" dirty="0">
+                        <a:latin typeface="Corbel" charset="0"/>
+                        <a:ea typeface="Corbel" charset="0"/>
+                        <a:cs typeface="Corbel" charset="0"/>
+                      </a:endParaRPr>
+                    </a:p>
+                  </a:txBody>
+                  <a:tcPr marL="76200" marR="76200" marT="76200" marB="76200" anchor="t">
+                    <a:lnL w="5080" cap="flat" cmpd="sng" algn="ctr">
+                      <a:solidFill>
+                        <a:srgbClr val="D8D3CB"/>
+                      </a:solidFill>
+                      <a:prstDash val="solid"/>
+                      <a:round/>
+                      <a:headEnd type="none" w="med" len="med"/>
+                      <a:tailEnd type="none" w="med" len="med"/>
+                    </a:lnL>
+                    <a:lnR w="5080" cap="flat" cmpd="sng" algn="ctr">
+                      <a:solidFill>
+                        <a:srgbClr val="D8D3CB"/>
+                      </a:solidFill>
+                      <a:prstDash val="solid"/>
+                      <a:round/>
+                      <a:headEnd type="none" w="med" len="med"/>
+                      <a:tailEnd type="none" w="med" len="med"/>
+                    </a:lnR>
+                    <a:lnT w="5080" cap="flat" cmpd="sng" algn="ctr">
+                      <a:solidFill>
+                        <a:srgbClr val="D8D3CB"/>
+                      </a:solidFill>
+                      <a:prstDash val="solid"/>
+                      <a:round/>
+                      <a:headEnd type="none" w="med" len="med"/>
+                      <a:tailEnd type="none" w="med" len="med"/>
+                    </a:lnT>
+                    <a:lnB w="5080" cap="flat" cmpd="sng" algn="ctr">
+                      <a:solidFill>
+                        <a:srgbClr val="D8D3CB"/>
                       </a:solidFill>
                       <a:prstDash val="solid"/>
                       <a:round/>
@@ -3842,8 +3976,8 @@
         </p:nvSpPr>
         <p:spPr>
           <a:xfrm>
-            <a:off x="8503920" y="4709160"/>
-            <a:ext cx="800000" cy="300000"/>
+            <a:off x="566928" y="4700016"/>
+            <a:ext cx="914400" cy="274320"/>
           </a:xfrm>
           <a:prstGeom prst="rect">
             <a:avLst/>
@@ -3858,10 +3992,13 @@
           <a:bodyPr/>
           <a:lstStyle>
             <a:lvl1pPr>
-              <a:defRPr sz="1000">
-                <a:solidFill>
-                  <a:srgbClr val="6B7280"/>
-                </a:solidFill>
+              <a:defRPr sz="900">
+                <a:solidFill>
+                  <a:srgbClr val="5F6B76"/>
+                </a:solidFill>
+                <a:latin typeface="Corbel"/>
+                <a:ea typeface="Corbel"/>
+                <a:cs typeface="Corbel"/>
               </a:defRPr>
             </a:lvl1pPr>
           </a:lstStyle>
@@ -3908,8 +4045,8 @@
         </p:nvSpPr>
         <p:spPr>
           <a:xfrm>
-            <a:off x="502920" y="292608"/>
-            <a:ext cx="8046720" cy="228600"/>
+            <a:off x="566928" y="384048"/>
+            <a:ext cx="7772400" cy="237744"/>
           </a:xfrm>
           <a:prstGeom prst="rect">
             <a:avLst/>
@@ -3925,14 +4062,17 @@
               <a:buNone/>
             </a:pPr>
             <a:r>
-              <a:rPr lang="en-US" sz="1100" b="1" spc="150" kern="0" dirty="0">
-                <a:solidFill>
-                  <a:srgbClr val="0066CC"/>
-                </a:solidFill>
+              <a:rPr lang="en-US" sz="1000" spc="200" kern="0" dirty="0">
+                <a:solidFill>
+                  <a:srgbClr val="9A6A3C"/>
+                </a:solidFill>
+                <a:latin typeface="Corbel" pitchFamily="34" charset="0"/>
+                <a:ea typeface="Corbel" pitchFamily="34" charset="-122"/>
+                <a:cs typeface="Corbel" pitchFamily="34" charset="-120"/>
               </a:rPr>
               <a:t>UNIT 4</a:t>
             </a:r>
-            <a:endParaRPr lang="en-US" sz="1100" dirty="0"/>
+            <a:endParaRPr lang="en-US" sz="1000" dirty="0"/>
           </a:p>
         </p:txBody>
       </p:sp>
@@ -3944,8 +4084,8 @@
         </p:nvSpPr>
         <p:spPr>
           <a:xfrm>
-            <a:off x="502920" y="548640"/>
-            <a:ext cx="8046720" cy="640080"/>
+            <a:off x="566928" y="658368"/>
+            <a:ext cx="7772400" cy="658368"/>
           </a:xfrm>
           <a:prstGeom prst="rect">
             <a:avLst/>
@@ -3958,30 +4098,56 @@
           <a:lstStyle/>
           <a:p>
             <a:pPr indent="0" marL="0">
+              <a:lnSpc>
+                <a:spcPct val="100000"/>
+              </a:lnSpc>
               <a:buNone/>
             </a:pPr>
             <a:r>
-              <a:rPr lang="en-US" sz="2400" b="1" dirty="0">
-                <a:solidFill>
-                  <a:srgbClr val="111827"/>
-                </a:solidFill>
+              <a:rPr lang="en-US" sz="2500" dirty="0">
+                <a:solidFill>
+                  <a:srgbClr val="1C3140"/>
+                </a:solidFill>
+                <a:latin typeface="Constantia" pitchFamily="34" charset="0"/>
+                <a:ea typeface="Constantia" pitchFamily="34" charset="-122"/>
+                <a:cs typeface="Constantia" pitchFamily="34" charset="-120"/>
               </a:rPr>
               <a:t>Documenting the search (1/2)</a:t>
             </a:r>
-            <a:endParaRPr lang="en-US" sz="2400" dirty="0"/>
-          </a:p>
-        </p:txBody>
-      </p:sp>
-      <p:sp>
-        <p:nvSpPr>
-          <p:cNvPr id="4" name="Text 2"/>
+            <a:endParaRPr lang="en-US" sz="2500" dirty="0"/>
+          </a:p>
+        </p:txBody>
+      </p:sp>
+      <p:sp>
+        <p:nvSpPr>
+          <p:cNvPr id="4" name="Shape 2"/>
           <p:cNvSpPr/>
           <p:nvPr/>
         </p:nvSpPr>
         <p:spPr>
           <a:xfrm>
-            <a:off x="685800" y="1325880"/>
-            <a:ext cx="7772400" cy="3200400"/>
+            <a:off x="566928" y="1335024"/>
+            <a:ext cx="566928" cy="20117"/>
+          </a:xfrm>
+          <a:prstGeom prst="rect">
+            <a:avLst/>
+          </a:prstGeom>
+          <a:solidFill>
+            <a:srgbClr val="9A6A3C"/>
+          </a:solidFill>
+          <a:ln/>
+        </p:spPr>
+      </p:sp>
+      <p:sp>
+        <p:nvSpPr>
+          <p:cNvPr id="5" name="Text 3"/>
+          <p:cNvSpPr/>
+          <p:nvPr/>
+        </p:nvSpPr>
+        <p:spPr>
+          <a:xfrm>
+            <a:off x="713232" y="1664208"/>
+            <a:ext cx="7498080" cy="2788920"/>
           </a:xfrm>
           <a:prstGeom prst="rect">
             <a:avLst/>
@@ -3995,19 +4161,22 @@
           <a:p>
             <a:pPr marL="342900" indent="-342900">
               <a:lnSpc>
-                <a:spcPct val="125000"/>
+                <a:spcPct val="130000"/>
               </a:lnSpc>
               <a:spcAft>
-                <a:spcPts val="800"/>
+                <a:spcPts val="1100"/>
               </a:spcAft>
               <a:buSzPct val="100000"/>
-              <a:buChar char="•"/>
+              <a:buChar char="–"/>
             </a:pPr>
             <a:r>
               <a:rPr lang="en-US" sz="1500" dirty="0">
                 <a:solidFill>
-                  <a:srgbClr val="374151"/>
-                </a:solidFill>
+                  <a:srgbClr val="23282E"/>
+                </a:solidFill>
+                <a:latin typeface="Corbel" pitchFamily="34" charset="0"/>
+                <a:ea typeface="Corbel" pitchFamily="34" charset="-122"/>
+                <a:cs typeface="Corbel" pitchFamily="34" charset="-120"/>
               </a:rPr>
               <a:t>Record for each database: its name, the platform, the date searched, the full strategy line by line, and the number of records returned</a:t>
             </a:r>
@@ -4016,19 +4185,22 @@
           <a:p>
             <a:pPr marL="342900" indent="-342900">
               <a:lnSpc>
-                <a:spcPct val="125000"/>
+                <a:spcPct val="130000"/>
               </a:lnSpc>
               <a:spcAft>
-                <a:spcPts val="800"/>
+                <a:spcPts val="1100"/>
               </a:spcAft>
               <a:buSzPct val="100000"/>
-              <a:buChar char="•"/>
+              <a:buChar char="–"/>
             </a:pPr>
             <a:r>
               <a:rPr lang="en-US" sz="1500" dirty="0">
                 <a:solidFill>
-                  <a:srgbClr val="374151"/>
-                </a:solidFill>
+                  <a:srgbClr val="23282E"/>
+                </a:solidFill>
+                <a:latin typeface="Corbel" pitchFamily="34" charset="0"/>
+                <a:ea typeface="Corbel" pitchFamily="34" charset="-122"/>
+                <a:cs typeface="Corbel" pitchFamily="34" charset="-120"/>
               </a:rPr>
               <a:t>The date matters because databases change daily and the search must be reproducible</a:t>
             </a:r>
@@ -4037,19 +4209,22 @@
           <a:p>
             <a:pPr marL="342900" indent="-342900">
               <a:lnSpc>
-                <a:spcPct val="125000"/>
+                <a:spcPct val="130000"/>
               </a:lnSpc>
               <a:spcAft>
-                <a:spcPts val="800"/>
+                <a:spcPts val="1100"/>
               </a:spcAft>
               <a:buSzPct val="100000"/>
-              <a:buChar char="•"/>
+              <a:buChar char="–"/>
             </a:pPr>
             <a:r>
               <a:rPr lang="en-US" sz="1500" dirty="0">
                 <a:solidFill>
-                  <a:srgbClr val="374151"/>
-                </a:solidFill>
+                  <a:srgbClr val="23282E"/>
+                </a:solidFill>
+                <a:latin typeface="Corbel" pitchFamily="34" charset="0"/>
+                <a:ea typeface="Corbel" pitchFamily="34" charset="-122"/>
+                <a:cs typeface="Corbel" pitchFamily="34" charset="-120"/>
               </a:rPr>
               <a:t>Report screening with a PRISMA flow diagram: identified, duplicates removed, screened, excluded with reasons, included</a:t>
             </a:r>
@@ -4058,19 +4233,22 @@
           <a:p>
             <a:pPr marL="342900" indent="-342900">
               <a:lnSpc>
-                <a:spcPct val="125000"/>
+                <a:spcPct val="130000"/>
               </a:lnSpc>
               <a:spcAft>
-                <a:spcPts val="800"/>
+                <a:spcPts val="1100"/>
               </a:spcAft>
               <a:buSzPct val="100000"/>
-              <a:buChar char="•"/>
+              <a:buChar char="–"/>
             </a:pPr>
             <a:r>
               <a:rPr lang="en-US" sz="1500" dirty="0">
                 <a:solidFill>
-                  <a:srgbClr val="374151"/>
-                </a:solidFill>
+                  <a:srgbClr val="23282E"/>
+                </a:solidFill>
+                <a:latin typeface="Corbel" pitchFamily="34" charset="0"/>
+                <a:ea typeface="Corbel" pitchFamily="34" charset="-122"/>
+                <a:cs typeface="Corbel" pitchFamily="34" charset="-120"/>
               </a:rPr>
               <a:t>Keep the exclusion reasons — reviewers ask for them</a:t>
             </a:r>
@@ -4090,8 +4268,8 @@
         </p:nvSpPr>
         <p:spPr>
           <a:xfrm>
-            <a:off x="8503920" y="4709160"/>
-            <a:ext cx="800000" cy="300000"/>
+            <a:off x="566928" y="4700016"/>
+            <a:ext cx="914400" cy="274320"/>
           </a:xfrm>
           <a:prstGeom prst="rect">
             <a:avLst/>
@@ -4106,10 +4284,13 @@
           <a:bodyPr/>
           <a:lstStyle>
             <a:lvl1pPr>
-              <a:defRPr sz="1000">
-                <a:solidFill>
-                  <a:srgbClr val="6B7280"/>
-                </a:solidFill>
+              <a:defRPr sz="900">
+                <a:solidFill>
+                  <a:srgbClr val="5F6B76"/>
+                </a:solidFill>
+                <a:latin typeface="Corbel"/>
+                <a:ea typeface="Corbel"/>
+                <a:cs typeface="Corbel"/>
               </a:defRPr>
             </a:lvl1pPr>
           </a:lstStyle>
@@ -4156,8 +4337,8 @@
         </p:nvSpPr>
         <p:spPr>
           <a:xfrm>
-            <a:off x="502920" y="292608"/>
-            <a:ext cx="8046720" cy="228600"/>
+            <a:off x="566928" y="384048"/>
+            <a:ext cx="7772400" cy="237744"/>
           </a:xfrm>
           <a:prstGeom prst="rect">
             <a:avLst/>
@@ -4173,14 +4354,17 @@
               <a:buNone/>
             </a:pPr>
             <a:r>
-              <a:rPr lang="en-US" sz="1100" b="1" spc="150" kern="0" dirty="0">
-                <a:solidFill>
-                  <a:srgbClr val="0066CC"/>
-                </a:solidFill>
+              <a:rPr lang="en-US" sz="1000" spc="200" kern="0" dirty="0">
+                <a:solidFill>
+                  <a:srgbClr val="9A6A3C"/>
+                </a:solidFill>
+                <a:latin typeface="Corbel" pitchFamily="34" charset="0"/>
+                <a:ea typeface="Corbel" pitchFamily="34" charset="-122"/>
+                <a:cs typeface="Corbel" pitchFamily="34" charset="-120"/>
               </a:rPr>
               <a:t>UNIT 4</a:t>
             </a:r>
-            <a:endParaRPr lang="en-US" sz="1100" dirty="0"/>
+            <a:endParaRPr lang="en-US" sz="1000" dirty="0"/>
           </a:p>
         </p:txBody>
       </p:sp>
@@ -4192,8 +4376,8 @@
         </p:nvSpPr>
         <p:spPr>
           <a:xfrm>
-            <a:off x="502920" y="548640"/>
-            <a:ext cx="8046720" cy="640080"/>
+            <a:off x="566928" y="658368"/>
+            <a:ext cx="7772400" cy="658368"/>
           </a:xfrm>
           <a:prstGeom prst="rect">
             <a:avLst/>
@@ -4206,30 +4390,56 @@
           <a:lstStyle/>
           <a:p>
             <a:pPr indent="0" marL="0">
+              <a:lnSpc>
+                <a:spcPct val="100000"/>
+              </a:lnSpc>
               <a:buNone/>
             </a:pPr>
             <a:r>
-              <a:rPr lang="en-US" sz="2400" b="1" dirty="0">
-                <a:solidFill>
-                  <a:srgbClr val="111827"/>
-                </a:solidFill>
+              <a:rPr lang="en-US" sz="2500" dirty="0">
+                <a:solidFill>
+                  <a:srgbClr val="1C3140"/>
+                </a:solidFill>
+                <a:latin typeface="Constantia" pitchFamily="34" charset="0"/>
+                <a:ea typeface="Constantia" pitchFamily="34" charset="-122"/>
+                <a:cs typeface="Constantia" pitchFamily="34" charset="-120"/>
               </a:rPr>
               <a:t>Documenting the search (2/2)</a:t>
             </a:r>
-            <a:endParaRPr lang="en-US" sz="2400" dirty="0"/>
-          </a:p>
-        </p:txBody>
-      </p:sp>
-      <p:sp>
-        <p:nvSpPr>
-          <p:cNvPr id="4" name="Text 2"/>
+            <a:endParaRPr lang="en-US" sz="2500" dirty="0"/>
+          </a:p>
+        </p:txBody>
+      </p:sp>
+      <p:sp>
+        <p:nvSpPr>
+          <p:cNvPr id="4" name="Shape 2"/>
           <p:cNvSpPr/>
           <p:nvPr/>
         </p:nvSpPr>
         <p:spPr>
           <a:xfrm>
-            <a:off x="685800" y="1325880"/>
-            <a:ext cx="7772400" cy="3200400"/>
+            <a:off x="566928" y="1335024"/>
+            <a:ext cx="566928" cy="20117"/>
+          </a:xfrm>
+          <a:prstGeom prst="rect">
+            <a:avLst/>
+          </a:prstGeom>
+          <a:solidFill>
+            <a:srgbClr val="9A6A3C"/>
+          </a:solidFill>
+          <a:ln/>
+        </p:spPr>
+      </p:sp>
+      <p:sp>
+        <p:nvSpPr>
+          <p:cNvPr id="5" name="Text 3"/>
+          <p:cNvSpPr/>
+          <p:nvPr/>
+        </p:nvSpPr>
+        <p:spPr>
+          <a:xfrm>
+            <a:off x="713232" y="1664208"/>
+            <a:ext cx="7498080" cy="2788920"/>
           </a:xfrm>
           <a:prstGeom prst="rect">
             <a:avLst/>
@@ -4243,44 +4453,50 @@
           <a:p>
             <a:pPr marL="342900" indent="-342900">
               <a:lnSpc>
-                <a:spcPct val="125000"/>
+                <a:spcPct val="130000"/>
               </a:lnSpc>
               <a:spcAft>
-                <a:spcPts val="800"/>
+                <a:spcPts val="1100"/>
               </a:spcAft>
               <a:buSzPct val="100000"/>
-              <a:buChar char="•"/>
-            </a:pPr>
-            <a:r>
-              <a:rPr lang="en-US" sz="1700" dirty="0">
-                <a:solidFill>
-                  <a:srgbClr val="374151"/>
-                </a:solidFill>
+              <a:buChar char="–"/>
+            </a:pPr>
+            <a:r>
+              <a:rPr lang="en-US" sz="1650" dirty="0">
+                <a:solidFill>
+                  <a:srgbClr val="23282E"/>
+                </a:solidFill>
+                <a:latin typeface="Corbel" pitchFamily="34" charset="0"/>
+                <a:ea typeface="Corbel" pitchFamily="34" charset="-122"/>
+                <a:cs typeface="Corbel" pitchFamily="34" charset="-120"/>
               </a:rPr>
               <a:t>Save the strategy in the database's own account feature and export it, rather than retyping later</a:t>
             </a:r>
-            <a:endParaRPr lang="en-US" sz="1700" dirty="0"/>
+            <a:endParaRPr lang="en-US" sz="1650" dirty="0"/>
           </a:p>
           <a:p>
             <a:pPr marL="342900" indent="-342900">
               <a:lnSpc>
-                <a:spcPct val="125000"/>
+                <a:spcPct val="130000"/>
               </a:lnSpc>
               <a:spcAft>
-                <a:spcPts val="800"/>
+                <a:spcPts val="1100"/>
               </a:spcAft>
               <a:buSzPct val="100000"/>
-              <a:buChar char="•"/>
-            </a:pPr>
-            <a:r>
-              <a:rPr lang="en-US" sz="1700" dirty="0">
-                <a:solidFill>
-                  <a:srgbClr val="374151"/>
-                </a:solidFill>
+              <a:buChar char="–"/>
+            </a:pPr>
+            <a:r>
+              <a:rPr lang="en-US" sz="1650" dirty="0">
+                <a:solidFill>
+                  <a:srgbClr val="23282E"/>
+                </a:solidFill>
+                <a:latin typeface="Corbel" pitchFamily="34" charset="0"/>
+                <a:ea typeface="Corbel" pitchFamily="34" charset="-122"/>
+                <a:cs typeface="Corbel" pitchFamily="34" charset="-120"/>
               </a:rPr>
               <a:t>Set up email alerts so new hits arrive during your fieldwork</a:t>
             </a:r>
-            <a:endParaRPr lang="en-US" sz="1700" dirty="0"/>
+            <a:endParaRPr lang="en-US" sz="1650" dirty="0"/>
           </a:p>
         </p:txBody>
       </p:sp>
@@ -4296,8 +4512,8 @@
         </p:nvSpPr>
         <p:spPr>
           <a:xfrm>
-            <a:off x="8503920" y="4709160"/>
-            <a:ext cx="800000" cy="300000"/>
+            <a:off x="566928" y="4700016"/>
+            <a:ext cx="914400" cy="274320"/>
           </a:xfrm>
           <a:prstGeom prst="rect">
             <a:avLst/>
@@ -4312,10 +4528,13 @@
           <a:bodyPr/>
           <a:lstStyle>
             <a:lvl1pPr>
-              <a:defRPr sz="1000">
-                <a:solidFill>
-                  <a:srgbClr val="6B7280"/>
-                </a:solidFill>
+              <a:defRPr sz="900">
+                <a:solidFill>
+                  <a:srgbClr val="5F6B76"/>
+                </a:solidFill>
+                <a:latin typeface="Corbel"/>
+                <a:ea typeface="Corbel"/>
+                <a:cs typeface="Corbel"/>
               </a:defRPr>
             </a:lvl1pPr>
           </a:lstStyle>
@@ -4362,8 +4581,8 @@
         </p:nvSpPr>
         <p:spPr>
           <a:xfrm>
-            <a:off x="502920" y="292608"/>
-            <a:ext cx="8046720" cy="228600"/>
+            <a:off x="566928" y="384048"/>
+            <a:ext cx="7772400" cy="237744"/>
           </a:xfrm>
           <a:prstGeom prst="rect">
             <a:avLst/>
@@ -4379,14 +4598,17 @@
               <a:buNone/>
             </a:pPr>
             <a:r>
-              <a:rPr lang="en-US" sz="1100" b="1" spc="150" kern="0" dirty="0">
-                <a:solidFill>
-                  <a:srgbClr val="0066CC"/>
-                </a:solidFill>
+              <a:rPr lang="en-US" sz="1000" spc="200" kern="0" dirty="0">
+                <a:solidFill>
+                  <a:srgbClr val="9A6A3C"/>
+                </a:solidFill>
+                <a:latin typeface="Corbel" pitchFamily="34" charset="0"/>
+                <a:ea typeface="Corbel" pitchFamily="34" charset="-122"/>
+                <a:cs typeface="Corbel" pitchFamily="34" charset="-120"/>
               </a:rPr>
               <a:t>UNIT 4</a:t>
             </a:r>
-            <a:endParaRPr lang="en-US" sz="1100" dirty="0"/>
+            <a:endParaRPr lang="en-US" sz="1000" dirty="0"/>
           </a:p>
         </p:txBody>
       </p:sp>
@@ -4398,8 +4620,8 @@
         </p:nvSpPr>
         <p:spPr>
           <a:xfrm>
-            <a:off x="502920" y="548640"/>
-            <a:ext cx="8046720" cy="640080"/>
+            <a:off x="566928" y="658368"/>
+            <a:ext cx="7772400" cy="658368"/>
           </a:xfrm>
           <a:prstGeom prst="rect">
             <a:avLst/>
@@ -4412,30 +4634,56 @@
           <a:lstStyle/>
           <a:p>
             <a:pPr indent="0" marL="0">
+              <a:lnSpc>
+                <a:spcPct val="100000"/>
+              </a:lnSpc>
               <a:buNone/>
             </a:pPr>
             <a:r>
-              <a:rPr lang="en-US" sz="2400" b="1" dirty="0">
-                <a:solidFill>
-                  <a:srgbClr val="111827"/>
-                </a:solidFill>
+              <a:rPr lang="en-US" sz="2500" dirty="0">
+                <a:solidFill>
+                  <a:srgbClr val="1C3140"/>
+                </a:solidFill>
+                <a:latin typeface="Constantia" pitchFamily="34" charset="0"/>
+                <a:ea typeface="Constantia" pitchFamily="34" charset="-122"/>
+                <a:cs typeface="Constantia" pitchFamily="34" charset="-120"/>
               </a:rPr>
               <a:t>Reference management (1/2)</a:t>
             </a:r>
-            <a:endParaRPr lang="en-US" sz="2400" dirty="0"/>
-          </a:p>
-        </p:txBody>
-      </p:sp>
-      <p:sp>
-        <p:nvSpPr>
-          <p:cNvPr id="4" name="Text 2"/>
+            <a:endParaRPr lang="en-US" sz="2500" dirty="0"/>
+          </a:p>
+        </p:txBody>
+      </p:sp>
+      <p:sp>
+        <p:nvSpPr>
+          <p:cNvPr id="4" name="Shape 2"/>
           <p:cNvSpPr/>
           <p:nvPr/>
         </p:nvSpPr>
         <p:spPr>
           <a:xfrm>
-            <a:off x="685800" y="1325880"/>
-            <a:ext cx="7772400" cy="3200400"/>
+            <a:off x="566928" y="1335024"/>
+            <a:ext cx="566928" cy="20117"/>
+          </a:xfrm>
+          <a:prstGeom prst="rect">
+            <a:avLst/>
+          </a:prstGeom>
+          <a:solidFill>
+            <a:srgbClr val="9A6A3C"/>
+          </a:solidFill>
+          <a:ln/>
+        </p:spPr>
+      </p:sp>
+      <p:sp>
+        <p:nvSpPr>
+          <p:cNvPr id="5" name="Text 3"/>
+          <p:cNvSpPr/>
+          <p:nvPr/>
+        </p:nvSpPr>
+        <p:spPr>
+          <a:xfrm>
+            <a:off x="713232" y="1664208"/>
+            <a:ext cx="7498080" cy="2788920"/>
           </a:xfrm>
           <a:prstGeom prst="rect">
             <a:avLst/>
@@ -4449,107 +4697,122 @@
           <a:p>
             <a:pPr marL="342900" indent="-342900">
               <a:lnSpc>
-                <a:spcPct val="125000"/>
+                <a:spcPct val="130000"/>
               </a:lnSpc>
               <a:spcAft>
-                <a:spcPts val="800"/>
+                <a:spcPts val="1100"/>
               </a:spcAft>
               <a:buSzPct val="100000"/>
-              <a:buChar char="•"/>
-            </a:pPr>
-            <a:r>
-              <a:rPr lang="en-US" sz="1700" dirty="0">
-                <a:solidFill>
-                  <a:srgbClr val="374151"/>
-                </a:solidFill>
+              <a:buChar char="–"/>
+            </a:pPr>
+            <a:r>
+              <a:rPr lang="en-US" sz="1650" dirty="0">
+                <a:solidFill>
+                  <a:srgbClr val="23282E"/>
+                </a:solidFill>
+                <a:latin typeface="Corbel" pitchFamily="34" charset="0"/>
+                <a:ea typeface="Corbel" pitchFamily="34" charset="-122"/>
+                <a:cs typeface="Corbel" pitchFamily="34" charset="-120"/>
               </a:rPr>
               <a:t>Zotero — free and open source, excellent browser capture, best default for most researchers</a:t>
             </a:r>
-            <a:endParaRPr lang="en-US" sz="1700" dirty="0"/>
+            <a:endParaRPr lang="en-US" sz="1650" dirty="0"/>
           </a:p>
           <a:p>
             <a:pPr marL="342900" indent="-342900">
               <a:lnSpc>
-                <a:spcPct val="125000"/>
+                <a:spcPct val="130000"/>
               </a:lnSpc>
               <a:spcAft>
-                <a:spcPts val="800"/>
+                <a:spcPts val="1100"/>
               </a:spcAft>
               <a:buSzPct val="100000"/>
-              <a:buChar char="•"/>
-            </a:pPr>
-            <a:r>
-              <a:rPr lang="en-US" sz="1700" dirty="0">
-                <a:solidFill>
-                  <a:srgbClr val="374151"/>
-                </a:solidFill>
+              <a:buChar char="–"/>
+            </a:pPr>
+            <a:r>
+              <a:rPr lang="en-US" sz="1650" dirty="0">
+                <a:solidFill>
+                  <a:srgbClr val="23282E"/>
+                </a:solidFill>
+                <a:latin typeface="Corbel" pitchFamily="34" charset="0"/>
+                <a:ea typeface="Corbel" pitchFamily="34" charset="-122"/>
+                <a:cs typeface="Corbel" pitchFamily="34" charset="-120"/>
               </a:rPr>
               <a:t>Mendeley — free, good PDF annotation, owned by Elsevier</a:t>
             </a:r>
-            <a:endParaRPr lang="en-US" sz="1700" dirty="0"/>
+            <a:endParaRPr lang="en-US" sz="1650" dirty="0"/>
           </a:p>
           <a:p>
             <a:pPr marL="342900" indent="-342900">
               <a:lnSpc>
-                <a:spcPct val="125000"/>
+                <a:spcPct val="130000"/>
               </a:lnSpc>
               <a:spcAft>
-                <a:spcPts val="800"/>
+                <a:spcPts val="1100"/>
               </a:spcAft>
               <a:buSzPct val="100000"/>
-              <a:buChar char="•"/>
-            </a:pPr>
-            <a:r>
-              <a:rPr lang="en-US" sz="1700" dirty="0">
-                <a:solidFill>
-                  <a:srgbClr val="374151"/>
-                </a:solidFill>
+              <a:buChar char="–"/>
+            </a:pPr>
+            <a:r>
+              <a:rPr lang="en-US" sz="1650" dirty="0">
+                <a:solidFill>
+                  <a:srgbClr val="23282E"/>
+                </a:solidFill>
+                <a:latin typeface="Corbel" pitchFamily="34" charset="0"/>
+                <a:ea typeface="Corbel" pitchFamily="34" charset="-122"/>
+                <a:cs typeface="Corbel" pitchFamily="34" charset="-120"/>
               </a:rPr>
               <a:t>EndNote — paid, common in institutions with a site licence, strong for very large libraries</a:t>
             </a:r>
-            <a:endParaRPr lang="en-US" sz="1700" dirty="0"/>
+            <a:endParaRPr lang="en-US" sz="1650" dirty="0"/>
           </a:p>
           <a:p>
             <a:pPr marL="342900" indent="-342900">
               <a:lnSpc>
-                <a:spcPct val="125000"/>
+                <a:spcPct val="130000"/>
               </a:lnSpc>
               <a:spcAft>
-                <a:spcPts val="800"/>
+                <a:spcPts val="1100"/>
               </a:spcAft>
               <a:buSzPct val="100000"/>
-              <a:buChar char="•"/>
-            </a:pPr>
-            <a:r>
-              <a:rPr lang="en-US" sz="1700" dirty="0">
-                <a:solidFill>
-                  <a:srgbClr val="374151"/>
-                </a:solidFill>
+              <a:buChar char="–"/>
+            </a:pPr>
+            <a:r>
+              <a:rPr lang="en-US" sz="1650" dirty="0">
+                <a:solidFill>
+                  <a:srgbClr val="23282E"/>
+                </a:solidFill>
+                <a:latin typeface="Corbel" pitchFamily="34" charset="0"/>
+                <a:ea typeface="Corbel" pitchFamily="34" charset="-122"/>
+                <a:cs typeface="Corbel" pitchFamily="34" charset="-120"/>
               </a:rPr>
               <a:t>All three insert citations into Word or LibreOffice and reformat the entire bibliography when you change style</a:t>
             </a:r>
-            <a:endParaRPr lang="en-US" sz="1700" dirty="0"/>
+            <a:endParaRPr lang="en-US" sz="1650" dirty="0"/>
           </a:p>
           <a:p>
             <a:pPr marL="342900" indent="-342900">
               <a:lnSpc>
-                <a:spcPct val="125000"/>
+                <a:spcPct val="130000"/>
               </a:lnSpc>
               <a:spcAft>
-                <a:spcPts val="800"/>
+                <a:spcPts val="1100"/>
               </a:spcAft>
               <a:buSzPct val="100000"/>
-              <a:buChar char="•"/>
-            </a:pPr>
-            <a:r>
-              <a:rPr lang="en-US" sz="1700" dirty="0">
-                <a:solidFill>
-                  <a:srgbClr val="374151"/>
-                </a:solidFill>
+              <a:buChar char="–"/>
+            </a:pPr>
+            <a:r>
+              <a:rPr lang="en-US" sz="1650" dirty="0">
+                <a:solidFill>
+                  <a:srgbClr val="23282E"/>
+                </a:solidFill>
+                <a:latin typeface="Corbel" pitchFamily="34" charset="0"/>
+                <a:ea typeface="Corbel" pitchFamily="34" charset="-122"/>
+                <a:cs typeface="Corbel" pitchFamily="34" charset="-120"/>
               </a:rPr>
               <a:t>Deduplicate on import, and fix metadata at import time — a wrong year propagates into every citation</a:t>
             </a:r>
-            <a:endParaRPr lang="en-US" sz="1700" dirty="0"/>
+            <a:endParaRPr lang="en-US" sz="1650" dirty="0"/>
           </a:p>
         </p:txBody>
       </p:sp>
@@ -4565,8 +4828,8 @@
         </p:nvSpPr>
         <p:spPr>
           <a:xfrm>
-            <a:off x="8503920" y="4709160"/>
-            <a:ext cx="800000" cy="300000"/>
+            <a:off x="566928" y="4700016"/>
+            <a:ext cx="914400" cy="274320"/>
           </a:xfrm>
           <a:prstGeom prst="rect">
             <a:avLst/>
@@ -4581,10 +4844,13 @@
           <a:bodyPr/>
           <a:lstStyle>
             <a:lvl1pPr>
-              <a:defRPr sz="1000">
-                <a:solidFill>
-                  <a:srgbClr val="6B7280"/>
-                </a:solidFill>
+              <a:defRPr sz="900">
+                <a:solidFill>
+                  <a:srgbClr val="5F6B76"/>
+                </a:solidFill>
+                <a:latin typeface="Corbel"/>
+                <a:ea typeface="Corbel"/>
+                <a:cs typeface="Corbel"/>
               </a:defRPr>
             </a:lvl1pPr>
           </a:lstStyle>
@@ -4631,8 +4897,8 @@
         </p:nvSpPr>
         <p:spPr>
           <a:xfrm>
-            <a:off x="502920" y="292608"/>
-            <a:ext cx="8046720" cy="228600"/>
+            <a:off x="566928" y="384048"/>
+            <a:ext cx="7772400" cy="237744"/>
           </a:xfrm>
           <a:prstGeom prst="rect">
             <a:avLst/>
@@ -4648,14 +4914,17 @@
               <a:buNone/>
             </a:pPr>
             <a:r>
-              <a:rPr lang="en-US" sz="1100" b="1" spc="150" kern="0" dirty="0">
-                <a:solidFill>
-                  <a:srgbClr val="0066CC"/>
-                </a:solidFill>
+              <a:rPr lang="en-US" sz="1000" spc="200" kern="0" dirty="0">
+                <a:solidFill>
+                  <a:srgbClr val="9A6A3C"/>
+                </a:solidFill>
+                <a:latin typeface="Corbel" pitchFamily="34" charset="0"/>
+                <a:ea typeface="Corbel" pitchFamily="34" charset="-122"/>
+                <a:cs typeface="Corbel" pitchFamily="34" charset="-120"/>
               </a:rPr>
               <a:t>UNIT 4</a:t>
             </a:r>
-            <a:endParaRPr lang="en-US" sz="1100" dirty="0"/>
+            <a:endParaRPr lang="en-US" sz="1000" dirty="0"/>
           </a:p>
         </p:txBody>
       </p:sp>
@@ -4667,8 +4936,8 @@
         </p:nvSpPr>
         <p:spPr>
           <a:xfrm>
-            <a:off x="502920" y="548640"/>
-            <a:ext cx="8046720" cy="640080"/>
+            <a:off x="566928" y="658368"/>
+            <a:ext cx="7772400" cy="658368"/>
           </a:xfrm>
           <a:prstGeom prst="rect">
             <a:avLst/>
@@ -4681,30 +4950,56 @@
           <a:lstStyle/>
           <a:p>
             <a:pPr indent="0" marL="0">
+              <a:lnSpc>
+                <a:spcPct val="100000"/>
+              </a:lnSpc>
               <a:buNone/>
             </a:pPr>
             <a:r>
-              <a:rPr lang="en-US" sz="2400" b="1" dirty="0">
-                <a:solidFill>
-                  <a:srgbClr val="111827"/>
-                </a:solidFill>
+              <a:rPr lang="en-US" sz="2500" dirty="0">
+                <a:solidFill>
+                  <a:srgbClr val="1C3140"/>
+                </a:solidFill>
+                <a:latin typeface="Constantia" pitchFamily="34" charset="0"/>
+                <a:ea typeface="Constantia" pitchFamily="34" charset="-122"/>
+                <a:cs typeface="Constantia" pitchFamily="34" charset="-120"/>
               </a:rPr>
               <a:t>Reference management (2/2)</a:t>
             </a:r>
-            <a:endParaRPr lang="en-US" sz="2400" dirty="0"/>
-          </a:p>
-        </p:txBody>
-      </p:sp>
-      <p:sp>
-        <p:nvSpPr>
-          <p:cNvPr id="4" name="Text 2"/>
+            <a:endParaRPr lang="en-US" sz="2500" dirty="0"/>
+          </a:p>
+        </p:txBody>
+      </p:sp>
+      <p:sp>
+        <p:nvSpPr>
+          <p:cNvPr id="4" name="Shape 2"/>
           <p:cNvSpPr/>
           <p:nvPr/>
         </p:nvSpPr>
         <p:spPr>
           <a:xfrm>
-            <a:off x="685800" y="1325880"/>
-            <a:ext cx="7772400" cy="3200400"/>
+            <a:off x="566928" y="1335024"/>
+            <a:ext cx="566928" cy="20117"/>
+          </a:xfrm>
+          <a:prstGeom prst="rect">
+            <a:avLst/>
+          </a:prstGeom>
+          <a:solidFill>
+            <a:srgbClr val="9A6A3C"/>
+          </a:solidFill>
+          <a:ln/>
+        </p:spPr>
+      </p:sp>
+      <p:sp>
+        <p:nvSpPr>
+          <p:cNvPr id="5" name="Text 3"/>
+          <p:cNvSpPr/>
+          <p:nvPr/>
+        </p:nvSpPr>
+        <p:spPr>
+          <a:xfrm>
+            <a:off x="713232" y="1664208"/>
+            <a:ext cx="7498080" cy="2788920"/>
           </a:xfrm>
           <a:prstGeom prst="rect">
             <a:avLst/>
@@ -4718,65 +5013,74 @@
           <a:p>
             <a:pPr marL="342900" indent="-342900">
               <a:lnSpc>
-                <a:spcPct val="125000"/>
+                <a:spcPct val="130000"/>
               </a:lnSpc>
               <a:spcAft>
-                <a:spcPts val="800"/>
+                <a:spcPts val="1100"/>
               </a:spcAft>
               <a:buSzPct val="100000"/>
-              <a:buChar char="•"/>
-            </a:pPr>
-            <a:r>
-              <a:rPr lang="en-US" sz="1700" dirty="0">
-                <a:solidFill>
-                  <a:srgbClr val="374151"/>
-                </a:solidFill>
+              <a:buChar char="–"/>
+            </a:pPr>
+            <a:r>
+              <a:rPr lang="en-US" sz="1650" dirty="0">
+                <a:solidFill>
+                  <a:srgbClr val="23282E"/>
+                </a:solidFill>
+                <a:latin typeface="Corbel" pitchFamily="34" charset="0"/>
+                <a:ea typeface="Corbel" pitchFamily="34" charset="-122"/>
+                <a:cs typeface="Corbel" pitchFamily="34" charset="-120"/>
               </a:rPr>
               <a:t>Use collections per chapter and tags per theme; attach the PDF and your notes to the record</a:t>
             </a:r>
-            <a:endParaRPr lang="en-US" sz="1700" dirty="0"/>
+            <a:endParaRPr lang="en-US" sz="1650" dirty="0"/>
           </a:p>
           <a:p>
             <a:pPr marL="342900" indent="-342900">
               <a:lnSpc>
-                <a:spcPct val="125000"/>
+                <a:spcPct val="130000"/>
               </a:lnSpc>
               <a:spcAft>
-                <a:spcPts val="800"/>
+                <a:spcPts val="1100"/>
               </a:spcAft>
               <a:buSzPct val="100000"/>
-              <a:buChar char="•"/>
-            </a:pPr>
-            <a:r>
-              <a:rPr lang="en-US" sz="1700" dirty="0">
-                <a:solidFill>
-                  <a:srgbClr val="374151"/>
-                </a:solidFill>
+              <a:buChar char="–"/>
+            </a:pPr>
+            <a:r>
+              <a:rPr lang="en-US" sz="1650" dirty="0">
+                <a:solidFill>
+                  <a:srgbClr val="23282E"/>
+                </a:solidFill>
+                <a:latin typeface="Corbel" pitchFamily="34" charset="0"/>
+                <a:ea typeface="Corbel" pitchFamily="34" charset="-122"/>
+                <a:cs typeface="Corbel" pitchFamily="34" charset="-120"/>
               </a:rPr>
               <a:t>Back up the library, and sync it — a lost reference library near submission is a genuine disaster</a:t>
             </a:r>
-            <a:endParaRPr lang="en-US" sz="1700" dirty="0"/>
+            <a:endParaRPr lang="en-US" sz="1650" dirty="0"/>
           </a:p>
           <a:p>
             <a:pPr marL="342900" indent="-342900">
               <a:lnSpc>
-                <a:spcPct val="125000"/>
+                <a:spcPct val="130000"/>
               </a:lnSpc>
               <a:spcAft>
-                <a:spcPts val="800"/>
+                <a:spcPts val="1100"/>
               </a:spcAft>
               <a:buSzPct val="100000"/>
-              <a:buChar char="•"/>
-            </a:pPr>
-            <a:r>
-              <a:rPr lang="en-US" sz="1700" dirty="0">
-                <a:solidFill>
-                  <a:srgbClr val="374151"/>
-                </a:solidFill>
+              <a:buChar char="–"/>
+            </a:pPr>
+            <a:r>
+              <a:rPr lang="en-US" sz="1650" dirty="0">
+                <a:solidFill>
+                  <a:srgbClr val="23282E"/>
+                </a:solidFill>
+                <a:latin typeface="Corbel" pitchFamily="34" charset="0"/>
+                <a:ea typeface="Corbel" pitchFamily="34" charset="-122"/>
+                <a:cs typeface="Corbel" pitchFamily="34" charset="-120"/>
               </a:rPr>
               <a:t>Never type a bibliography by hand: it wastes days and introduces errors that examiners do notice</a:t>
             </a:r>
-            <a:endParaRPr lang="en-US" sz="1700" dirty="0"/>
+            <a:endParaRPr lang="en-US" sz="1650" dirty="0"/>
           </a:p>
         </p:txBody>
       </p:sp>
@@ -4792,8 +5096,8 @@
         </p:nvSpPr>
         <p:spPr>
           <a:xfrm>
-            <a:off x="8503920" y="4709160"/>
-            <a:ext cx="800000" cy="300000"/>
+            <a:off x="566928" y="4700016"/>
+            <a:ext cx="914400" cy="274320"/>
           </a:xfrm>
           <a:prstGeom prst="rect">
             <a:avLst/>
@@ -4808,10 +5112,13 @@
           <a:bodyPr/>
           <a:lstStyle>
             <a:lvl1pPr>
-              <a:defRPr sz="1000">
-                <a:solidFill>
-                  <a:srgbClr val="6B7280"/>
-                </a:solidFill>
+              <a:defRPr sz="900">
+                <a:solidFill>
+                  <a:srgbClr val="5F6B76"/>
+                </a:solidFill>
+                <a:latin typeface="Corbel"/>
+                <a:ea typeface="Corbel"/>
+                <a:cs typeface="Corbel"/>
               </a:defRPr>
             </a:lvl1pPr>
           </a:lstStyle>
@@ -4858,8 +5165,8 @@
         </p:nvSpPr>
         <p:spPr>
           <a:xfrm>
-            <a:off x="502920" y="292608"/>
-            <a:ext cx="8046720" cy="228600"/>
+            <a:off x="566928" y="384048"/>
+            <a:ext cx="7772400" cy="237744"/>
           </a:xfrm>
           <a:prstGeom prst="rect">
             <a:avLst/>
@@ -4875,14 +5182,17 @@
               <a:buNone/>
             </a:pPr>
             <a:r>
-              <a:rPr lang="en-US" sz="1100" b="1" spc="150" kern="0" dirty="0">
-                <a:solidFill>
-                  <a:srgbClr val="00A86B"/>
-                </a:solidFill>
+              <a:rPr lang="en-US" sz="1000" spc="200" kern="0" dirty="0">
+                <a:solidFill>
+                  <a:srgbClr val="9A6A3C"/>
+                </a:solidFill>
+                <a:latin typeface="Corbel" pitchFamily="34" charset="0"/>
+                <a:ea typeface="Corbel" pitchFamily="34" charset="-122"/>
+                <a:cs typeface="Corbel" pitchFamily="34" charset="-120"/>
               </a:rPr>
               <a:t>UNIT 4</a:t>
             </a:r>
-            <a:endParaRPr lang="en-US" sz="1100" dirty="0"/>
+            <a:endParaRPr lang="en-US" sz="1000" dirty="0"/>
           </a:p>
         </p:txBody>
       </p:sp>
@@ -4894,8 +5204,8 @@
         </p:nvSpPr>
         <p:spPr>
           <a:xfrm>
-            <a:off x="502920" y="548640"/>
-            <a:ext cx="8046720" cy="548640"/>
+            <a:off x="566928" y="658368"/>
+            <a:ext cx="7772400" cy="658368"/>
           </a:xfrm>
           <a:prstGeom prst="rect">
             <a:avLst/>
@@ -4904,21 +5214,27 @@
           <a:ln/>
         </p:spPr>
         <p:txBody>
-          <a:bodyPr wrap="square" rtlCol="0" anchor="ctr"/>
+          <a:bodyPr wrap="square" rtlCol="0" anchor="t"/>
           <a:lstStyle/>
           <a:p>
             <a:pPr indent="0" marL="0">
+              <a:lnSpc>
+                <a:spcPct val="100000"/>
+              </a:lnSpc>
               <a:buNone/>
             </a:pPr>
             <a:r>
-              <a:rPr lang="en-US" sz="2400" b="1" dirty="0">
-                <a:solidFill>
-                  <a:srgbClr val="111827"/>
-                </a:solidFill>
+              <a:rPr lang="en-US" sz="2500" dirty="0">
+                <a:solidFill>
+                  <a:srgbClr val="1C3140"/>
+                </a:solidFill>
+                <a:latin typeface="Constantia" pitchFamily="34" charset="0"/>
+                <a:ea typeface="Constantia" pitchFamily="34" charset="-122"/>
+                <a:cs typeface="Constantia" pitchFamily="34" charset="-120"/>
               </a:rPr>
               <a:t>In practice</a:t>
             </a:r>
-            <a:endParaRPr lang="en-US" sz="2400" dirty="0"/>
+            <a:endParaRPr lang="en-US" sz="2500" dirty="0"/>
           </a:p>
         </p:txBody>
       </p:sp>
@@ -4930,28 +5246,48 @@
         </p:nvSpPr>
         <p:spPr>
           <a:xfrm>
-            <a:off x="502920" y="1280160"/>
-            <a:ext cx="54864" cy="2377440"/>
+            <a:off x="566928" y="1335024"/>
+            <a:ext cx="566928" cy="20117"/>
           </a:xfrm>
           <a:prstGeom prst="rect">
             <a:avLst/>
           </a:prstGeom>
           <a:solidFill>
-            <a:srgbClr val="00A86B"/>
+            <a:srgbClr val="9A6A3C"/>
           </a:solidFill>
           <a:ln/>
         </p:spPr>
       </p:sp>
       <p:sp>
         <p:nvSpPr>
-          <p:cNvPr id="5" name="Text 3"/>
+          <p:cNvPr id="5" name="Shape 3"/>
           <p:cNvSpPr/>
           <p:nvPr/>
         </p:nvSpPr>
         <p:spPr>
           <a:xfrm>
-            <a:off x="777240" y="1280160"/>
-            <a:ext cx="7589520" cy="2377440"/>
+            <a:off x="566928" y="1664208"/>
+            <a:ext cx="8010144" cy="2395728"/>
+          </a:xfrm>
+          <a:prstGeom prst="rect">
+            <a:avLst/>
+          </a:prstGeom>
+          <a:solidFill>
+            <a:srgbClr val="F6F4F0"/>
+          </a:solidFill>
+          <a:ln/>
+        </p:spPr>
+      </p:sp>
+      <p:sp>
+        <p:nvSpPr>
+          <p:cNvPr id="6" name="Text 4"/>
+          <p:cNvSpPr/>
+          <p:nvPr/>
+        </p:nvSpPr>
+        <p:spPr>
+          <a:xfrm>
+            <a:off x="932688" y="1847088"/>
+            <a:ext cx="7278624" cy="2029968"/>
           </a:xfrm>
           <a:prstGeom prst="rect">
             <a:avLst/>
@@ -4965,15 +5301,18 @@
           <a:p>
             <a:pPr indent="0" marL="0">
               <a:lnSpc>
-                <a:spcPct val="130000"/>
+                <a:spcPct val="132000"/>
               </a:lnSpc>
               <a:buNone/>
             </a:pPr>
             <a:r>
-              <a:rPr lang="en-US" sz="1600" dirty="0">
-                <a:solidFill>
-                  <a:srgbClr val="374151"/>
-                </a:solidFill>
+              <a:rPr lang="en-US" sz="1600" i="1" dirty="0">
+                <a:solidFill>
+                  <a:srgbClr val="1C3140"/>
+                </a:solidFill>
+                <a:latin typeface="Constantia" pitchFamily="34" charset="0"/>
+                <a:ea typeface="Constantia" pitchFamily="34" charset="-122"/>
+                <a:cs typeface="Constantia" pitchFamily="34" charset="-120"/>
               </a:rPr>
               <a:t>Set your citation style once at the beginning. Switching from APA to Vancouver later is a single dropdown in the reference manager, and a week of manual work without one.</a:t>
             </a:r>
@@ -4993,8 +5332,8 @@
         </p:nvSpPr>
         <p:spPr>
           <a:xfrm>
-            <a:off x="8503920" y="4709160"/>
-            <a:ext cx="800000" cy="300000"/>
+            <a:off x="566928" y="4700016"/>
+            <a:ext cx="914400" cy="274320"/>
           </a:xfrm>
           <a:prstGeom prst="rect">
             <a:avLst/>
@@ -5009,10 +5348,13 @@
           <a:bodyPr/>
           <a:lstStyle>
             <a:lvl1pPr>
-              <a:defRPr sz="1000">
-                <a:solidFill>
-                  <a:srgbClr val="6B7280"/>
-                </a:solidFill>
+              <a:defRPr sz="900">
+                <a:solidFill>
+                  <a:srgbClr val="5F6B76"/>
+                </a:solidFill>
+                <a:latin typeface="Corbel"/>
+                <a:ea typeface="Corbel"/>
+                <a:cs typeface="Corbel"/>
               </a:defRPr>
             </a:lvl1pPr>
           </a:lstStyle>
@@ -5059,8 +5401,8 @@
         </p:nvSpPr>
         <p:spPr>
           <a:xfrm>
-            <a:off x="502920" y="292608"/>
-            <a:ext cx="8046720" cy="228600"/>
+            <a:off x="566928" y="384048"/>
+            <a:ext cx="7772400" cy="237744"/>
           </a:xfrm>
           <a:prstGeom prst="rect">
             <a:avLst/>
@@ -5076,14 +5418,17 @@
               <a:buNone/>
             </a:pPr>
             <a:r>
-              <a:rPr lang="en-US" sz="1100" b="1" spc="150" kern="0" dirty="0">
-                <a:solidFill>
-                  <a:srgbClr val="00A86B"/>
-                </a:solidFill>
+              <a:rPr lang="en-US" sz="1000" spc="200" kern="0" dirty="0">
+                <a:solidFill>
+                  <a:srgbClr val="9A6A3C"/>
+                </a:solidFill>
+                <a:latin typeface="Corbel" pitchFamily="34" charset="0"/>
+                <a:ea typeface="Corbel" pitchFamily="34" charset="-122"/>
+                <a:cs typeface="Corbel" pitchFamily="34" charset="-120"/>
               </a:rPr>
               <a:t>UNIT 4  ·  WORKED EXAMPLE</a:t>
             </a:r>
-            <a:endParaRPr lang="en-US" sz="1100" dirty="0"/>
+            <a:endParaRPr lang="en-US" sz="1000" dirty="0"/>
           </a:p>
         </p:txBody>
       </p:sp>
@@ -5095,8 +5440,8 @@
         </p:nvSpPr>
         <p:spPr>
           <a:xfrm>
-            <a:off x="502920" y="548640"/>
-            <a:ext cx="8046720" cy="566928"/>
+            <a:off x="566928" y="658368"/>
+            <a:ext cx="7772400" cy="658368"/>
           </a:xfrm>
           <a:prstGeom prst="rect">
             <a:avLst/>
@@ -5109,17 +5454,23 @@
           <a:lstStyle/>
           <a:p>
             <a:pPr indent="0" marL="0">
+              <a:lnSpc>
+                <a:spcPct val="100000"/>
+              </a:lnSpc>
               <a:buNone/>
             </a:pPr>
             <a:r>
-              <a:rPr lang="en-US" sz="2300" b="1" dirty="0">
-                <a:solidFill>
-                  <a:srgbClr val="111827"/>
-                </a:solidFill>
+              <a:rPr lang="en-US" sz="2500" dirty="0">
+                <a:solidFill>
+                  <a:srgbClr val="1C3140"/>
+                </a:solidFill>
+                <a:latin typeface="Constantia" pitchFamily="34" charset="0"/>
+                <a:ea typeface="Constantia" pitchFamily="34" charset="-122"/>
+                <a:cs typeface="Constantia" pitchFamily="34" charset="-120"/>
               </a:rPr>
               <a:t>Building a PubMed search line by line</a:t>
             </a:r>
-            <a:endParaRPr lang="en-US" sz="2300" dirty="0"/>
+            <a:endParaRPr lang="en-US" sz="2500" dirty="0"/>
           </a:p>
         </p:txBody>
       </p:sp>
@@ -5131,21 +5482,16 @@
         </p:nvSpPr>
         <p:spPr>
           <a:xfrm>
-            <a:off x="502920" y="1207008"/>
-            <a:ext cx="8138160" cy="3200400"/>
+            <a:off x="566928" y="1335024"/>
+            <a:ext cx="566928" cy="20117"/>
           </a:xfrm>
           <a:prstGeom prst="rect">
             <a:avLst/>
           </a:prstGeom>
           <a:solidFill>
-            <a:srgbClr val="F3F7FC"/>
+            <a:srgbClr val="9A6A3C"/>
           </a:solidFill>
-          <a:ln w="9525">
-            <a:solidFill>
-              <a:srgbClr val="0066CC"/>
-            </a:solidFill>
-            <a:prstDash val="solid"/>
-          </a:ln>
+          <a:ln/>
         </p:spPr>
       </p:sp>
       <p:sp>
@@ -5156,8 +5502,8 @@
         </p:nvSpPr>
         <p:spPr>
           <a:xfrm>
-            <a:off x="731520" y="1371600"/>
-            <a:ext cx="7680960" cy="1005840"/>
+            <a:off x="566928" y="1645920"/>
+            <a:ext cx="8010144" cy="822960"/>
           </a:xfrm>
           <a:prstGeom prst="rect">
             <a:avLst/>
@@ -5170,156 +5516,195 @@
           <a:lstStyle/>
           <a:p>
             <a:pPr indent="0" marL="0">
+              <a:lnSpc>
+                <a:spcPct val="124000"/>
+              </a:lnSpc>
+              <a:buNone/>
+            </a:pPr>
+            <a:r>
+              <a:rPr lang="en-US" sz="1300" i="1" dirty="0">
+                <a:solidFill>
+                  <a:srgbClr val="5F6B76"/>
+                </a:solidFill>
+                <a:latin typeface="Constantia" pitchFamily="34" charset="0"/>
+                <a:ea typeface="Constantia" pitchFamily="34" charset="-122"/>
+                <a:cs typeface="Constantia" pitchFamily="34" charset="-120"/>
+              </a:rPr>
+              <a:t>The question is whether community health worker home visits reduce childhood malaria in rural Ghana. Typing the whole sentence into PubMed returns almost nothing useful.</a:t>
+            </a:r>
+            <a:endParaRPr lang="en-US" sz="1300" dirty="0"/>
+          </a:p>
+        </p:txBody>
+      </p:sp>
+      <p:sp>
+        <p:nvSpPr>
+          <p:cNvPr id="6" name="Text 4"/>
+          <p:cNvSpPr/>
+          <p:nvPr/>
+        </p:nvSpPr>
+        <p:spPr>
+          <a:xfrm>
+            <a:off x="786384" y="2523744"/>
+            <a:ext cx="7406640" cy="1920240"/>
+          </a:xfrm>
+          <a:prstGeom prst="rect">
+            <a:avLst/>
+          </a:prstGeom>
+          <a:noFill/>
+          <a:ln/>
+        </p:spPr>
+        <p:txBody>
+          <a:bodyPr wrap="square" rtlCol="0" anchor="t"/>
+          <a:lstStyle/>
+          <a:p>
+            <a:pPr marL="342900" indent="-342900">
               <a:lnSpc>
                 <a:spcPct val="120000"/>
               </a:lnSpc>
-              <a:buNone/>
-            </a:pPr>
-            <a:r>
-              <a:rPr lang="en-US" sz="1400" i="1" dirty="0">
-                <a:solidFill>
-                  <a:srgbClr val="374151"/>
-                </a:solidFill>
-              </a:rPr>
-              <a:t>The question is whether community health worker home visits reduce childhood malaria in rural Ghana. Typing the whole sentence into PubMed returns almost nothing useful.</a:t>
-            </a:r>
-            <a:endParaRPr lang="en-US" sz="1400" dirty="0"/>
-          </a:p>
-        </p:txBody>
-      </p:sp>
-      <p:sp>
-        <p:nvSpPr>
-          <p:cNvPr id="6" name="Text 4"/>
-          <p:cNvSpPr/>
-          <p:nvPr/>
-        </p:nvSpPr>
-        <p:spPr>
-          <a:xfrm>
-            <a:off x="868680" y="2395728"/>
-            <a:ext cx="7452360" cy="1920240"/>
-          </a:xfrm>
-          <a:prstGeom prst="rect">
-            <a:avLst/>
-          </a:prstGeom>
-          <a:noFill/>
-          <a:ln/>
-        </p:spPr>
-        <p:txBody>
-          <a:bodyPr wrap="square" rtlCol="0" anchor="t"/>
-          <a:lstStyle/>
-          <a:p>
-            <a:pPr marL="342900" indent="-342900">
-              <a:lnSpc>
-                <a:spcPct val="115000"/>
-              </a:lnSpc>
+              <a:spcAft>
+                <a:spcPts val="500"/>
+              </a:spcAft>
               <a:buSzPct val="100000"/>
               <a:buFont typeface="+mj-lt"/>
               <a:buAutoNum type="arabicPeriod" startAt="1"/>
             </a:pPr>
             <a:r>
-              <a:rPr lang="en-US" sz="1300" dirty="0">
-                <a:solidFill>
-                  <a:srgbClr val="374151"/>
-                </a:solidFill>
+              <a:rPr lang="en-US" sz="1250" dirty="0">
+                <a:solidFill>
+                  <a:srgbClr val="23282E"/>
+                </a:solidFill>
+                <a:latin typeface="Corbel" pitchFamily="34" charset="0"/>
+                <a:ea typeface="Corbel" pitchFamily="34" charset="-122"/>
+                <a:cs typeface="Corbel" pitchFamily="34" charset="-120"/>
               </a:rPr>
               <a:t>Split into concepts: (1) community health workers, (2) home visits, (3) malaria in children.</a:t>
             </a:r>
-            <a:endParaRPr lang="en-US" sz="1300" dirty="0"/>
+            <a:endParaRPr lang="en-US" sz="1250" dirty="0"/>
           </a:p>
           <a:p>
             <a:pPr marL="342900" indent="-342900">
               <a:lnSpc>
-                <a:spcPct val="115000"/>
+                <a:spcPct val="120000"/>
               </a:lnSpc>
+              <a:spcAft>
+                <a:spcPts val="500"/>
+              </a:spcAft>
               <a:buSzPct val="100000"/>
               <a:buFont typeface="+mj-lt"/>
               <a:buAutoNum type="arabicPeriod" startAt="1"/>
             </a:pPr>
             <a:r>
-              <a:rPr lang="en-US" sz="1300" dirty="0">
-                <a:solidFill>
-                  <a:srgbClr val="374151"/>
-                </a:solidFill>
+              <a:rPr lang="en-US" sz="1250" dirty="0">
+                <a:solidFill>
+                  <a:srgbClr val="23282E"/>
+                </a:solidFill>
+                <a:latin typeface="Corbel" pitchFamily="34" charset="0"/>
+                <a:ea typeface="Corbel" pitchFamily="34" charset="-122"/>
+                <a:cs typeface="Corbel" pitchFamily="34" charset="-120"/>
               </a:rPr>
               <a:t>Concept 1: "Community Health Workers"[Mesh] OR community health worker*[tiab] OR CHW[tiab] OR "village health volunteer*"[tiab]</a:t>
             </a:r>
-            <a:endParaRPr lang="en-US" sz="1300" dirty="0"/>
+            <a:endParaRPr lang="en-US" sz="1250" dirty="0"/>
           </a:p>
           <a:p>
             <a:pPr marL="342900" indent="-342900">
               <a:lnSpc>
-                <a:spcPct val="115000"/>
+                <a:spcPct val="120000"/>
               </a:lnSpc>
+              <a:spcAft>
+                <a:spcPts val="500"/>
+              </a:spcAft>
               <a:buSzPct val="100000"/>
               <a:buFont typeface="+mj-lt"/>
               <a:buAutoNum type="arabicPeriod" startAt="1"/>
             </a:pPr>
             <a:r>
-              <a:rPr lang="en-US" sz="1300" dirty="0">
-                <a:solidFill>
-                  <a:srgbClr val="374151"/>
-                </a:solidFill>
+              <a:rPr lang="en-US" sz="1250" dirty="0">
+                <a:solidFill>
+                  <a:srgbClr val="23282E"/>
+                </a:solidFill>
+                <a:latin typeface="Corbel" pitchFamily="34" charset="0"/>
+                <a:ea typeface="Corbel" pitchFamily="34" charset="-122"/>
+                <a:cs typeface="Corbel" pitchFamily="34" charset="-120"/>
               </a:rPr>
               <a:t>Concept 2: "House Calls"[Mesh] OR home visit*[tiab] OR domiciliary[tiab]</a:t>
             </a:r>
-            <a:endParaRPr lang="en-US" sz="1300" dirty="0"/>
+            <a:endParaRPr lang="en-US" sz="1250" dirty="0"/>
           </a:p>
           <a:p>
             <a:pPr marL="342900" indent="-342900">
               <a:lnSpc>
-                <a:spcPct val="115000"/>
+                <a:spcPct val="120000"/>
               </a:lnSpc>
+              <a:spcAft>
+                <a:spcPts val="500"/>
+              </a:spcAft>
               <a:buSzPct val="100000"/>
               <a:buFont typeface="+mj-lt"/>
               <a:buAutoNum type="arabicPeriod" startAt="1"/>
             </a:pPr>
             <a:r>
-              <a:rPr lang="en-US" sz="1300" dirty="0">
-                <a:solidFill>
-                  <a:srgbClr val="374151"/>
-                </a:solidFill>
+              <a:rPr lang="en-US" sz="1250" dirty="0">
+                <a:solidFill>
+                  <a:srgbClr val="23282E"/>
+                </a:solidFill>
+                <a:latin typeface="Corbel" pitchFamily="34" charset="0"/>
+                <a:ea typeface="Corbel" pitchFamily="34" charset="-122"/>
+                <a:cs typeface="Corbel" pitchFamily="34" charset="-120"/>
               </a:rPr>
               <a:t>Concept 3: "Malaria"[Mesh] AND ("Child"[Mesh] OR child*[tiab] OR under-five*[tiab])</a:t>
             </a:r>
-            <a:endParaRPr lang="en-US" sz="1300" dirty="0"/>
+            <a:endParaRPr lang="en-US" sz="1250" dirty="0"/>
           </a:p>
           <a:p>
             <a:pPr marL="342900" indent="-342900">
               <a:lnSpc>
-                <a:spcPct val="115000"/>
+                <a:spcPct val="120000"/>
               </a:lnSpc>
+              <a:spcAft>
+                <a:spcPts val="500"/>
+              </a:spcAft>
               <a:buSzPct val="100000"/>
               <a:buFont typeface="+mj-lt"/>
               <a:buAutoNum type="arabicPeriod" startAt="1"/>
             </a:pPr>
             <a:r>
-              <a:rPr lang="en-US" sz="1300" dirty="0">
-                <a:solidFill>
-                  <a:srgbClr val="374151"/>
-                </a:solidFill>
+              <a:rPr lang="en-US" sz="1250" dirty="0">
+                <a:solidFill>
+                  <a:srgbClr val="23282E"/>
+                </a:solidFill>
+                <a:latin typeface="Corbel" pitchFamily="34" charset="0"/>
+                <a:ea typeface="Corbel" pitchFamily="34" charset="-122"/>
+                <a:cs typeface="Corbel" pitchFamily="34" charset="-120"/>
               </a:rPr>
               <a:t>Combine: #1 AND #2 AND #3. Record the date, the number of hits and the exact strings.</a:t>
             </a:r>
-            <a:endParaRPr lang="en-US" sz="1300" dirty="0"/>
+            <a:endParaRPr lang="en-US" sz="1250" dirty="0"/>
           </a:p>
           <a:p>
             <a:pPr marL="342900" indent="-342900">
               <a:lnSpc>
-                <a:spcPct val="115000"/>
+                <a:spcPct val="120000"/>
               </a:lnSpc>
+              <a:spcAft>
+                <a:spcPts val="500"/>
+              </a:spcAft>
               <a:buSzPct val="100000"/>
               <a:buFont typeface="+mj-lt"/>
               <a:buAutoNum type="arabicPeriod" startAt="1"/>
             </a:pPr>
             <a:r>
-              <a:rPr lang="en-US" sz="1300" dirty="0">
-                <a:solidFill>
-                  <a:srgbClr val="374151"/>
-                </a:solidFill>
+              <a:rPr lang="en-US" sz="1250" dirty="0">
+                <a:solidFill>
+                  <a:srgbClr val="23282E"/>
+                </a:solidFill>
+                <a:latin typeface="Corbel" pitchFamily="34" charset="0"/>
+                <a:ea typeface="Corbel" pitchFamily="34" charset="-122"/>
+                <a:cs typeface="Corbel" pitchFamily="34" charset="-120"/>
               </a:rPr>
               <a:t>Then rerun the concepts in AJOL and Google Scholar — the Ghanaian and regional literature is thin in PubMed and you will otherwise miss it.</a:t>
             </a:r>
-            <a:endParaRPr lang="en-US" sz="1300" dirty="0"/>
+            <a:endParaRPr lang="en-US" sz="1250" dirty="0"/>
           </a:p>
         </p:txBody>
       </p:sp>
@@ -5335,8 +5720,8 @@
         </p:nvSpPr>
         <p:spPr>
           <a:xfrm>
-            <a:off x="8503920" y="4709160"/>
-            <a:ext cx="800000" cy="300000"/>
+            <a:off x="566928" y="4700016"/>
+            <a:ext cx="914400" cy="274320"/>
           </a:xfrm>
           <a:prstGeom prst="rect">
             <a:avLst/>
@@ -5351,10 +5736,13 @@
           <a:bodyPr/>
           <a:lstStyle>
             <a:lvl1pPr>
-              <a:defRPr sz="1000">
-                <a:solidFill>
-                  <a:srgbClr val="6B7280"/>
-                </a:solidFill>
+              <a:defRPr sz="900">
+                <a:solidFill>
+                  <a:srgbClr val="5F6B76"/>
+                </a:solidFill>
+                <a:latin typeface="Corbel"/>
+                <a:ea typeface="Corbel"/>
+                <a:cs typeface="Corbel"/>
               </a:defRPr>
             </a:lvl1pPr>
           </a:lstStyle>
@@ -5401,8 +5789,8 @@
         </p:nvSpPr>
         <p:spPr>
           <a:xfrm>
-            <a:off x="502920" y="292608"/>
-            <a:ext cx="8046720" cy="228600"/>
+            <a:off x="566928" y="384048"/>
+            <a:ext cx="7772400" cy="237744"/>
           </a:xfrm>
           <a:prstGeom prst="rect">
             <a:avLst/>
@@ -5418,14 +5806,17 @@
               <a:buNone/>
             </a:pPr>
             <a:r>
-              <a:rPr lang="en-US" sz="1100" b="1" spc="150" kern="0" dirty="0">
-                <a:solidFill>
-                  <a:srgbClr val="00A86B"/>
-                </a:solidFill>
+              <a:rPr lang="en-US" sz="1000" spc="200" kern="0" dirty="0">
+                <a:solidFill>
+                  <a:srgbClr val="9A6A3C"/>
+                </a:solidFill>
+                <a:latin typeface="Corbel" pitchFamily="34" charset="0"/>
+                <a:ea typeface="Corbel" pitchFamily="34" charset="-122"/>
+                <a:cs typeface="Corbel" pitchFamily="34" charset="-120"/>
               </a:rPr>
               <a:t>UNIT 4  ·  WORKED EXAMPLE</a:t>
             </a:r>
-            <a:endParaRPr lang="en-US" sz="1100" dirty="0"/>
+            <a:endParaRPr lang="en-US" sz="1000" dirty="0"/>
           </a:p>
         </p:txBody>
       </p:sp>
@@ -5437,8 +5828,8 @@
         </p:nvSpPr>
         <p:spPr>
           <a:xfrm>
-            <a:off x="502920" y="548640"/>
-            <a:ext cx="8046720" cy="566928"/>
+            <a:off x="566928" y="658368"/>
+            <a:ext cx="7772400" cy="658368"/>
           </a:xfrm>
           <a:prstGeom prst="rect">
             <a:avLst/>
@@ -5451,17 +5842,23 @@
           <a:lstStyle/>
           <a:p>
             <a:pPr indent="0" marL="0">
+              <a:lnSpc>
+                <a:spcPct val="100000"/>
+              </a:lnSpc>
               <a:buNone/>
             </a:pPr>
             <a:r>
-              <a:rPr lang="en-US" sz="2300" b="1" dirty="0">
-                <a:solidFill>
-                  <a:srgbClr val="111827"/>
-                </a:solidFill>
+              <a:rPr lang="en-US" sz="2500" dirty="0">
+                <a:solidFill>
+                  <a:srgbClr val="1C3140"/>
+                </a:solidFill>
+                <a:latin typeface="Constantia" pitchFamily="34" charset="0"/>
+                <a:ea typeface="Constantia" pitchFamily="34" charset="-122"/>
+                <a:cs typeface="Constantia" pitchFamily="34" charset="-120"/>
               </a:rPr>
               <a:t>What truncation actually costs you</a:t>
             </a:r>
-            <a:endParaRPr lang="en-US" sz="2300" dirty="0"/>
+            <a:endParaRPr lang="en-US" sz="2500" dirty="0"/>
           </a:p>
         </p:txBody>
       </p:sp>
@@ -5473,21 +5870,16 @@
         </p:nvSpPr>
         <p:spPr>
           <a:xfrm>
-            <a:off x="502920" y="1207008"/>
-            <a:ext cx="8138160" cy="3200400"/>
+            <a:off x="566928" y="1335024"/>
+            <a:ext cx="566928" cy="20117"/>
           </a:xfrm>
           <a:prstGeom prst="rect">
             <a:avLst/>
           </a:prstGeom>
           <a:solidFill>
-            <a:srgbClr val="F3F7FC"/>
+            <a:srgbClr val="9A6A3C"/>
           </a:solidFill>
-          <a:ln w="9525">
-            <a:solidFill>
-              <a:srgbClr val="0066CC"/>
-            </a:solidFill>
-            <a:prstDash val="solid"/>
-          </a:ln>
+          <a:ln/>
         </p:spPr>
       </p:sp>
       <p:sp>
@@ -5498,8 +5890,8 @@
         </p:nvSpPr>
         <p:spPr>
           <a:xfrm>
-            <a:off x="731520" y="1371600"/>
-            <a:ext cx="7680960" cy="1005840"/>
+            <a:off x="566928" y="1645920"/>
+            <a:ext cx="8010144" cy="822960"/>
           </a:xfrm>
           <a:prstGeom prst="rect">
             <a:avLst/>
@@ -5512,137 +5904,170 @@
           <a:lstStyle/>
           <a:p>
             <a:pPr indent="0" marL="0">
+              <a:lnSpc>
+                <a:spcPct val="124000"/>
+              </a:lnSpc>
+              <a:buNone/>
+            </a:pPr>
+            <a:r>
+              <a:rPr lang="en-US" sz="1300" i="1" dirty="0">
+                <a:solidFill>
+                  <a:srgbClr val="5F6B76"/>
+                </a:solidFill>
+                <a:latin typeface="Constantia" pitchFamily="34" charset="0"/>
+                <a:ea typeface="Constantia" pitchFamily="34" charset="-122"/>
+                <a:cs typeface="Constantia" pitchFamily="34" charset="-120"/>
+              </a:rPr>
+              <a:t>A researcher searches nurs* expecting to capture nurse, nurses and nursing. The result set balloons and is full of irrelevant records.</a:t>
+            </a:r>
+            <a:endParaRPr lang="en-US" sz="1300" dirty="0"/>
+          </a:p>
+        </p:txBody>
+      </p:sp>
+      <p:sp>
+        <p:nvSpPr>
+          <p:cNvPr id="6" name="Text 4"/>
+          <p:cNvSpPr/>
+          <p:nvPr/>
+        </p:nvSpPr>
+        <p:spPr>
+          <a:xfrm>
+            <a:off x="786384" y="2523744"/>
+            <a:ext cx="7406640" cy="1920240"/>
+          </a:xfrm>
+          <a:prstGeom prst="rect">
+            <a:avLst/>
+          </a:prstGeom>
+          <a:noFill/>
+          <a:ln/>
+        </p:spPr>
+        <p:txBody>
+          <a:bodyPr wrap="square" rtlCol="0" anchor="t"/>
+          <a:lstStyle/>
+          <a:p>
+            <a:pPr marL="342900" indent="-342900">
               <a:lnSpc>
                 <a:spcPct val="120000"/>
               </a:lnSpc>
-              <a:buNone/>
-            </a:pPr>
-            <a:r>
-              <a:rPr lang="en-US" sz="1400" i="1" dirty="0">
-                <a:solidFill>
-                  <a:srgbClr val="374151"/>
-                </a:solidFill>
-              </a:rPr>
-              <a:t>A researcher searches nurs* expecting to capture nurse, nurses and nursing. The result set balloons and is full of irrelevant records.</a:t>
-            </a:r>
-            <a:endParaRPr lang="en-US" sz="1400" dirty="0"/>
-          </a:p>
-        </p:txBody>
-      </p:sp>
-      <p:sp>
-        <p:nvSpPr>
-          <p:cNvPr id="6" name="Text 4"/>
-          <p:cNvSpPr/>
-          <p:nvPr/>
-        </p:nvSpPr>
-        <p:spPr>
-          <a:xfrm>
-            <a:off x="868680" y="2395728"/>
-            <a:ext cx="7452360" cy="1920240"/>
-          </a:xfrm>
-          <a:prstGeom prst="rect">
-            <a:avLst/>
-          </a:prstGeom>
-          <a:noFill/>
-          <a:ln/>
-        </p:spPr>
-        <p:txBody>
-          <a:bodyPr wrap="square" rtlCol="0" anchor="t"/>
-          <a:lstStyle/>
-          <a:p>
-            <a:pPr marL="342900" indent="-342900">
-              <a:lnSpc>
-                <a:spcPct val="115000"/>
-              </a:lnSpc>
+              <a:spcAft>
+                <a:spcPts val="500"/>
+              </a:spcAft>
               <a:buSzPct val="100000"/>
               <a:buFont typeface="+mj-lt"/>
               <a:buAutoNum type="arabicPeriod" startAt="1"/>
             </a:pPr>
             <a:r>
-              <a:rPr lang="en-US" sz="1300" dirty="0">
-                <a:solidFill>
-                  <a:srgbClr val="374151"/>
-                </a:solidFill>
+              <a:rPr lang="en-US" sz="1250" dirty="0">
+                <a:solidFill>
+                  <a:srgbClr val="23282E"/>
+                </a:solidFill>
+                <a:latin typeface="Corbel" pitchFamily="34" charset="0"/>
+                <a:ea typeface="Corbel" pitchFamily="34" charset="-122"/>
+                <a:cs typeface="Corbel" pitchFamily="34" charset="-120"/>
               </a:rPr>
               <a:t>nurs* also matches nursery, nurseries and nursed, none of which are wanted.</a:t>
             </a:r>
-            <a:endParaRPr lang="en-US" sz="1300" dirty="0"/>
+            <a:endParaRPr lang="en-US" sz="1250" dirty="0"/>
           </a:p>
           <a:p>
             <a:pPr marL="342900" indent="-342900">
               <a:lnSpc>
-                <a:spcPct val="115000"/>
+                <a:spcPct val="120000"/>
               </a:lnSpc>
+              <a:spcAft>
+                <a:spcPts val="500"/>
+              </a:spcAft>
               <a:buSzPct val="100000"/>
               <a:buFont typeface="+mj-lt"/>
               <a:buAutoNum type="arabicPeriod" startAt="1"/>
             </a:pPr>
             <a:r>
-              <a:rPr lang="en-US" sz="1300" dirty="0">
-                <a:solidFill>
-                  <a:srgbClr val="374151"/>
-                </a:solidFill>
+              <a:rPr lang="en-US" sz="1250" dirty="0">
+                <a:solidFill>
+                  <a:srgbClr val="23282E"/>
+                </a:solidFill>
+                <a:latin typeface="Corbel" pitchFamily="34" charset="0"/>
+                <a:ea typeface="Corbel" pitchFamily="34" charset="-122"/>
+                <a:cs typeface="Corbel" pitchFamily="34" charset="-120"/>
               </a:rPr>
               <a:t>Truncating too early is the usual cause: nurs* cuts before the stem is distinctive.</a:t>
             </a:r>
-            <a:endParaRPr lang="en-US" sz="1300" dirty="0"/>
+            <a:endParaRPr lang="en-US" sz="1250" dirty="0"/>
           </a:p>
           <a:p>
             <a:pPr marL="342900" indent="-342900">
               <a:lnSpc>
-                <a:spcPct val="115000"/>
+                <a:spcPct val="120000"/>
               </a:lnSpc>
+              <a:spcAft>
+                <a:spcPts val="500"/>
+              </a:spcAft>
               <a:buSzPct val="100000"/>
               <a:buFont typeface="+mj-lt"/>
               <a:buAutoNum type="arabicPeriod" startAt="1"/>
             </a:pPr>
             <a:r>
-              <a:rPr lang="en-US" sz="1300" dirty="0">
-                <a:solidFill>
-                  <a:srgbClr val="374151"/>
-                </a:solidFill>
+              <a:rPr lang="en-US" sz="1250" dirty="0">
+                <a:solidFill>
+                  <a:srgbClr val="23282E"/>
+                </a:solidFill>
+                <a:latin typeface="Corbel" pitchFamily="34" charset="0"/>
+                <a:ea typeface="Corbel" pitchFamily="34" charset="-122"/>
+                <a:cs typeface="Corbel" pitchFamily="34" charset="-120"/>
               </a:rPr>
               <a:t>nurse* OR nursing captures what is needed without the nursery records.</a:t>
             </a:r>
-            <a:endParaRPr lang="en-US" sz="1300" dirty="0"/>
+            <a:endParaRPr lang="en-US" sz="1250" dirty="0"/>
           </a:p>
           <a:p>
             <a:pPr marL="342900" indent="-342900">
               <a:lnSpc>
-                <a:spcPct val="115000"/>
+                <a:spcPct val="120000"/>
               </a:lnSpc>
+              <a:spcAft>
+                <a:spcPts val="500"/>
+              </a:spcAft>
               <a:buSzPct val="100000"/>
               <a:buFont typeface="+mj-lt"/>
               <a:buAutoNum type="arabicPeriod" startAt="1"/>
             </a:pPr>
             <a:r>
-              <a:rPr lang="en-US" sz="1300" dirty="0">
-                <a:solidFill>
-                  <a:srgbClr val="374151"/>
-                </a:solidFill>
+              <a:rPr lang="en-US" sz="1250" dirty="0">
+                <a:solidFill>
+                  <a:srgbClr val="23282E"/>
+                </a:solidFill>
+                <a:latin typeface="Corbel" pitchFamily="34" charset="0"/>
+                <a:ea typeface="Corbel" pitchFamily="34" charset="-122"/>
+                <a:cs typeface="Corbel" pitchFamily="34" charset="-120"/>
               </a:rPr>
               <a:t>Check the effect: run both and compare the hit counts and a sample of titles.</a:t>
             </a:r>
-            <a:endParaRPr lang="en-US" sz="1300" dirty="0"/>
+            <a:endParaRPr lang="en-US" sz="1250" dirty="0"/>
           </a:p>
           <a:p>
             <a:pPr marL="342900" indent="-342900">
               <a:lnSpc>
-                <a:spcPct val="115000"/>
+                <a:spcPct val="120000"/>
               </a:lnSpc>
+              <a:spcAft>
+                <a:spcPts val="500"/>
+              </a:spcAft>
               <a:buSzPct val="100000"/>
               <a:buFont typeface="+mj-lt"/>
               <a:buAutoNum type="arabicPeriod" startAt="1"/>
             </a:pPr>
             <a:r>
-              <a:rPr lang="en-US" sz="1300" dirty="0">
-                <a:solidFill>
-                  <a:srgbClr val="374151"/>
-                </a:solidFill>
+              <a:rPr lang="en-US" sz="1250" dirty="0">
+                <a:solidFill>
+                  <a:srgbClr val="23282E"/>
+                </a:solidFill>
+                <a:latin typeface="Corbel" pitchFamily="34" charset="0"/>
+                <a:ea typeface="Corbel" pitchFamily="34" charset="-122"/>
+                <a:cs typeface="Corbel" pitchFamily="34" charset="-120"/>
               </a:rPr>
               <a:t>Where a database offers it, a field tag narrows further — nurse*[tiab] rather than a free-text search of the whole record.</a:t>
             </a:r>
-            <a:endParaRPr lang="en-US" sz="1300" dirty="0"/>
+            <a:endParaRPr lang="en-US" sz="1250" dirty="0"/>
           </a:p>
         </p:txBody>
       </p:sp>
@@ -5658,8 +6083,8 @@
         </p:nvSpPr>
         <p:spPr>
           <a:xfrm>
-            <a:off x="8503920" y="4709160"/>
-            <a:ext cx="800000" cy="300000"/>
+            <a:off x="566928" y="4700016"/>
+            <a:ext cx="914400" cy="274320"/>
           </a:xfrm>
           <a:prstGeom prst="rect">
             <a:avLst/>
@@ -5674,10 +6099,13 @@
           <a:bodyPr/>
           <a:lstStyle>
             <a:lvl1pPr>
-              <a:defRPr sz="1000">
-                <a:solidFill>
-                  <a:srgbClr val="6B7280"/>
-                </a:solidFill>
+              <a:defRPr sz="900">
+                <a:solidFill>
+                  <a:srgbClr val="5F6B76"/>
+                </a:solidFill>
+                <a:latin typeface="Corbel"/>
+                <a:ea typeface="Corbel"/>
+                <a:cs typeface="Corbel"/>
               </a:defRPr>
             </a:lvl1pPr>
           </a:lstStyle>
@@ -5724,8 +6152,8 @@
         </p:nvSpPr>
         <p:spPr>
           <a:xfrm>
-            <a:off x="502920" y="292608"/>
-            <a:ext cx="8046720" cy="228600"/>
+            <a:off x="566928" y="384048"/>
+            <a:ext cx="7772400" cy="237744"/>
           </a:xfrm>
           <a:prstGeom prst="rect">
             <a:avLst/>
@@ -5741,14 +6169,17 @@
               <a:buNone/>
             </a:pPr>
             <a:r>
-              <a:rPr lang="en-US" sz="1100" b="1" spc="150" kern="0" dirty="0">
-                <a:solidFill>
-                  <a:srgbClr val="0066CC"/>
-                </a:solidFill>
+              <a:rPr lang="en-US" sz="1000" spc="200" kern="0" dirty="0">
+                <a:solidFill>
+                  <a:srgbClr val="9A6A3C"/>
+                </a:solidFill>
+                <a:latin typeface="Corbel" pitchFamily="34" charset="0"/>
+                <a:ea typeface="Corbel" pitchFamily="34" charset="-122"/>
+                <a:cs typeface="Corbel" pitchFamily="34" charset="-120"/>
               </a:rPr>
               <a:t>UNIT 4</a:t>
             </a:r>
-            <a:endParaRPr lang="en-US" sz="1100" dirty="0"/>
+            <a:endParaRPr lang="en-US" sz="1000" dirty="0"/>
           </a:p>
         </p:txBody>
       </p:sp>
@@ -5760,8 +6191,8 @@
         </p:nvSpPr>
         <p:spPr>
           <a:xfrm>
-            <a:off x="502920" y="548640"/>
-            <a:ext cx="8046720" cy="640080"/>
+            <a:off x="566928" y="658368"/>
+            <a:ext cx="7772400" cy="658368"/>
           </a:xfrm>
           <a:prstGeom prst="rect">
             <a:avLst/>
@@ -5774,30 +6205,56 @@
           <a:lstStyle/>
           <a:p>
             <a:pPr indent="0" marL="0">
+              <a:lnSpc>
+                <a:spcPct val="100000"/>
+              </a:lnSpc>
               <a:buNone/>
             </a:pPr>
             <a:r>
-              <a:rPr lang="en-US" sz="2400" b="1" dirty="0">
-                <a:solidFill>
-                  <a:srgbClr val="111827"/>
-                </a:solidFill>
+              <a:rPr lang="en-US" sz="2500" dirty="0">
+                <a:solidFill>
+                  <a:srgbClr val="1C3140"/>
+                </a:solidFill>
+                <a:latin typeface="Constantia" pitchFamily="34" charset="0"/>
+                <a:ea typeface="Constantia" pitchFamily="34" charset="-122"/>
+                <a:cs typeface="Constantia" pitchFamily="34" charset="-120"/>
               </a:rPr>
               <a:t>Key terms (1/2)</a:t>
             </a:r>
-            <a:endParaRPr lang="en-US" sz="2400" dirty="0"/>
-          </a:p>
-        </p:txBody>
-      </p:sp>
-      <p:sp>
-        <p:nvSpPr>
-          <p:cNvPr id="4" name="Text 2"/>
+            <a:endParaRPr lang="en-US" sz="2500" dirty="0"/>
+          </a:p>
+        </p:txBody>
+      </p:sp>
+      <p:sp>
+        <p:nvSpPr>
+          <p:cNvPr id="4" name="Shape 2"/>
           <p:cNvSpPr/>
           <p:nvPr/>
         </p:nvSpPr>
         <p:spPr>
           <a:xfrm>
-            <a:off x="685800" y="1325880"/>
-            <a:ext cx="7772400" cy="3200400"/>
+            <a:off x="566928" y="1335024"/>
+            <a:ext cx="566928" cy="20117"/>
+          </a:xfrm>
+          <a:prstGeom prst="rect">
+            <a:avLst/>
+          </a:prstGeom>
+          <a:solidFill>
+            <a:srgbClr val="9A6A3C"/>
+          </a:solidFill>
+          <a:ln/>
+        </p:spPr>
+      </p:sp>
+      <p:sp>
+        <p:nvSpPr>
+          <p:cNvPr id="5" name="Text 3"/>
+          <p:cNvSpPr/>
+          <p:nvPr/>
+        </p:nvSpPr>
+        <p:spPr>
+          <a:xfrm>
+            <a:off x="713232" y="1664208"/>
+            <a:ext cx="7498080" cy="2788920"/>
           </a:xfrm>
           <a:prstGeom prst="rect">
             <a:avLst/>
@@ -5811,107 +6268,122 @@
           <a:p>
             <a:pPr marL="342900" indent="-342900">
               <a:lnSpc>
-                <a:spcPct val="125000"/>
+                <a:spcPct val="130000"/>
               </a:lnSpc>
               <a:spcAft>
-                <a:spcPts val="800"/>
+                <a:spcPts val="1100"/>
               </a:spcAft>
               <a:buSzPct val="100000"/>
-              <a:buChar char="•"/>
-            </a:pPr>
-            <a:r>
-              <a:rPr lang="en-US" sz="1700" dirty="0">
-                <a:solidFill>
-                  <a:srgbClr val="374151"/>
-                </a:solidFill>
+              <a:buChar char="–"/>
+            </a:pPr>
+            <a:r>
+              <a:rPr lang="en-US" sz="1650" dirty="0">
+                <a:solidFill>
+                  <a:srgbClr val="23282E"/>
+                </a:solidFill>
+                <a:latin typeface="Corbel" pitchFamily="34" charset="0"/>
+                <a:ea typeface="Corbel" pitchFamily="34" charset="-122"/>
+                <a:cs typeface="Corbel" pitchFamily="34" charset="-120"/>
               </a:rPr>
               <a:t>MeSH — Medical Subject Headings — the controlled vocabulary used to index MEDLINE and PubMed records.</a:t>
             </a:r>
-            <a:endParaRPr lang="en-US" sz="1700" dirty="0"/>
+            <a:endParaRPr lang="en-US" sz="1650" dirty="0"/>
           </a:p>
           <a:p>
             <a:pPr marL="342900" indent="-342900">
               <a:lnSpc>
-                <a:spcPct val="125000"/>
+                <a:spcPct val="130000"/>
               </a:lnSpc>
               <a:spcAft>
-                <a:spcPts val="800"/>
+                <a:spcPts val="1100"/>
               </a:spcAft>
               <a:buSzPct val="100000"/>
-              <a:buChar char="•"/>
-            </a:pPr>
-            <a:r>
-              <a:rPr lang="en-US" sz="1700" dirty="0">
-                <a:solidFill>
-                  <a:srgbClr val="374151"/>
-                </a:solidFill>
+              <a:buChar char="–"/>
+            </a:pPr>
+            <a:r>
+              <a:rPr lang="en-US" sz="1650" dirty="0">
+                <a:solidFill>
+                  <a:srgbClr val="23282E"/>
+                </a:solidFill>
+                <a:latin typeface="Corbel" pitchFamily="34" charset="0"/>
+                <a:ea typeface="Corbel" pitchFamily="34" charset="-122"/>
+                <a:cs typeface="Corbel" pitchFamily="34" charset="-120"/>
               </a:rPr>
               <a:t>Boolean operators — AND, OR and NOT, used to combine search concepts.</a:t>
             </a:r>
-            <a:endParaRPr lang="en-US" sz="1700" dirty="0"/>
+            <a:endParaRPr lang="en-US" sz="1650" dirty="0"/>
           </a:p>
           <a:p>
             <a:pPr marL="342900" indent="-342900">
               <a:lnSpc>
-                <a:spcPct val="125000"/>
+                <a:spcPct val="130000"/>
               </a:lnSpc>
               <a:spcAft>
-                <a:spcPts val="800"/>
+                <a:spcPts val="1100"/>
               </a:spcAft>
               <a:buSzPct val="100000"/>
-              <a:buChar char="•"/>
-            </a:pPr>
-            <a:r>
-              <a:rPr lang="en-US" sz="1700" dirty="0">
-                <a:solidFill>
-                  <a:srgbClr val="374151"/>
-                </a:solidFill>
+              <a:buChar char="–"/>
+            </a:pPr>
+            <a:r>
+              <a:rPr lang="en-US" sz="1650" dirty="0">
+                <a:solidFill>
+                  <a:srgbClr val="23282E"/>
+                </a:solidFill>
+                <a:latin typeface="Corbel" pitchFamily="34" charset="0"/>
+                <a:ea typeface="Corbel" pitchFamily="34" charset="-122"/>
+                <a:cs typeface="Corbel" pitchFamily="34" charset="-120"/>
               </a:rPr>
               <a:t>Truncation — A wildcard symbol (usually *) retrieving all word endings from a common stem.</a:t>
             </a:r>
-            <a:endParaRPr lang="en-US" sz="1700" dirty="0"/>
+            <a:endParaRPr lang="en-US" sz="1650" dirty="0"/>
           </a:p>
           <a:p>
             <a:pPr marL="342900" indent="-342900">
               <a:lnSpc>
-                <a:spcPct val="125000"/>
+                <a:spcPct val="130000"/>
               </a:lnSpc>
               <a:spcAft>
-                <a:spcPts val="800"/>
+                <a:spcPts val="1100"/>
               </a:spcAft>
               <a:buSzPct val="100000"/>
-              <a:buChar char="•"/>
-            </a:pPr>
-            <a:r>
-              <a:rPr lang="en-US" sz="1700" dirty="0">
-                <a:solidFill>
-                  <a:srgbClr val="374151"/>
-                </a:solidFill>
+              <a:buChar char="–"/>
+            </a:pPr>
+            <a:r>
+              <a:rPr lang="en-US" sz="1650" dirty="0">
+                <a:solidFill>
+                  <a:srgbClr val="23282E"/>
+                </a:solidFill>
+                <a:latin typeface="Corbel" pitchFamily="34" charset="0"/>
+                <a:ea typeface="Corbel" pitchFamily="34" charset="-122"/>
+                <a:cs typeface="Corbel" pitchFamily="34" charset="-120"/>
               </a:rPr>
               <a:t>Sensitivity — The proportion of all relevant records that a search retrieves.</a:t>
             </a:r>
-            <a:endParaRPr lang="en-US" sz="1700" dirty="0"/>
+            <a:endParaRPr lang="en-US" sz="1650" dirty="0"/>
           </a:p>
           <a:p>
             <a:pPr marL="342900" indent="-342900">
               <a:lnSpc>
-                <a:spcPct val="125000"/>
+                <a:spcPct val="130000"/>
               </a:lnSpc>
               <a:spcAft>
-                <a:spcPts val="800"/>
+                <a:spcPts val="1100"/>
               </a:spcAft>
               <a:buSzPct val="100000"/>
-              <a:buChar char="•"/>
-            </a:pPr>
-            <a:r>
-              <a:rPr lang="en-US" sz="1700" dirty="0">
-                <a:solidFill>
-                  <a:srgbClr val="374151"/>
-                </a:solidFill>
+              <a:buChar char="–"/>
+            </a:pPr>
+            <a:r>
+              <a:rPr lang="en-US" sz="1650" dirty="0">
+                <a:solidFill>
+                  <a:srgbClr val="23282E"/>
+                </a:solidFill>
+                <a:latin typeface="Corbel" pitchFamily="34" charset="0"/>
+                <a:ea typeface="Corbel" pitchFamily="34" charset="-122"/>
+                <a:cs typeface="Corbel" pitchFamily="34" charset="-120"/>
               </a:rPr>
               <a:t>Precision — The proportion of retrieved records that are actually relevant.</a:t>
             </a:r>
-            <a:endParaRPr lang="en-US" sz="1700" dirty="0"/>
+            <a:endParaRPr lang="en-US" sz="1650" dirty="0"/>
           </a:p>
         </p:txBody>
       </p:sp>
@@ -5927,8 +6399,8 @@
         </p:nvSpPr>
         <p:spPr>
           <a:xfrm>
-            <a:off x="8503920" y="4709160"/>
-            <a:ext cx="800000" cy="300000"/>
+            <a:off x="566928" y="4700016"/>
+            <a:ext cx="914400" cy="274320"/>
           </a:xfrm>
           <a:prstGeom prst="rect">
             <a:avLst/>
@@ -5943,10 +6415,13 @@
           <a:bodyPr/>
           <a:lstStyle>
             <a:lvl1pPr>
-              <a:defRPr sz="1000">
-                <a:solidFill>
-                  <a:srgbClr val="6B7280"/>
-                </a:solidFill>
+              <a:defRPr sz="900">
+                <a:solidFill>
+                  <a:srgbClr val="5F6B76"/>
+                </a:solidFill>
+                <a:latin typeface="Corbel"/>
+                <a:ea typeface="Corbel"/>
+                <a:cs typeface="Corbel"/>
               </a:defRPr>
             </a:lvl1pPr>
           </a:lstStyle>
@@ -5993,8 +6468,8 @@
         </p:nvSpPr>
         <p:spPr>
           <a:xfrm>
-            <a:off x="502920" y="292608"/>
-            <a:ext cx="8046720" cy="228600"/>
+            <a:off x="566928" y="384048"/>
+            <a:ext cx="7772400" cy="237744"/>
           </a:xfrm>
           <a:prstGeom prst="rect">
             <a:avLst/>
@@ -6010,14 +6485,17 @@
               <a:buNone/>
             </a:pPr>
             <a:r>
-              <a:rPr lang="en-US" sz="1100" b="1" spc="150" kern="0" dirty="0">
-                <a:solidFill>
-                  <a:srgbClr val="0066CC"/>
-                </a:solidFill>
+              <a:rPr lang="en-US" sz="1000" spc="200" kern="0" dirty="0">
+                <a:solidFill>
+                  <a:srgbClr val="9A6A3C"/>
+                </a:solidFill>
+                <a:latin typeface="Corbel" pitchFamily="34" charset="0"/>
+                <a:ea typeface="Corbel" pitchFamily="34" charset="-122"/>
+                <a:cs typeface="Corbel" pitchFamily="34" charset="-120"/>
               </a:rPr>
               <a:t>UNIT 4</a:t>
             </a:r>
-            <a:endParaRPr lang="en-US" sz="1100" dirty="0"/>
+            <a:endParaRPr lang="en-US" sz="1000" dirty="0"/>
           </a:p>
         </p:txBody>
       </p:sp>
@@ -6029,8 +6507,8 @@
         </p:nvSpPr>
         <p:spPr>
           <a:xfrm>
-            <a:off x="502920" y="548640"/>
-            <a:ext cx="8046720" cy="640080"/>
+            <a:off x="566928" y="658368"/>
+            <a:ext cx="7772400" cy="658368"/>
           </a:xfrm>
           <a:prstGeom prst="rect">
             <a:avLst/>
@@ -6043,30 +6521,56 @@
           <a:lstStyle/>
           <a:p>
             <a:pPr indent="0" marL="0">
+              <a:lnSpc>
+                <a:spcPct val="100000"/>
+              </a:lnSpc>
               <a:buNone/>
             </a:pPr>
             <a:r>
-              <a:rPr lang="en-US" sz="2400" b="1" dirty="0">
-                <a:solidFill>
-                  <a:srgbClr val="111827"/>
-                </a:solidFill>
+              <a:rPr lang="en-US" sz="2500" dirty="0">
+                <a:solidFill>
+                  <a:srgbClr val="1C3140"/>
+                </a:solidFill>
+                <a:latin typeface="Constantia" pitchFamily="34" charset="0"/>
+                <a:ea typeface="Constantia" pitchFamily="34" charset="-122"/>
+                <a:cs typeface="Constantia" pitchFamily="34" charset="-120"/>
               </a:rPr>
               <a:t>Key terms (2/2)</a:t>
             </a:r>
-            <a:endParaRPr lang="en-US" sz="2400" dirty="0"/>
-          </a:p>
-        </p:txBody>
-      </p:sp>
-      <p:sp>
-        <p:nvSpPr>
-          <p:cNvPr id="4" name="Text 2"/>
+            <a:endParaRPr lang="en-US" sz="2500" dirty="0"/>
+          </a:p>
+        </p:txBody>
+      </p:sp>
+      <p:sp>
+        <p:nvSpPr>
+          <p:cNvPr id="4" name="Shape 2"/>
           <p:cNvSpPr/>
           <p:nvPr/>
         </p:nvSpPr>
         <p:spPr>
           <a:xfrm>
-            <a:off x="685800" y="1325880"/>
-            <a:ext cx="7772400" cy="3200400"/>
+            <a:off x="566928" y="1335024"/>
+            <a:ext cx="566928" cy="20117"/>
+          </a:xfrm>
+          <a:prstGeom prst="rect">
+            <a:avLst/>
+          </a:prstGeom>
+          <a:solidFill>
+            <a:srgbClr val="9A6A3C"/>
+          </a:solidFill>
+          <a:ln/>
+        </p:spPr>
+      </p:sp>
+      <p:sp>
+        <p:nvSpPr>
+          <p:cNvPr id="5" name="Text 3"/>
+          <p:cNvSpPr/>
+          <p:nvPr/>
+        </p:nvSpPr>
+        <p:spPr>
+          <a:xfrm>
+            <a:off x="713232" y="1664208"/>
+            <a:ext cx="7498080" cy="2788920"/>
           </a:xfrm>
           <a:prstGeom prst="rect">
             <a:avLst/>
@@ -6080,19 +6584,22 @@
           <a:p>
             <a:pPr marL="342900" indent="-342900">
               <a:lnSpc>
-                <a:spcPct val="125000"/>
+                <a:spcPct val="130000"/>
               </a:lnSpc>
               <a:spcAft>
-                <a:spcPts val="800"/>
+                <a:spcPts val="1100"/>
               </a:spcAft>
               <a:buSzPct val="100000"/>
-              <a:buChar char="•"/>
+              <a:buChar char="–"/>
             </a:pPr>
             <a:r>
               <a:rPr lang="en-US" sz="1500" dirty="0">
                 <a:solidFill>
-                  <a:srgbClr val="374151"/>
-                </a:solidFill>
+                  <a:srgbClr val="23282E"/>
+                </a:solidFill>
+                <a:latin typeface="Corbel" pitchFamily="34" charset="0"/>
+                <a:ea typeface="Corbel" pitchFamily="34" charset="-122"/>
+                <a:cs typeface="Corbel" pitchFamily="34" charset="-120"/>
               </a:rPr>
               <a:t>PRISMA flow diagram — The standard figure reporting how records moved from identification through screening to inclusion.</a:t>
             </a:r>
@@ -6101,19 +6608,22 @@
           <a:p>
             <a:pPr marL="342900" indent="-342900">
               <a:lnSpc>
-                <a:spcPct val="125000"/>
+                <a:spcPct val="130000"/>
               </a:lnSpc>
               <a:spcAft>
-                <a:spcPts val="800"/>
+                <a:spcPts val="1100"/>
               </a:spcAft>
               <a:buSzPct val="100000"/>
-              <a:buChar char="•"/>
+              <a:buChar char="–"/>
             </a:pPr>
             <a:r>
               <a:rPr lang="en-US" sz="1500" dirty="0">
                 <a:solidFill>
-                  <a:srgbClr val="374151"/>
-                </a:solidFill>
+                  <a:srgbClr val="23282E"/>
+                </a:solidFill>
+                <a:latin typeface="Corbel" pitchFamily="34" charset="0"/>
+                <a:ea typeface="Corbel" pitchFamily="34" charset="-122"/>
+                <a:cs typeface="Corbel" pitchFamily="34" charset="-120"/>
               </a:rPr>
               <a:t>Grey literature — Reports, theses and working papers published outside commercial channels and often outside major indexes.</a:t>
             </a:r>
@@ -6133,8 +6643,8 @@
         </p:nvSpPr>
         <p:spPr>
           <a:xfrm>
-            <a:off x="8503920" y="4709160"/>
-            <a:ext cx="800000" cy="300000"/>
+            <a:off x="566928" y="4700016"/>
+            <a:ext cx="914400" cy="274320"/>
           </a:xfrm>
           <a:prstGeom prst="rect">
             <a:avLst/>
@@ -6149,10 +6659,13 @@
           <a:bodyPr/>
           <a:lstStyle>
             <a:lvl1pPr>
-              <a:defRPr sz="1000">
-                <a:solidFill>
-                  <a:srgbClr val="6B7280"/>
-                </a:solidFill>
+              <a:defRPr sz="900">
+                <a:solidFill>
+                  <a:srgbClr val="5F6B76"/>
+                </a:solidFill>
+                <a:latin typeface="Corbel"/>
+                <a:ea typeface="Corbel"/>
+                <a:cs typeface="Corbel"/>
               </a:defRPr>
             </a:lvl1pPr>
           </a:lstStyle>
@@ -6199,8 +6712,8 @@
         </p:nvSpPr>
         <p:spPr>
           <a:xfrm>
-            <a:off x="502920" y="292608"/>
-            <a:ext cx="8046720" cy="228600"/>
+            <a:off x="566928" y="384048"/>
+            <a:ext cx="7772400" cy="237744"/>
           </a:xfrm>
           <a:prstGeom prst="rect">
             <a:avLst/>
@@ -6216,14 +6729,17 @@
               <a:buNone/>
             </a:pPr>
             <a:r>
-              <a:rPr lang="en-US" sz="1100" b="1" spc="150" kern="0" dirty="0">
-                <a:solidFill>
-                  <a:srgbClr val="0066CC"/>
-                </a:solidFill>
+              <a:rPr lang="en-US" sz="1000" spc="200" kern="0" dirty="0">
+                <a:solidFill>
+                  <a:srgbClr val="9A6A3C"/>
+                </a:solidFill>
+                <a:latin typeface="Corbel" pitchFamily="34" charset="0"/>
+                <a:ea typeface="Corbel" pitchFamily="34" charset="-122"/>
+                <a:cs typeface="Corbel" pitchFamily="34" charset="-120"/>
               </a:rPr>
               <a:t>UNIT 4</a:t>
             </a:r>
-            <a:endParaRPr lang="en-US" sz="1100" dirty="0"/>
+            <a:endParaRPr lang="en-US" sz="1000" dirty="0"/>
           </a:p>
         </p:txBody>
       </p:sp>
@@ -6235,8 +6751,8 @@
         </p:nvSpPr>
         <p:spPr>
           <a:xfrm>
-            <a:off x="502920" y="548640"/>
-            <a:ext cx="8046720" cy="640080"/>
+            <a:off x="566928" y="658368"/>
+            <a:ext cx="7772400" cy="658368"/>
           </a:xfrm>
           <a:prstGeom prst="rect">
             <a:avLst/>
@@ -6249,30 +6765,56 @@
           <a:lstStyle/>
           <a:p>
             <a:pPr indent="0" marL="0">
+              <a:lnSpc>
+                <a:spcPct val="100000"/>
+              </a:lnSpc>
               <a:buNone/>
             </a:pPr>
             <a:r>
-              <a:rPr lang="en-US" sz="2400" b="1" dirty="0">
-                <a:solidFill>
-                  <a:srgbClr val="111827"/>
-                </a:solidFill>
+              <a:rPr lang="en-US" sz="2500" dirty="0">
+                <a:solidFill>
+                  <a:srgbClr val="1C3140"/>
+                </a:solidFill>
+                <a:latin typeface="Constantia" pitchFamily="34" charset="0"/>
+                <a:ea typeface="Constantia" pitchFamily="34" charset="-122"/>
+                <a:cs typeface="Constantia" pitchFamily="34" charset="-120"/>
               </a:rPr>
               <a:t>What you will be able to do</a:t>
             </a:r>
-            <a:endParaRPr lang="en-US" sz="2400" dirty="0"/>
-          </a:p>
-        </p:txBody>
-      </p:sp>
-      <p:sp>
-        <p:nvSpPr>
-          <p:cNvPr id="4" name="Text 2"/>
+            <a:endParaRPr lang="en-US" sz="2500" dirty="0"/>
+          </a:p>
+        </p:txBody>
+      </p:sp>
+      <p:sp>
+        <p:nvSpPr>
+          <p:cNvPr id="4" name="Shape 2"/>
           <p:cNvSpPr/>
           <p:nvPr/>
         </p:nvSpPr>
         <p:spPr>
           <a:xfrm>
-            <a:off x="685800" y="1325880"/>
-            <a:ext cx="7772400" cy="3200400"/>
+            <a:off x="566928" y="1335024"/>
+            <a:ext cx="566928" cy="20117"/>
+          </a:xfrm>
+          <a:prstGeom prst="rect">
+            <a:avLst/>
+          </a:prstGeom>
+          <a:solidFill>
+            <a:srgbClr val="9A6A3C"/>
+          </a:solidFill>
+          <a:ln/>
+        </p:spPr>
+      </p:sp>
+      <p:sp>
+        <p:nvSpPr>
+          <p:cNvPr id="5" name="Text 3"/>
+          <p:cNvSpPr/>
+          <p:nvPr/>
+        </p:nvSpPr>
+        <p:spPr>
+          <a:xfrm>
+            <a:off x="713232" y="1664208"/>
+            <a:ext cx="7498080" cy="2788920"/>
           </a:xfrm>
           <a:prstGeom prst="rect">
             <a:avLst/>
@@ -6286,19 +6828,22 @@
           <a:p>
             <a:pPr marL="342900" indent="-342900">
               <a:lnSpc>
-                <a:spcPct val="125000"/>
+                <a:spcPct val="130000"/>
               </a:lnSpc>
               <a:spcAft>
-                <a:spcPts val="800"/>
+                <a:spcPts val="1100"/>
               </a:spcAft>
               <a:buSzPct val="100000"/>
-              <a:buChar char="•"/>
+              <a:buChar char="–"/>
             </a:pPr>
             <a:r>
               <a:rPr lang="en-US" sz="1800" dirty="0">
                 <a:solidFill>
-                  <a:srgbClr val="374151"/>
-                </a:solidFill>
+                  <a:srgbClr val="23282E"/>
+                </a:solidFill>
+                <a:latin typeface="Corbel" pitchFamily="34" charset="0"/>
+                <a:ea typeface="Corbel" pitchFamily="34" charset="-122"/>
+                <a:cs typeface="Corbel" pitchFamily="34" charset="-120"/>
               </a:rPr>
               <a:t>Select appropriate databases for a given topic and justify the choice</a:t>
             </a:r>
@@ -6307,19 +6852,22 @@
           <a:p>
             <a:pPr marL="342900" indent="-342900">
               <a:lnSpc>
-                <a:spcPct val="125000"/>
+                <a:spcPct val="130000"/>
               </a:lnSpc>
               <a:spcAft>
-                <a:spcPts val="800"/>
+                <a:spcPts val="1100"/>
               </a:spcAft>
               <a:buSzPct val="100000"/>
-              <a:buChar char="•"/>
+              <a:buChar char="–"/>
             </a:pPr>
             <a:r>
               <a:rPr lang="en-US" sz="1800" dirty="0">
                 <a:solidFill>
-                  <a:srgbClr val="374151"/>
-                </a:solidFill>
+                  <a:srgbClr val="23282E"/>
+                </a:solidFill>
+                <a:latin typeface="Corbel" pitchFamily="34" charset="0"/>
+                <a:ea typeface="Corbel" pitchFamily="34" charset="-122"/>
+                <a:cs typeface="Corbel" pitchFamily="34" charset="-120"/>
               </a:rPr>
               <a:t>Construct a Boolean search using controlled vocabulary and field tags</a:t>
             </a:r>
@@ -6328,19 +6876,22 @@
           <a:p>
             <a:pPr marL="342900" indent="-342900">
               <a:lnSpc>
-                <a:spcPct val="125000"/>
+                <a:spcPct val="130000"/>
               </a:lnSpc>
               <a:spcAft>
-                <a:spcPts val="800"/>
+                <a:spcPts val="1100"/>
               </a:spcAft>
               <a:buSzPct val="100000"/>
-              <a:buChar char="•"/>
+              <a:buChar char="–"/>
             </a:pPr>
             <a:r>
               <a:rPr lang="en-US" sz="1800" dirty="0">
                 <a:solidFill>
-                  <a:srgbClr val="374151"/>
-                </a:solidFill>
+                  <a:srgbClr val="23282E"/>
+                </a:solidFill>
+                <a:latin typeface="Corbel" pitchFamily="34" charset="0"/>
+                <a:ea typeface="Corbel" pitchFamily="34" charset="-122"/>
+                <a:cs typeface="Corbel" pitchFamily="34" charset="-120"/>
               </a:rPr>
               <a:t>Use MeSH terms, truncation, phrase searching and proximity operators</a:t>
             </a:r>
@@ -6349,19 +6900,22 @@
           <a:p>
             <a:pPr marL="342900" indent="-342900">
               <a:lnSpc>
-                <a:spcPct val="125000"/>
+                <a:spcPct val="130000"/>
               </a:lnSpc>
               <a:spcAft>
-                <a:spcPts val="800"/>
+                <a:spcPts val="1100"/>
               </a:spcAft>
               <a:buSzPct val="100000"/>
-              <a:buChar char="•"/>
+              <a:buChar char="–"/>
             </a:pPr>
             <a:r>
               <a:rPr lang="en-US" sz="1800" dirty="0">
                 <a:solidFill>
-                  <a:srgbClr val="374151"/>
-                </a:solidFill>
+                  <a:srgbClr val="23282E"/>
+                </a:solidFill>
+                <a:latin typeface="Corbel" pitchFamily="34" charset="0"/>
+                <a:ea typeface="Corbel" pitchFamily="34" charset="-122"/>
+                <a:cs typeface="Corbel" pitchFamily="34" charset="-120"/>
               </a:rPr>
               <a:t>Balance sensitivity against precision and explain the trade-off</a:t>
             </a:r>
@@ -6370,19 +6924,22 @@
           <a:p>
             <a:pPr marL="342900" indent="-342900">
               <a:lnSpc>
-                <a:spcPct val="125000"/>
+                <a:spcPct val="130000"/>
               </a:lnSpc>
               <a:spcAft>
-                <a:spcPts val="800"/>
+                <a:spcPts val="1100"/>
               </a:spcAft>
               <a:buSzPct val="100000"/>
-              <a:buChar char="•"/>
+              <a:buChar char="–"/>
             </a:pPr>
             <a:r>
               <a:rPr lang="en-US" sz="1800" dirty="0">
                 <a:solidFill>
-                  <a:srgbClr val="374151"/>
-                </a:solidFill>
+                  <a:srgbClr val="23282E"/>
+                </a:solidFill>
+                <a:latin typeface="Corbel" pitchFamily="34" charset="0"/>
+                <a:ea typeface="Corbel" pitchFamily="34" charset="-122"/>
+                <a:cs typeface="Corbel" pitchFamily="34" charset="-120"/>
               </a:rPr>
               <a:t>Document a search so that another researcher can reproduce it exactly</a:t>
             </a:r>
@@ -6391,19 +6948,22 @@
           <a:p>
             <a:pPr marL="342900" indent="-342900">
               <a:lnSpc>
-                <a:spcPct val="125000"/>
+                <a:spcPct val="130000"/>
               </a:lnSpc>
               <a:spcAft>
-                <a:spcPts val="800"/>
+                <a:spcPts val="1100"/>
               </a:spcAft>
               <a:buSzPct val="100000"/>
-              <a:buChar char="•"/>
+              <a:buChar char="–"/>
             </a:pPr>
             <a:r>
               <a:rPr lang="en-US" sz="1800" dirty="0">
                 <a:solidFill>
-                  <a:srgbClr val="374151"/>
-                </a:solidFill>
+                  <a:srgbClr val="23282E"/>
+                </a:solidFill>
+                <a:latin typeface="Corbel" pitchFamily="34" charset="0"/>
+                <a:ea typeface="Corbel" pitchFamily="34" charset="-122"/>
+                <a:cs typeface="Corbel" pitchFamily="34" charset="-120"/>
               </a:rPr>
               <a:t>Set up Zotero or Mendeley and generate a formatted bibliography automatically</a:t>
             </a:r>
@@ -6423,8 +6983,8 @@
         </p:nvSpPr>
         <p:spPr>
           <a:xfrm>
-            <a:off x="8503920" y="4709160"/>
-            <a:ext cx="800000" cy="300000"/>
+            <a:off x="566928" y="4700016"/>
+            <a:ext cx="914400" cy="274320"/>
           </a:xfrm>
           <a:prstGeom prst="rect">
             <a:avLst/>
@@ -6439,10 +6999,13 @@
           <a:bodyPr/>
           <a:lstStyle>
             <a:lvl1pPr>
-              <a:defRPr sz="1000">
-                <a:solidFill>
-                  <a:srgbClr val="6B7280"/>
-                </a:solidFill>
+              <a:defRPr sz="900">
+                <a:solidFill>
+                  <a:srgbClr val="5F6B76"/>
+                </a:solidFill>
+                <a:latin typeface="Corbel"/>
+                <a:ea typeface="Corbel"/>
+                <a:cs typeface="Corbel"/>
               </a:defRPr>
             </a:lvl1pPr>
           </a:lstStyle>
@@ -6489,8 +7052,8 @@
         </p:nvSpPr>
         <p:spPr>
           <a:xfrm>
-            <a:off x="502920" y="292608"/>
-            <a:ext cx="8046720" cy="228600"/>
+            <a:off x="685800" y="1024128"/>
+            <a:ext cx="6766560" cy="292608"/>
           </a:xfrm>
           <a:prstGeom prst="rect">
             <a:avLst/>
@@ -6506,14 +7069,17 @@
               <a:buNone/>
             </a:pPr>
             <a:r>
-              <a:rPr lang="en-US" sz="1100" b="1" spc="150" kern="0" dirty="0">
-                <a:solidFill>
-                  <a:srgbClr val="0066CC"/>
-                </a:solidFill>
-              </a:rPr>
-              <a:t>UNIT 4  ·  OVER TO YOU</a:t>
-            </a:r>
-            <a:endParaRPr lang="en-US" sz="1100" dirty="0"/>
+              <a:rPr lang="en-US" sz="1150" spc="240" kern="0" dirty="0">
+                <a:solidFill>
+                  <a:srgbClr val="C8A67B"/>
+                </a:solidFill>
+                <a:latin typeface="Corbel" pitchFamily="34" charset="0"/>
+                <a:ea typeface="Corbel" pitchFamily="34" charset="-122"/>
+                <a:cs typeface="Corbel" pitchFamily="34" charset="-120"/>
+              </a:rPr>
+              <a:t>Over to you</a:t>
+            </a:r>
+            <a:endParaRPr lang="en-US" sz="1150" dirty="0"/>
           </a:p>
         </p:txBody>
       </p:sp>
@@ -6525,8 +7091,8 @@
         </p:nvSpPr>
         <p:spPr>
           <a:xfrm>
-            <a:off x="502920" y="548640"/>
-            <a:ext cx="8046720" cy="640080"/>
+            <a:off x="685800" y="1700784"/>
+            <a:ext cx="6858000" cy="640080"/>
           </a:xfrm>
           <a:prstGeom prst="rect">
             <a:avLst/>
@@ -6542,14 +7108,17 @@
               <a:buNone/>
             </a:pPr>
             <a:r>
-              <a:rPr lang="en-US" sz="2400" b="1" dirty="0">
-                <a:solidFill>
-                  <a:srgbClr val="111827"/>
-                </a:solidFill>
+              <a:rPr lang="en-US" sz="3000" dirty="0">
+                <a:solidFill>
+                  <a:srgbClr val="FFFFFF"/>
+                </a:solidFill>
+                <a:latin typeface="Constantia" pitchFamily="34" charset="0"/>
+                <a:ea typeface="Constantia" pitchFamily="34" charset="-122"/>
+                <a:cs typeface="Constantia" pitchFamily="34" charset="-120"/>
               </a:rPr>
               <a:t>Activity</a:t>
             </a:r>
-            <a:endParaRPr lang="en-US" sz="2400" dirty="0"/>
+            <a:endParaRPr lang="en-US" sz="3000" dirty="0"/>
           </a:p>
         </p:txBody>
       </p:sp>
@@ -6561,8 +7130,8 @@
         </p:nvSpPr>
         <p:spPr>
           <a:xfrm>
-            <a:off x="685800" y="1325880"/>
-            <a:ext cx="7772400" cy="3200400"/>
+            <a:off x="685800" y="2487168"/>
+            <a:ext cx="6949440" cy="1737360"/>
           </a:xfrm>
           <a:prstGeom prst="rect">
             <a:avLst/>
@@ -6574,70 +7143,24 @@
           <a:bodyPr wrap="square" rtlCol="0" anchor="t"/>
           <a:lstStyle/>
           <a:p>
-            <a:pPr marL="342900" indent="-342900">
+            <a:pPr indent="0" marL="0">
               <a:lnSpc>
-                <a:spcPct val="125000"/>
+                <a:spcPct val="134000"/>
               </a:lnSpc>
-              <a:spcAft>
-                <a:spcPts val="800"/>
-              </a:spcAft>
-              <a:buSzPct val="100000"/>
-              <a:buChar char="•"/>
-            </a:pPr>
-            <a:r>
-              <a:rPr lang="en-US" sz="1300" dirty="0">
-                <a:solidFill>
-                  <a:srgbClr val="374151"/>
-                </a:solidFill>
+              <a:buNone/>
+            </a:pPr>
+            <a:r>
+              <a:rPr lang="en-US" sz="1450" dirty="0">
+                <a:solidFill>
+                  <a:srgbClr val="C4CCD4"/>
+                </a:solidFill>
+                <a:latin typeface="Corbel" pitchFamily="34" charset="0"/>
+                <a:ea typeface="Corbel" pitchFamily="34" charset="-122"/>
+                <a:cs typeface="Corbel" pitchFamily="34" charset="-120"/>
               </a:rPr>
               <a:t>Build a full PubMed strategy for your own question. Produce at least two concepts, each with MeSH and free-text synonyms combined by OR, then joined by AND. Record the date and the number of hits. Import the first twenty results into Zotero and generate a bibliography in APA, then switch it to Vancouver.</a:t>
             </a:r>
-            <a:endParaRPr lang="en-US" sz="1300" dirty="0"/>
-          </a:p>
-        </p:txBody>
-      </p:sp>
-      <p:sp>
-        <p:nvSpPr>
-          <p:cNvPr id="25" name="Slide Number Placeholder 0"/>
-          <p:cNvSpPr>
-            <a:spLocks noGrp="1"/>
-          </p:cNvSpPr>
-          <p:nvPr>
-            <p:ph type="sldNum" sz="quarter" idx="4294967295"/>
-          </p:nvPr>
-        </p:nvSpPr>
-        <p:spPr>
-          <a:xfrm>
-            <a:off x="8503920" y="4709160"/>
-            <a:ext cx="800000" cy="300000"/>
-          </a:xfrm>
-          <a:prstGeom prst="rect">
-            <a:avLst/>
-          </a:prstGeom>
-          <a:extLst>
-            <a:ext uri="{C572A759-6A51-4108-AA02-DFA0A04FC94B}">
-              <ma14:wrappingTextBoxFlag xmlns:ma14="http://schemas.microsoft.com/office/mac/drawingml/2011/main" val="0"/>
-            </a:ext>
-          </a:extLst>
-        </p:spPr>
-        <p:txBody>
-          <a:bodyPr/>
-          <a:lstStyle>
-            <a:lvl1pPr>
-              <a:defRPr sz="1000">
-                <a:solidFill>
-                  <a:srgbClr val="6B7280"/>
-                </a:solidFill>
-              </a:defRPr>
-            </a:lvl1pPr>
-          </a:lstStyle>
-          <a:p>
-            <a:pPr algn="l"/>
-            <a:fld id="{F7021451-1387-4CA6-816F-3879F97B5CBC}" type="slidenum">
-              <a:rPr b="0" lang="en-US"/>
-              <a:t>20</a:t>
-            </a:fld>
-            <a:endParaRPr lang="en-US"/>
+            <a:endParaRPr lang="en-US" sz="1450" dirty="0"/>
           </a:p>
         </p:txBody>
       </p:sp>
@@ -6674,8 +7197,8 @@
         </p:nvSpPr>
         <p:spPr>
           <a:xfrm>
-            <a:off x="502920" y="292608"/>
-            <a:ext cx="8046720" cy="228600"/>
+            <a:off x="566928" y="384048"/>
+            <a:ext cx="7772400" cy="237744"/>
           </a:xfrm>
           <a:prstGeom prst="rect">
             <a:avLst/>
@@ -6691,14 +7214,17 @@
               <a:buNone/>
             </a:pPr>
             <a:r>
-              <a:rPr lang="en-US" sz="1100" b="1" spc="150" kern="0" dirty="0">
-                <a:solidFill>
-                  <a:srgbClr val="0066CC"/>
-                </a:solidFill>
+              <a:rPr lang="en-US" sz="1000" spc="200" kern="0" dirty="0">
+                <a:solidFill>
+                  <a:srgbClr val="9A6A3C"/>
+                </a:solidFill>
+                <a:latin typeface="Corbel" pitchFamily="34" charset="0"/>
+                <a:ea typeface="Corbel" pitchFamily="34" charset="-122"/>
+                <a:cs typeface="Corbel" pitchFamily="34" charset="-120"/>
               </a:rPr>
               <a:t>UNIT 4</a:t>
             </a:r>
-            <a:endParaRPr lang="en-US" sz="1100" dirty="0"/>
+            <a:endParaRPr lang="en-US" sz="1000" dirty="0"/>
           </a:p>
         </p:txBody>
       </p:sp>
@@ -6710,8 +7236,8 @@
         </p:nvSpPr>
         <p:spPr>
           <a:xfrm>
-            <a:off x="502920" y="548640"/>
-            <a:ext cx="8046720" cy="640080"/>
+            <a:off x="566928" y="658368"/>
+            <a:ext cx="7772400" cy="658368"/>
           </a:xfrm>
           <a:prstGeom prst="rect">
             <a:avLst/>
@@ -6724,30 +7250,56 @@
           <a:lstStyle/>
           <a:p>
             <a:pPr indent="0" marL="0">
+              <a:lnSpc>
+                <a:spcPct val="100000"/>
+              </a:lnSpc>
               <a:buNone/>
             </a:pPr>
             <a:r>
-              <a:rPr lang="en-US" sz="2400" b="1" dirty="0">
-                <a:solidFill>
-                  <a:srgbClr val="111827"/>
-                </a:solidFill>
+              <a:rPr lang="en-US" sz="2500" dirty="0">
+                <a:solidFill>
+                  <a:srgbClr val="1C3140"/>
+                </a:solidFill>
+                <a:latin typeface="Constantia" pitchFamily="34" charset="0"/>
+                <a:ea typeface="Constantia" pitchFamily="34" charset="-122"/>
+                <a:cs typeface="Constantia" pitchFamily="34" charset="-120"/>
               </a:rPr>
               <a:t>The major databases (1/2)</a:t>
             </a:r>
-            <a:endParaRPr lang="en-US" sz="2400" dirty="0"/>
-          </a:p>
-        </p:txBody>
-      </p:sp>
-      <p:sp>
-        <p:nvSpPr>
-          <p:cNvPr id="4" name="Text 2"/>
+            <a:endParaRPr lang="en-US" sz="2500" dirty="0"/>
+          </a:p>
+        </p:txBody>
+      </p:sp>
+      <p:sp>
+        <p:nvSpPr>
+          <p:cNvPr id="4" name="Shape 2"/>
           <p:cNvSpPr/>
           <p:nvPr/>
         </p:nvSpPr>
         <p:spPr>
           <a:xfrm>
-            <a:off x="685800" y="1325880"/>
-            <a:ext cx="7772400" cy="3200400"/>
+            <a:off x="566928" y="1335024"/>
+            <a:ext cx="566928" cy="20117"/>
+          </a:xfrm>
+          <a:prstGeom prst="rect">
+            <a:avLst/>
+          </a:prstGeom>
+          <a:solidFill>
+            <a:srgbClr val="9A6A3C"/>
+          </a:solidFill>
+          <a:ln/>
+        </p:spPr>
+      </p:sp>
+      <p:sp>
+        <p:nvSpPr>
+          <p:cNvPr id="5" name="Text 3"/>
+          <p:cNvSpPr/>
+          <p:nvPr/>
+        </p:nvSpPr>
+        <p:spPr>
+          <a:xfrm>
+            <a:off x="713232" y="1664208"/>
+            <a:ext cx="7498080" cy="2788920"/>
           </a:xfrm>
           <a:prstGeom prst="rect">
             <a:avLst/>
@@ -6761,19 +7313,22 @@
           <a:p>
             <a:pPr marL="342900" indent="-342900">
               <a:lnSpc>
-                <a:spcPct val="125000"/>
+                <a:spcPct val="130000"/>
               </a:lnSpc>
               <a:spcAft>
-                <a:spcPts val="800"/>
+                <a:spcPts val="1100"/>
               </a:spcAft>
               <a:buSzPct val="100000"/>
-              <a:buChar char="•"/>
+              <a:buChar char="–"/>
             </a:pPr>
             <a:r>
               <a:rPr lang="en-US" sz="1500" dirty="0">
                 <a:solidFill>
-                  <a:srgbClr val="374151"/>
-                </a:solidFill>
+                  <a:srgbClr val="23282E"/>
+                </a:solidFill>
+                <a:latin typeface="Corbel" pitchFamily="34" charset="0"/>
+                <a:ea typeface="Corbel" pitchFamily="34" charset="-122"/>
+                <a:cs typeface="Corbel" pitchFamily="34" charset="-120"/>
               </a:rPr>
               <a:t>PubMed / MEDLINE — biomedical and life sciences; free; indexed with MeSH controlled vocabulary</a:t>
             </a:r>
@@ -6782,19 +7337,22 @@
           <a:p>
             <a:pPr marL="342900" indent="-342900">
               <a:lnSpc>
-                <a:spcPct val="125000"/>
+                <a:spcPct val="130000"/>
               </a:lnSpc>
               <a:spcAft>
-                <a:spcPts val="800"/>
+                <a:spcPts val="1100"/>
               </a:spcAft>
               <a:buSzPct val="100000"/>
-              <a:buChar char="•"/>
+              <a:buChar char="–"/>
             </a:pPr>
             <a:r>
               <a:rPr lang="en-US" sz="1500" dirty="0">
                 <a:solidFill>
-                  <a:srgbClr val="374151"/>
-                </a:solidFill>
+                  <a:srgbClr val="23282E"/>
+                </a:solidFill>
+                <a:latin typeface="Corbel" pitchFamily="34" charset="0"/>
+                <a:ea typeface="Corbel" pitchFamily="34" charset="-122"/>
+                <a:cs typeface="Corbel" pitchFamily="34" charset="-120"/>
               </a:rPr>
               <a:t>Scopus and Web of Science — large multidisciplinary citation databases; subscription; best for citation tracking and bibliometrics</a:t>
             </a:r>
@@ -6803,19 +7361,22 @@
           <a:p>
             <a:pPr marL="342900" indent="-342900">
               <a:lnSpc>
-                <a:spcPct val="125000"/>
+                <a:spcPct val="130000"/>
               </a:lnSpc>
               <a:spcAft>
-                <a:spcPts val="800"/>
+                <a:spcPts val="1100"/>
               </a:spcAft>
               <a:buSzPct val="100000"/>
-              <a:buChar char="•"/>
+              <a:buChar char="–"/>
             </a:pPr>
             <a:r>
               <a:rPr lang="en-US" sz="1500" dirty="0">
                 <a:solidFill>
-                  <a:srgbClr val="374151"/>
-                </a:solidFill>
+                  <a:srgbClr val="23282E"/>
+                </a:solidFill>
+                <a:latin typeface="Corbel" pitchFamily="34" charset="0"/>
+                <a:ea typeface="Corbel" pitchFamily="34" charset="-122"/>
+                <a:cs typeface="Corbel" pitchFamily="34" charset="-120"/>
               </a:rPr>
               <a:t>Cochrane Library — controlled trials and systematic reviews; essential for effectiveness questions</a:t>
             </a:r>
@@ -6824,19 +7385,22 @@
           <a:p>
             <a:pPr marL="342900" indent="-342900">
               <a:lnSpc>
-                <a:spcPct val="125000"/>
+                <a:spcPct val="130000"/>
               </a:lnSpc>
               <a:spcAft>
-                <a:spcPts val="800"/>
+                <a:spcPts val="1100"/>
               </a:spcAft>
               <a:buSzPct val="100000"/>
-              <a:buChar char="•"/>
+              <a:buChar char="–"/>
             </a:pPr>
             <a:r>
               <a:rPr lang="en-US" sz="1500" dirty="0">
                 <a:solidFill>
-                  <a:srgbClr val="374151"/>
-                </a:solidFill>
+                  <a:srgbClr val="23282E"/>
+                </a:solidFill>
+                <a:latin typeface="Corbel" pitchFamily="34" charset="0"/>
+                <a:ea typeface="Corbel" pitchFamily="34" charset="-122"/>
+                <a:cs typeface="Corbel" pitchFamily="34" charset="-120"/>
               </a:rPr>
               <a:t>CINAHL — nursing and allied health; EMBASE — stronger European and pharmacological coverage than PubMed</a:t>
             </a:r>
@@ -6856,8 +7420,8 @@
         </p:nvSpPr>
         <p:spPr>
           <a:xfrm>
-            <a:off x="8503920" y="4709160"/>
-            <a:ext cx="800000" cy="300000"/>
+            <a:off x="566928" y="4700016"/>
+            <a:ext cx="914400" cy="274320"/>
           </a:xfrm>
           <a:prstGeom prst="rect">
             <a:avLst/>
@@ -6872,10 +7436,13 @@
           <a:bodyPr/>
           <a:lstStyle>
             <a:lvl1pPr>
-              <a:defRPr sz="1000">
-                <a:solidFill>
-                  <a:srgbClr val="6B7280"/>
-                </a:solidFill>
+              <a:defRPr sz="900">
+                <a:solidFill>
+                  <a:srgbClr val="5F6B76"/>
+                </a:solidFill>
+                <a:latin typeface="Corbel"/>
+                <a:ea typeface="Corbel"/>
+                <a:cs typeface="Corbel"/>
               </a:defRPr>
             </a:lvl1pPr>
           </a:lstStyle>
@@ -6922,8 +7489,8 @@
         </p:nvSpPr>
         <p:spPr>
           <a:xfrm>
-            <a:off x="502920" y="292608"/>
-            <a:ext cx="8046720" cy="228600"/>
+            <a:off x="566928" y="384048"/>
+            <a:ext cx="7772400" cy="237744"/>
           </a:xfrm>
           <a:prstGeom prst="rect">
             <a:avLst/>
@@ -6939,14 +7506,17 @@
               <a:buNone/>
             </a:pPr>
             <a:r>
-              <a:rPr lang="en-US" sz="1100" b="1" spc="150" kern="0" dirty="0">
-                <a:solidFill>
-                  <a:srgbClr val="0066CC"/>
-                </a:solidFill>
+              <a:rPr lang="en-US" sz="1000" spc="200" kern="0" dirty="0">
+                <a:solidFill>
+                  <a:srgbClr val="9A6A3C"/>
+                </a:solidFill>
+                <a:latin typeface="Corbel" pitchFamily="34" charset="0"/>
+                <a:ea typeface="Corbel" pitchFamily="34" charset="-122"/>
+                <a:cs typeface="Corbel" pitchFamily="34" charset="-120"/>
               </a:rPr>
               <a:t>UNIT 4</a:t>
             </a:r>
-            <a:endParaRPr lang="en-US" sz="1100" dirty="0"/>
+            <a:endParaRPr lang="en-US" sz="1000" dirty="0"/>
           </a:p>
         </p:txBody>
       </p:sp>
@@ -6958,8 +7528,8 @@
         </p:nvSpPr>
         <p:spPr>
           <a:xfrm>
-            <a:off x="502920" y="548640"/>
-            <a:ext cx="8046720" cy="640080"/>
+            <a:off x="566928" y="658368"/>
+            <a:ext cx="7772400" cy="658368"/>
           </a:xfrm>
           <a:prstGeom prst="rect">
             <a:avLst/>
@@ -6972,30 +7542,56 @@
           <a:lstStyle/>
           <a:p>
             <a:pPr indent="0" marL="0">
+              <a:lnSpc>
+                <a:spcPct val="100000"/>
+              </a:lnSpc>
               <a:buNone/>
             </a:pPr>
             <a:r>
-              <a:rPr lang="en-US" sz="2400" b="1" dirty="0">
-                <a:solidFill>
-                  <a:srgbClr val="111827"/>
-                </a:solidFill>
+              <a:rPr lang="en-US" sz="2500" dirty="0">
+                <a:solidFill>
+                  <a:srgbClr val="1C3140"/>
+                </a:solidFill>
+                <a:latin typeface="Constantia" pitchFamily="34" charset="0"/>
+                <a:ea typeface="Constantia" pitchFamily="34" charset="-122"/>
+                <a:cs typeface="Constantia" pitchFamily="34" charset="-120"/>
               </a:rPr>
               <a:t>The major databases (2/2)</a:t>
             </a:r>
-            <a:endParaRPr lang="en-US" sz="2400" dirty="0"/>
-          </a:p>
-        </p:txBody>
-      </p:sp>
-      <p:sp>
-        <p:nvSpPr>
-          <p:cNvPr id="4" name="Text 2"/>
+            <a:endParaRPr lang="en-US" sz="2500" dirty="0"/>
+          </a:p>
+        </p:txBody>
+      </p:sp>
+      <p:sp>
+        <p:nvSpPr>
+          <p:cNvPr id="4" name="Shape 2"/>
           <p:cNvSpPr/>
           <p:nvPr/>
         </p:nvSpPr>
         <p:spPr>
           <a:xfrm>
-            <a:off x="685800" y="1325880"/>
-            <a:ext cx="7772400" cy="3200400"/>
+            <a:off x="566928" y="1335024"/>
+            <a:ext cx="566928" cy="20117"/>
+          </a:xfrm>
+          <a:prstGeom prst="rect">
+            <a:avLst/>
+          </a:prstGeom>
+          <a:solidFill>
+            <a:srgbClr val="9A6A3C"/>
+          </a:solidFill>
+          <a:ln/>
+        </p:spPr>
+      </p:sp>
+      <p:sp>
+        <p:nvSpPr>
+          <p:cNvPr id="5" name="Text 3"/>
+          <p:cNvSpPr/>
+          <p:nvPr/>
+        </p:nvSpPr>
+        <p:spPr>
+          <a:xfrm>
+            <a:off x="713232" y="1664208"/>
+            <a:ext cx="7498080" cy="2788920"/>
           </a:xfrm>
           <a:prstGeom prst="rect">
             <a:avLst/>
@@ -7009,65 +7605,74 @@
           <a:p>
             <a:pPr marL="342900" indent="-342900">
               <a:lnSpc>
-                <a:spcPct val="125000"/>
+                <a:spcPct val="130000"/>
               </a:lnSpc>
               <a:spcAft>
-                <a:spcPts val="800"/>
+                <a:spcPts val="1100"/>
               </a:spcAft>
               <a:buSzPct val="100000"/>
-              <a:buChar char="•"/>
-            </a:pPr>
-            <a:r>
-              <a:rPr lang="en-US" sz="1300" dirty="0">
-                <a:solidFill>
-                  <a:srgbClr val="374151"/>
-                </a:solidFill>
+              <a:buChar char="–"/>
+            </a:pPr>
+            <a:r>
+              <a:rPr lang="en-US" sz="1350" dirty="0">
+                <a:solidFill>
+                  <a:srgbClr val="23282E"/>
+                </a:solidFill>
+                <a:latin typeface="Corbel" pitchFamily="34" charset="0"/>
+                <a:ea typeface="Corbel" pitchFamily="34" charset="-122"/>
+                <a:cs typeface="Corbel" pitchFamily="34" charset="-120"/>
               </a:rPr>
               <a:t>PsycINFO — psychology and behavioural sciences; ERIC — education</a:t>
             </a:r>
-            <a:endParaRPr lang="en-US" sz="1300" dirty="0"/>
+            <a:endParaRPr lang="en-US" sz="1350" dirty="0"/>
           </a:p>
           <a:p>
             <a:pPr marL="342900" indent="-342900">
               <a:lnSpc>
-                <a:spcPct val="125000"/>
+                <a:spcPct val="130000"/>
               </a:lnSpc>
               <a:spcAft>
-                <a:spcPts val="800"/>
+                <a:spcPts val="1100"/>
               </a:spcAft>
               <a:buSzPct val="100000"/>
-              <a:buChar char="•"/>
-            </a:pPr>
-            <a:r>
-              <a:rPr lang="en-US" sz="1300" dirty="0">
-                <a:solidFill>
-                  <a:srgbClr val="374151"/>
-                </a:solidFill>
+              <a:buChar char="–"/>
+            </a:pPr>
+            <a:r>
+              <a:rPr lang="en-US" sz="1350" dirty="0">
+                <a:solidFill>
+                  <a:srgbClr val="23282E"/>
+                </a:solidFill>
+                <a:latin typeface="Corbel" pitchFamily="34" charset="0"/>
+                <a:ea typeface="Corbel" pitchFamily="34" charset="-122"/>
+                <a:cs typeface="Corbel" pitchFamily="34" charset="-120"/>
               </a:rPr>
               <a:t>African Journals Online (AJOL) — the largest collection of African-published scholarship, poorly covered by the big indexes</a:t>
             </a:r>
-            <a:endParaRPr lang="en-US" sz="1300" dirty="0"/>
+            <a:endParaRPr lang="en-US" sz="1350" dirty="0"/>
           </a:p>
           <a:p>
             <a:pPr marL="342900" indent="-342900">
               <a:lnSpc>
-                <a:spcPct val="125000"/>
+                <a:spcPct val="130000"/>
               </a:lnSpc>
               <a:spcAft>
-                <a:spcPts val="800"/>
+                <a:spcPts val="1100"/>
               </a:spcAft>
               <a:buSzPct val="100000"/>
-              <a:buChar char="•"/>
-            </a:pPr>
-            <a:r>
-              <a:rPr lang="en-US" sz="1300" dirty="0">
-                <a:solidFill>
-                  <a:srgbClr val="374151"/>
-                </a:solidFill>
+              <a:buChar char="–"/>
+            </a:pPr>
+            <a:r>
+              <a:rPr lang="en-US" sz="1350" dirty="0">
+                <a:solidFill>
+                  <a:srgbClr val="23282E"/>
+                </a:solidFill>
+                <a:latin typeface="Corbel" pitchFamily="34" charset="0"/>
+                <a:ea typeface="Corbel" pitchFamily="34" charset="-122"/>
+                <a:cs typeface="Corbel" pitchFamily="34" charset="-120"/>
               </a:rPr>
               <a:t>Google Scholar — very broad and useful for finding grey literature and chasing citations, but the algorithm is opaque and results are not reproducible, so it should supplement rather than replace a structured search</a:t>
             </a:r>
-            <a:endParaRPr lang="en-US" sz="1300" dirty="0"/>
+            <a:endParaRPr lang="en-US" sz="1350" dirty="0"/>
           </a:p>
         </p:txBody>
       </p:sp>
@@ -7083,8 +7688,8 @@
         </p:nvSpPr>
         <p:spPr>
           <a:xfrm>
-            <a:off x="8503920" y="4709160"/>
-            <a:ext cx="800000" cy="300000"/>
+            <a:off x="566928" y="4700016"/>
+            <a:ext cx="914400" cy="274320"/>
           </a:xfrm>
           <a:prstGeom prst="rect">
             <a:avLst/>
@@ -7099,10 +7704,13 @@
           <a:bodyPr/>
           <a:lstStyle>
             <a:lvl1pPr>
-              <a:defRPr sz="1000">
-                <a:solidFill>
-                  <a:srgbClr val="6B7280"/>
-                </a:solidFill>
+              <a:defRPr sz="900">
+                <a:solidFill>
+                  <a:srgbClr val="5F6B76"/>
+                </a:solidFill>
+                <a:latin typeface="Corbel"/>
+                <a:ea typeface="Corbel"/>
+                <a:cs typeface="Corbel"/>
               </a:defRPr>
             </a:lvl1pPr>
           </a:lstStyle>
@@ -7149,8 +7757,8 @@
         </p:nvSpPr>
         <p:spPr>
           <a:xfrm>
-            <a:off x="502920" y="292608"/>
-            <a:ext cx="8046720" cy="228600"/>
+            <a:off x="566928" y="384048"/>
+            <a:ext cx="7772400" cy="237744"/>
           </a:xfrm>
           <a:prstGeom prst="rect">
             <a:avLst/>
@@ -7166,14 +7774,17 @@
               <a:buNone/>
             </a:pPr>
             <a:r>
-              <a:rPr lang="en-US" sz="1100" b="1" spc="150" kern="0" dirty="0">
-                <a:solidFill>
-                  <a:srgbClr val="00A86B"/>
-                </a:solidFill>
+              <a:rPr lang="en-US" sz="1000" spc="200" kern="0" dirty="0">
+                <a:solidFill>
+                  <a:srgbClr val="9A6A3C"/>
+                </a:solidFill>
+                <a:latin typeface="Corbel" pitchFamily="34" charset="0"/>
+                <a:ea typeface="Corbel" pitchFamily="34" charset="-122"/>
+                <a:cs typeface="Corbel" pitchFamily="34" charset="-120"/>
               </a:rPr>
               <a:t>UNIT 4</a:t>
             </a:r>
-            <a:endParaRPr lang="en-US" sz="1100" dirty="0"/>
+            <a:endParaRPr lang="en-US" sz="1000" dirty="0"/>
           </a:p>
         </p:txBody>
       </p:sp>
@@ -7185,8 +7796,8 @@
         </p:nvSpPr>
         <p:spPr>
           <a:xfrm>
-            <a:off x="502920" y="548640"/>
-            <a:ext cx="8046720" cy="548640"/>
+            <a:off x="566928" y="658368"/>
+            <a:ext cx="7772400" cy="658368"/>
           </a:xfrm>
           <a:prstGeom prst="rect">
             <a:avLst/>
@@ -7195,21 +7806,27 @@
           <a:ln/>
         </p:spPr>
         <p:txBody>
-          <a:bodyPr wrap="square" rtlCol="0" anchor="ctr"/>
+          <a:bodyPr wrap="square" rtlCol="0" anchor="t"/>
           <a:lstStyle/>
           <a:p>
             <a:pPr indent="0" marL="0">
+              <a:lnSpc>
+                <a:spcPct val="100000"/>
+              </a:lnSpc>
               <a:buNone/>
             </a:pPr>
             <a:r>
-              <a:rPr lang="en-US" sz="2400" b="1" dirty="0">
-                <a:solidFill>
-                  <a:srgbClr val="111827"/>
-                </a:solidFill>
+              <a:rPr lang="en-US" sz="2500" dirty="0">
+                <a:solidFill>
+                  <a:srgbClr val="1C3140"/>
+                </a:solidFill>
+                <a:latin typeface="Constantia" pitchFamily="34" charset="0"/>
+                <a:ea typeface="Constantia" pitchFamily="34" charset="-122"/>
+                <a:cs typeface="Constantia" pitchFamily="34" charset="-120"/>
               </a:rPr>
               <a:t>In practice</a:t>
             </a:r>
-            <a:endParaRPr lang="en-US" sz="2400" dirty="0"/>
+            <a:endParaRPr lang="en-US" sz="2500" dirty="0"/>
           </a:p>
         </p:txBody>
       </p:sp>
@@ -7221,28 +7838,48 @@
         </p:nvSpPr>
         <p:spPr>
           <a:xfrm>
-            <a:off x="502920" y="1280160"/>
-            <a:ext cx="54864" cy="2377440"/>
+            <a:off x="566928" y="1335024"/>
+            <a:ext cx="566928" cy="20117"/>
           </a:xfrm>
           <a:prstGeom prst="rect">
             <a:avLst/>
           </a:prstGeom>
           <a:solidFill>
-            <a:srgbClr val="00A86B"/>
+            <a:srgbClr val="9A6A3C"/>
           </a:solidFill>
           <a:ln/>
         </p:spPr>
       </p:sp>
       <p:sp>
         <p:nvSpPr>
-          <p:cNvPr id="5" name="Text 3"/>
+          <p:cNvPr id="5" name="Shape 3"/>
           <p:cNvSpPr/>
           <p:nvPr/>
         </p:nvSpPr>
         <p:spPr>
           <a:xfrm>
-            <a:off x="777240" y="1280160"/>
-            <a:ext cx="7589520" cy="2377440"/>
+            <a:off x="566928" y="1664208"/>
+            <a:ext cx="8010144" cy="2395728"/>
+          </a:xfrm>
+          <a:prstGeom prst="rect">
+            <a:avLst/>
+          </a:prstGeom>
+          <a:solidFill>
+            <a:srgbClr val="F6F4F0"/>
+          </a:solidFill>
+          <a:ln/>
+        </p:spPr>
+      </p:sp>
+      <p:sp>
+        <p:nvSpPr>
+          <p:cNvPr id="6" name="Text 4"/>
+          <p:cNvSpPr/>
+          <p:nvPr/>
+        </p:nvSpPr>
+        <p:spPr>
+          <a:xfrm>
+            <a:off x="932688" y="1847088"/>
+            <a:ext cx="7278624" cy="2029968"/>
           </a:xfrm>
           <a:prstGeom prst="rect">
             <a:avLst/>
@@ -7256,15 +7893,18 @@
           <a:p>
             <a:pPr indent="0" marL="0">
               <a:lnSpc>
-                <a:spcPct val="130000"/>
+                <a:spcPct val="132000"/>
               </a:lnSpc>
               <a:buNone/>
             </a:pPr>
             <a:r>
-              <a:rPr lang="en-US" sz="1600" dirty="0">
-                <a:solidFill>
-                  <a:srgbClr val="374151"/>
-                </a:solidFill>
+              <a:rPr lang="en-US" sz="1600" i="1" dirty="0">
+                <a:solidFill>
+                  <a:srgbClr val="1C3140"/>
+                </a:solidFill>
+                <a:latin typeface="Constantia" pitchFamily="34" charset="0"/>
+                <a:ea typeface="Constantia" pitchFamily="34" charset="-122"/>
+                <a:cs typeface="Constantia" pitchFamily="34" charset="-120"/>
               </a:rPr>
               <a:t>For work on African populations, searching only PubMed and Scopus will systematically miss regionally published evidence. AJOL, national journal portals and institutional repositories are not optional extras here.</a:t>
             </a:r>
@@ -7284,8 +7924,8 @@
         </p:nvSpPr>
         <p:spPr>
           <a:xfrm>
-            <a:off x="8503920" y="4709160"/>
-            <a:ext cx="800000" cy="300000"/>
+            <a:off x="566928" y="4700016"/>
+            <a:ext cx="914400" cy="274320"/>
           </a:xfrm>
           <a:prstGeom prst="rect">
             <a:avLst/>
@@ -7300,10 +7940,13 @@
           <a:bodyPr/>
           <a:lstStyle>
             <a:lvl1pPr>
-              <a:defRPr sz="1000">
-                <a:solidFill>
-                  <a:srgbClr val="6B7280"/>
-                </a:solidFill>
+              <a:defRPr sz="900">
+                <a:solidFill>
+                  <a:srgbClr val="5F6B76"/>
+                </a:solidFill>
+                <a:latin typeface="Corbel"/>
+                <a:ea typeface="Corbel"/>
+                <a:cs typeface="Corbel"/>
               </a:defRPr>
             </a:lvl1pPr>
           </a:lstStyle>
@@ -7350,8 +7993,8 @@
         </p:nvSpPr>
         <p:spPr>
           <a:xfrm>
-            <a:off x="502920" y="292608"/>
-            <a:ext cx="8046720" cy="228600"/>
+            <a:off x="566928" y="384048"/>
+            <a:ext cx="7772400" cy="237744"/>
           </a:xfrm>
           <a:prstGeom prst="rect">
             <a:avLst/>
@@ -7367,14 +8010,17 @@
               <a:buNone/>
             </a:pPr>
             <a:r>
-              <a:rPr lang="en-US" sz="1100" b="1" spc="150" kern="0" dirty="0">
-                <a:solidFill>
-                  <a:srgbClr val="0066CC"/>
-                </a:solidFill>
+              <a:rPr lang="en-US" sz="1000" spc="200" kern="0" dirty="0">
+                <a:solidFill>
+                  <a:srgbClr val="9A6A3C"/>
+                </a:solidFill>
+                <a:latin typeface="Corbel" pitchFamily="34" charset="0"/>
+                <a:ea typeface="Corbel" pitchFamily="34" charset="-122"/>
+                <a:cs typeface="Corbel" pitchFamily="34" charset="-120"/>
               </a:rPr>
               <a:t>UNIT 4</a:t>
             </a:r>
-            <a:endParaRPr lang="en-US" sz="1100" dirty="0"/>
+            <a:endParaRPr lang="en-US" sz="1000" dirty="0"/>
           </a:p>
         </p:txBody>
       </p:sp>
@@ -7386,8 +8032,8 @@
         </p:nvSpPr>
         <p:spPr>
           <a:xfrm>
-            <a:off x="502920" y="548640"/>
-            <a:ext cx="8046720" cy="640080"/>
+            <a:off x="566928" y="658368"/>
+            <a:ext cx="7772400" cy="658368"/>
           </a:xfrm>
           <a:prstGeom prst="rect">
             <a:avLst/>
@@ -7400,30 +8046,56 @@
           <a:lstStyle/>
           <a:p>
             <a:pPr indent="0" marL="0">
+              <a:lnSpc>
+                <a:spcPct val="100000"/>
+              </a:lnSpc>
               <a:buNone/>
             </a:pPr>
             <a:r>
-              <a:rPr lang="en-US" sz="2400" b="1" dirty="0">
-                <a:solidFill>
-                  <a:srgbClr val="111827"/>
-                </a:solidFill>
+              <a:rPr lang="en-US" sz="2500" dirty="0">
+                <a:solidFill>
+                  <a:srgbClr val="1C3140"/>
+                </a:solidFill>
+                <a:latin typeface="Constantia" pitchFamily="34" charset="0"/>
+                <a:ea typeface="Constantia" pitchFamily="34" charset="-122"/>
+                <a:cs typeface="Constantia" pitchFamily="34" charset="-120"/>
               </a:rPr>
               <a:t>Building the search (1/2)</a:t>
             </a:r>
-            <a:endParaRPr lang="en-US" sz="2400" dirty="0"/>
-          </a:p>
-        </p:txBody>
-      </p:sp>
-      <p:sp>
-        <p:nvSpPr>
-          <p:cNvPr id="4" name="Text 2"/>
+            <a:endParaRPr lang="en-US" sz="2500" dirty="0"/>
+          </a:p>
+        </p:txBody>
+      </p:sp>
+      <p:sp>
+        <p:nvSpPr>
+          <p:cNvPr id="4" name="Shape 2"/>
           <p:cNvSpPr/>
           <p:nvPr/>
         </p:nvSpPr>
         <p:spPr>
           <a:xfrm>
-            <a:off x="685800" y="1325880"/>
-            <a:ext cx="7772400" cy="3200400"/>
+            <a:off x="566928" y="1335024"/>
+            <a:ext cx="566928" cy="20117"/>
+          </a:xfrm>
+          <a:prstGeom prst="rect">
+            <a:avLst/>
+          </a:prstGeom>
+          <a:solidFill>
+            <a:srgbClr val="9A6A3C"/>
+          </a:solidFill>
+          <a:ln/>
+        </p:spPr>
+      </p:sp>
+      <p:sp>
+        <p:nvSpPr>
+          <p:cNvPr id="5" name="Text 3"/>
+          <p:cNvSpPr/>
+          <p:nvPr/>
+        </p:nvSpPr>
+        <p:spPr>
+          <a:xfrm>
+            <a:off x="713232" y="1664208"/>
+            <a:ext cx="7498080" cy="2788920"/>
           </a:xfrm>
           <a:prstGeom prst="rect">
             <a:avLst/>
@@ -7437,19 +8109,22 @@
           <a:p>
             <a:pPr marL="342900" indent="-342900">
               <a:lnSpc>
-                <a:spcPct val="125000"/>
+                <a:spcPct val="130000"/>
               </a:lnSpc>
               <a:spcAft>
-                <a:spcPts val="800"/>
+                <a:spcPts val="1100"/>
               </a:spcAft>
               <a:buSzPct val="100000"/>
-              <a:buChar char="•"/>
+              <a:buChar char="–"/>
             </a:pPr>
             <a:r>
               <a:rPr lang="en-US" sz="1500" dirty="0">
                 <a:solidFill>
-                  <a:srgbClr val="374151"/>
-                </a:solidFill>
+                  <a:srgbClr val="23282E"/>
+                </a:solidFill>
+                <a:latin typeface="Corbel" pitchFamily="34" charset="0"/>
+                <a:ea typeface="Corbel" pitchFamily="34" charset="-122"/>
+                <a:cs typeface="Corbel" pitchFamily="34" charset="-120"/>
               </a:rPr>
               <a:t>Break the question into concepts — usually the P, I/E and O of PICO; do not search the whole question as a sentence</a:t>
             </a:r>
@@ -7458,19 +8133,22 @@
           <a:p>
             <a:pPr marL="342900" indent="-342900">
               <a:lnSpc>
-                <a:spcPct val="125000"/>
+                <a:spcPct val="130000"/>
               </a:lnSpc>
               <a:spcAft>
-                <a:spcPts val="800"/>
+                <a:spcPts val="1100"/>
               </a:spcAft>
               <a:buSzPct val="100000"/>
-              <a:buChar char="•"/>
+              <a:buChar char="–"/>
             </a:pPr>
             <a:r>
               <a:rPr lang="en-US" sz="1500" dirty="0">
                 <a:solidFill>
-                  <a:srgbClr val="374151"/>
-                </a:solidFill>
+                  <a:srgbClr val="23282E"/>
+                </a:solidFill>
+                <a:latin typeface="Corbel" pitchFamily="34" charset="0"/>
+                <a:ea typeface="Corbel" pitchFamily="34" charset="-122"/>
+                <a:cs typeface="Corbel" pitchFamily="34" charset="-120"/>
               </a:rPr>
               <a:t>For each concept, gather synonyms, spelling variants, abbreviations and older terminology</a:t>
             </a:r>
@@ -7479,19 +8157,22 @@
           <a:p>
             <a:pPr marL="342900" indent="-342900">
               <a:lnSpc>
-                <a:spcPct val="125000"/>
+                <a:spcPct val="130000"/>
               </a:lnSpc>
               <a:spcAft>
-                <a:spcPts val="800"/>
+                <a:spcPts val="1100"/>
               </a:spcAft>
               <a:buSzPct val="100000"/>
-              <a:buChar char="•"/>
+              <a:buChar char="–"/>
             </a:pPr>
             <a:r>
               <a:rPr lang="en-US" sz="1500" dirty="0">
                 <a:solidFill>
-                  <a:srgbClr val="374151"/>
-                </a:solidFill>
+                  <a:srgbClr val="23282E"/>
+                </a:solidFill>
+                <a:latin typeface="Corbel" pitchFamily="34" charset="0"/>
+                <a:ea typeface="Corbel" pitchFamily="34" charset="-122"/>
+                <a:cs typeface="Corbel" pitchFamily="34" charset="-120"/>
               </a:rPr>
               <a:t>Combine synonyms within a concept using OR; combine concepts using AND; use NOT sparingly, as it discards relevant records</a:t>
             </a:r>
@@ -7500,19 +8181,22 @@
           <a:p>
             <a:pPr marL="342900" indent="-342900">
               <a:lnSpc>
-                <a:spcPct val="125000"/>
+                <a:spcPct val="130000"/>
               </a:lnSpc>
               <a:spcAft>
-                <a:spcPts val="800"/>
+                <a:spcPts val="1100"/>
               </a:spcAft>
               <a:buSzPct val="100000"/>
-              <a:buChar char="•"/>
+              <a:buChar char="–"/>
             </a:pPr>
             <a:r>
               <a:rPr lang="en-US" sz="1500" dirty="0">
                 <a:solidFill>
-                  <a:srgbClr val="374151"/>
-                </a:solidFill>
+                  <a:srgbClr val="23282E"/>
+                </a:solidFill>
+                <a:latin typeface="Corbel" pitchFamily="34" charset="0"/>
+                <a:ea typeface="Corbel" pitchFamily="34" charset="-122"/>
+                <a:cs typeface="Corbel" pitchFamily="34" charset="-120"/>
               </a:rPr>
               <a:t>Truncation: malari* retrieves malaria, malarial, malariae</a:t>
             </a:r>
@@ -7521,19 +8205,22 @@
           <a:p>
             <a:pPr marL="342900" indent="-342900">
               <a:lnSpc>
-                <a:spcPct val="125000"/>
+                <a:spcPct val="130000"/>
               </a:lnSpc>
               <a:spcAft>
-                <a:spcPts val="800"/>
+                <a:spcPts val="1100"/>
               </a:spcAft>
               <a:buSzPct val="100000"/>
-              <a:buChar char="•"/>
+              <a:buChar char="–"/>
             </a:pPr>
             <a:r>
               <a:rPr lang="en-US" sz="1500" dirty="0">
                 <a:solidFill>
-                  <a:srgbClr val="374151"/>
-                </a:solidFill>
+                  <a:srgbClr val="23282E"/>
+                </a:solidFill>
+                <a:latin typeface="Corbel" pitchFamily="34" charset="0"/>
+                <a:ea typeface="Corbel" pitchFamily="34" charset="-122"/>
+                <a:cs typeface="Corbel" pitchFamily="34" charset="-120"/>
               </a:rPr>
               <a:t>Phrase searching: "mobile money" keeps the words adjacent</a:t>
             </a:r>
@@ -7553,8 +8240,8 @@
         </p:nvSpPr>
         <p:spPr>
           <a:xfrm>
-            <a:off x="8503920" y="4709160"/>
-            <a:ext cx="800000" cy="300000"/>
+            <a:off x="566928" y="4700016"/>
+            <a:ext cx="914400" cy="274320"/>
           </a:xfrm>
           <a:prstGeom prst="rect">
             <a:avLst/>
@@ -7569,10 +8256,13 @@
           <a:bodyPr/>
           <a:lstStyle>
             <a:lvl1pPr>
-              <a:defRPr sz="1000">
-                <a:solidFill>
-                  <a:srgbClr val="6B7280"/>
-                </a:solidFill>
+              <a:defRPr sz="900">
+                <a:solidFill>
+                  <a:srgbClr val="5F6B76"/>
+                </a:solidFill>
+                <a:latin typeface="Corbel"/>
+                <a:ea typeface="Corbel"/>
+                <a:cs typeface="Corbel"/>
               </a:defRPr>
             </a:lvl1pPr>
           </a:lstStyle>
@@ -7619,8 +8309,8 @@
         </p:nvSpPr>
         <p:spPr>
           <a:xfrm>
-            <a:off x="502920" y="292608"/>
-            <a:ext cx="8046720" cy="228600"/>
+            <a:off x="566928" y="384048"/>
+            <a:ext cx="7772400" cy="237744"/>
           </a:xfrm>
           <a:prstGeom prst="rect">
             <a:avLst/>
@@ -7636,14 +8326,17 @@
               <a:buNone/>
             </a:pPr>
             <a:r>
-              <a:rPr lang="en-US" sz="1100" b="1" spc="150" kern="0" dirty="0">
-                <a:solidFill>
-                  <a:srgbClr val="0066CC"/>
-                </a:solidFill>
+              <a:rPr lang="en-US" sz="1000" spc="200" kern="0" dirty="0">
+                <a:solidFill>
+                  <a:srgbClr val="9A6A3C"/>
+                </a:solidFill>
+                <a:latin typeface="Corbel" pitchFamily="34" charset="0"/>
+                <a:ea typeface="Corbel" pitchFamily="34" charset="-122"/>
+                <a:cs typeface="Corbel" pitchFamily="34" charset="-120"/>
               </a:rPr>
               <a:t>UNIT 4</a:t>
             </a:r>
-            <a:endParaRPr lang="en-US" sz="1100" dirty="0"/>
+            <a:endParaRPr lang="en-US" sz="1000" dirty="0"/>
           </a:p>
         </p:txBody>
       </p:sp>
@@ -7655,8 +8348,8 @@
         </p:nvSpPr>
         <p:spPr>
           <a:xfrm>
-            <a:off x="502920" y="548640"/>
-            <a:ext cx="8046720" cy="640080"/>
+            <a:off x="566928" y="658368"/>
+            <a:ext cx="7772400" cy="658368"/>
           </a:xfrm>
           <a:prstGeom prst="rect">
             <a:avLst/>
@@ -7669,30 +8362,56 @@
           <a:lstStyle/>
           <a:p>
             <a:pPr indent="0" marL="0">
+              <a:lnSpc>
+                <a:spcPct val="100000"/>
+              </a:lnSpc>
               <a:buNone/>
             </a:pPr>
             <a:r>
-              <a:rPr lang="en-US" sz="2400" b="1" dirty="0">
-                <a:solidFill>
-                  <a:srgbClr val="111827"/>
-                </a:solidFill>
+              <a:rPr lang="en-US" sz="2500" dirty="0">
+                <a:solidFill>
+                  <a:srgbClr val="1C3140"/>
+                </a:solidFill>
+                <a:latin typeface="Constantia" pitchFamily="34" charset="0"/>
+                <a:ea typeface="Constantia" pitchFamily="34" charset="-122"/>
+                <a:cs typeface="Constantia" pitchFamily="34" charset="-120"/>
               </a:rPr>
               <a:t>Building the search (2/2)</a:t>
             </a:r>
-            <a:endParaRPr lang="en-US" sz="2400" dirty="0"/>
-          </a:p>
-        </p:txBody>
-      </p:sp>
-      <p:sp>
-        <p:nvSpPr>
-          <p:cNvPr id="4" name="Text 2"/>
+            <a:endParaRPr lang="en-US" sz="2500" dirty="0"/>
+          </a:p>
+        </p:txBody>
+      </p:sp>
+      <p:sp>
+        <p:nvSpPr>
+          <p:cNvPr id="4" name="Shape 2"/>
           <p:cNvSpPr/>
           <p:nvPr/>
         </p:nvSpPr>
         <p:spPr>
           <a:xfrm>
-            <a:off x="685800" y="1325880"/>
-            <a:ext cx="7772400" cy="3200400"/>
+            <a:off x="566928" y="1335024"/>
+            <a:ext cx="566928" cy="20117"/>
+          </a:xfrm>
+          <a:prstGeom prst="rect">
+            <a:avLst/>
+          </a:prstGeom>
+          <a:solidFill>
+            <a:srgbClr val="9A6A3C"/>
+          </a:solidFill>
+          <a:ln/>
+        </p:spPr>
+      </p:sp>
+      <p:sp>
+        <p:nvSpPr>
+          <p:cNvPr id="5" name="Text 3"/>
+          <p:cNvSpPr/>
+          <p:nvPr/>
+        </p:nvSpPr>
+        <p:spPr>
+          <a:xfrm>
+            <a:off x="713232" y="1664208"/>
+            <a:ext cx="7498080" cy="2788920"/>
           </a:xfrm>
           <a:prstGeom prst="rect">
             <a:avLst/>
@@ -7706,44 +8425,50 @@
           <a:p>
             <a:pPr marL="342900" indent="-342900">
               <a:lnSpc>
-                <a:spcPct val="125000"/>
+                <a:spcPct val="130000"/>
               </a:lnSpc>
               <a:spcAft>
-                <a:spcPts val="800"/>
+                <a:spcPts val="1100"/>
               </a:spcAft>
               <a:buSzPct val="100000"/>
-              <a:buChar char="•"/>
-            </a:pPr>
-            <a:r>
-              <a:rPr lang="en-US" sz="1700" dirty="0">
-                <a:solidFill>
-                  <a:srgbClr val="374151"/>
-                </a:solidFill>
+              <a:buChar char="–"/>
+            </a:pPr>
+            <a:r>
+              <a:rPr lang="en-US" sz="1650" dirty="0">
+                <a:solidFill>
+                  <a:srgbClr val="23282E"/>
+                </a:solidFill>
+                <a:latin typeface="Corbel" pitchFamily="34" charset="0"/>
+                <a:ea typeface="Corbel" pitchFamily="34" charset="-122"/>
+                <a:cs typeface="Corbel" pitchFamily="34" charset="-120"/>
               </a:rPr>
               <a:t>Field tags restrict where a term is searched, e.g. [tiab] for title and abstract in PubMed</a:t>
             </a:r>
-            <a:endParaRPr lang="en-US" sz="1700" dirty="0"/>
+            <a:endParaRPr lang="en-US" sz="1650" dirty="0"/>
           </a:p>
           <a:p>
             <a:pPr marL="342900" indent="-342900">
               <a:lnSpc>
-                <a:spcPct val="125000"/>
+                <a:spcPct val="130000"/>
               </a:lnSpc>
               <a:spcAft>
-                <a:spcPts val="800"/>
+                <a:spcPts val="1100"/>
               </a:spcAft>
               <a:buSzPct val="100000"/>
-              <a:buChar char="•"/>
-            </a:pPr>
-            <a:r>
-              <a:rPr lang="en-US" sz="1700" dirty="0">
-                <a:solidFill>
-                  <a:srgbClr val="374151"/>
-                </a:solidFill>
+              <a:buChar char="–"/>
+            </a:pPr>
+            <a:r>
+              <a:rPr lang="en-US" sz="1650" dirty="0">
+                <a:solidFill>
+                  <a:srgbClr val="23282E"/>
+                </a:solidFill>
+                <a:latin typeface="Corbel" pitchFamily="34" charset="0"/>
+                <a:ea typeface="Corbel" pitchFamily="34" charset="-122"/>
+                <a:cs typeface="Corbel" pitchFamily="34" charset="-120"/>
               </a:rPr>
               <a:t>Proximity operators (NEAR, W/n, ADJn) find terms near each other and vary by database</a:t>
             </a:r>
-            <a:endParaRPr lang="en-US" sz="1700" dirty="0"/>
+            <a:endParaRPr lang="en-US" sz="1650" dirty="0"/>
           </a:p>
         </p:txBody>
       </p:sp>
@@ -7759,8 +8484,8 @@
         </p:nvSpPr>
         <p:spPr>
           <a:xfrm>
-            <a:off x="8503920" y="4709160"/>
-            <a:ext cx="800000" cy="300000"/>
+            <a:off x="566928" y="4700016"/>
+            <a:ext cx="914400" cy="274320"/>
           </a:xfrm>
           <a:prstGeom prst="rect">
             <a:avLst/>
@@ -7775,10 +8500,13 @@
           <a:bodyPr/>
           <a:lstStyle>
             <a:lvl1pPr>
-              <a:defRPr sz="1000">
-                <a:solidFill>
-                  <a:srgbClr val="6B7280"/>
-                </a:solidFill>
+              <a:defRPr sz="900">
+                <a:solidFill>
+                  <a:srgbClr val="5F6B76"/>
+                </a:solidFill>
+                <a:latin typeface="Corbel"/>
+                <a:ea typeface="Corbel"/>
+                <a:cs typeface="Corbel"/>
               </a:defRPr>
             </a:lvl1pPr>
           </a:lstStyle>
@@ -7825,8 +8553,8 @@
         </p:nvSpPr>
         <p:spPr>
           <a:xfrm>
-            <a:off x="502920" y="292608"/>
-            <a:ext cx="8046720" cy="228600"/>
+            <a:off x="566928" y="384048"/>
+            <a:ext cx="7772400" cy="237744"/>
           </a:xfrm>
           <a:prstGeom prst="rect">
             <a:avLst/>
@@ -7842,14 +8570,17 @@
               <a:buNone/>
             </a:pPr>
             <a:r>
-              <a:rPr lang="en-US" sz="1100" b="1" spc="150" kern="0" dirty="0">
-                <a:solidFill>
-                  <a:srgbClr val="0066CC"/>
-                </a:solidFill>
+              <a:rPr lang="en-US" sz="1000" spc="200" kern="0" dirty="0">
+                <a:solidFill>
+                  <a:srgbClr val="9A6A3C"/>
+                </a:solidFill>
+                <a:latin typeface="Corbel" pitchFamily="34" charset="0"/>
+                <a:ea typeface="Corbel" pitchFamily="34" charset="-122"/>
+                <a:cs typeface="Corbel" pitchFamily="34" charset="-120"/>
               </a:rPr>
               <a:t>UNIT 4</a:t>
             </a:r>
-            <a:endParaRPr lang="en-US" sz="1100" dirty="0"/>
+            <a:endParaRPr lang="en-US" sz="1000" dirty="0"/>
           </a:p>
         </p:txBody>
       </p:sp>
@@ -7861,8 +8592,8 @@
         </p:nvSpPr>
         <p:spPr>
           <a:xfrm>
-            <a:off x="502920" y="548640"/>
-            <a:ext cx="8046720" cy="640080"/>
+            <a:off x="566928" y="658368"/>
+            <a:ext cx="7772400" cy="658368"/>
           </a:xfrm>
           <a:prstGeom prst="rect">
             <a:avLst/>
@@ -7875,30 +8606,56 @@
           <a:lstStyle/>
           <a:p>
             <a:pPr indent="0" marL="0">
+              <a:lnSpc>
+                <a:spcPct val="100000"/>
+              </a:lnSpc>
               <a:buNone/>
             </a:pPr>
             <a:r>
-              <a:rPr lang="en-US" sz="2400" b="1" dirty="0">
-                <a:solidFill>
-                  <a:srgbClr val="111827"/>
-                </a:solidFill>
+              <a:rPr lang="en-US" sz="2500" dirty="0">
+                <a:solidFill>
+                  <a:srgbClr val="1C3140"/>
+                </a:solidFill>
+                <a:latin typeface="Constantia" pitchFamily="34" charset="0"/>
+                <a:ea typeface="Constantia" pitchFamily="34" charset="-122"/>
+                <a:cs typeface="Constantia" pitchFamily="34" charset="-120"/>
               </a:rPr>
               <a:t>Controlled vocabulary (1/2)</a:t>
             </a:r>
-            <a:endParaRPr lang="en-US" sz="2400" dirty="0"/>
-          </a:p>
-        </p:txBody>
-      </p:sp>
-      <p:sp>
-        <p:nvSpPr>
-          <p:cNvPr id="4" name="Text 2"/>
+            <a:endParaRPr lang="en-US" sz="2500" dirty="0"/>
+          </a:p>
+        </p:txBody>
+      </p:sp>
+      <p:sp>
+        <p:nvSpPr>
+          <p:cNvPr id="4" name="Shape 2"/>
           <p:cNvSpPr/>
           <p:nvPr/>
         </p:nvSpPr>
         <p:spPr>
           <a:xfrm>
-            <a:off x="685800" y="1325880"/>
-            <a:ext cx="7772400" cy="3200400"/>
+            <a:off x="566928" y="1335024"/>
+            <a:ext cx="566928" cy="20117"/>
+          </a:xfrm>
+          <a:prstGeom prst="rect">
+            <a:avLst/>
+          </a:prstGeom>
+          <a:solidFill>
+            <a:srgbClr val="9A6A3C"/>
+          </a:solidFill>
+          <a:ln/>
+        </p:spPr>
+      </p:sp>
+      <p:sp>
+        <p:nvSpPr>
+          <p:cNvPr id="5" name="Text 3"/>
+          <p:cNvSpPr/>
+          <p:nvPr/>
+        </p:nvSpPr>
+        <p:spPr>
+          <a:xfrm>
+            <a:off x="713232" y="1664208"/>
+            <a:ext cx="7498080" cy="2788920"/>
           </a:xfrm>
           <a:prstGeom prst="rect">
             <a:avLst/>
@@ -7912,107 +8669,122 @@
           <a:p>
             <a:pPr marL="342900" indent="-342900">
               <a:lnSpc>
-                <a:spcPct val="125000"/>
+                <a:spcPct val="130000"/>
               </a:lnSpc>
               <a:spcAft>
-                <a:spcPts val="800"/>
+                <a:spcPts val="1100"/>
               </a:spcAft>
               <a:buSzPct val="100000"/>
-              <a:buChar char="•"/>
-            </a:pPr>
-            <a:r>
-              <a:rPr lang="en-US" sz="1700" dirty="0">
-                <a:solidFill>
-                  <a:srgbClr val="374151"/>
-                </a:solidFill>
+              <a:buChar char="–"/>
+            </a:pPr>
+            <a:r>
+              <a:rPr lang="en-US" sz="1650" dirty="0">
+                <a:solidFill>
+                  <a:srgbClr val="23282E"/>
+                </a:solidFill>
+                <a:latin typeface="Corbel" pitchFamily="34" charset="0"/>
+                <a:ea typeface="Corbel" pitchFamily="34" charset="-122"/>
+                <a:cs typeface="Corbel" pitchFamily="34" charset="-120"/>
               </a:rPr>
               <a:t>MeSH is the National Library of Medicine's controlled vocabulary; each PubMed record is tagged by indexers</a:t>
             </a:r>
-            <a:endParaRPr lang="en-US" sz="1700" dirty="0"/>
+            <a:endParaRPr lang="en-US" sz="1650" dirty="0"/>
           </a:p>
           <a:p>
             <a:pPr marL="342900" indent="-342900">
               <a:lnSpc>
-                <a:spcPct val="125000"/>
+                <a:spcPct val="130000"/>
               </a:lnSpc>
               <a:spcAft>
-                <a:spcPts val="800"/>
+                <a:spcPts val="1100"/>
               </a:spcAft>
               <a:buSzPct val="100000"/>
-              <a:buChar char="•"/>
-            </a:pPr>
-            <a:r>
-              <a:rPr lang="en-US" sz="1700" dirty="0">
-                <a:solidFill>
-                  <a:srgbClr val="374151"/>
-                </a:solidFill>
+              <a:buChar char="–"/>
+            </a:pPr>
+            <a:r>
+              <a:rPr lang="en-US" sz="1650" dirty="0">
+                <a:solidFill>
+                  <a:srgbClr val="23282E"/>
+                </a:solidFill>
+                <a:latin typeface="Corbel" pitchFamily="34" charset="0"/>
+                <a:ea typeface="Corbel" pitchFamily="34" charset="-122"/>
+                <a:cs typeface="Corbel" pitchFamily="34" charset="-120"/>
               </a:rPr>
               <a:t>Searching a MeSH term retrieves records regardless of the authors' wording</a:t>
             </a:r>
-            <a:endParaRPr lang="en-US" sz="1700" dirty="0"/>
+            <a:endParaRPr lang="en-US" sz="1650" dirty="0"/>
           </a:p>
           <a:p>
             <a:pPr marL="342900" indent="-342900">
               <a:lnSpc>
-                <a:spcPct val="125000"/>
+                <a:spcPct val="130000"/>
               </a:lnSpc>
               <a:spcAft>
-                <a:spcPts val="800"/>
+                <a:spcPts val="1100"/>
               </a:spcAft>
               <a:buSzPct val="100000"/>
-              <a:buChar char="•"/>
-            </a:pPr>
-            <a:r>
-              <a:rPr lang="en-US" sz="1700" dirty="0">
-                <a:solidFill>
-                  <a:srgbClr val="374151"/>
-                </a:solidFill>
+              <a:buChar char="–"/>
+            </a:pPr>
+            <a:r>
+              <a:rPr lang="en-US" sz="1650" dirty="0">
+                <a:solidFill>
+                  <a:srgbClr val="23282E"/>
+                </a:solidFill>
+                <a:latin typeface="Corbel" pitchFamily="34" charset="0"/>
+                <a:ea typeface="Corbel" pitchFamily="34" charset="-122"/>
+                <a:cs typeface="Corbel" pitchFamily="34" charset="-120"/>
               </a:rPr>
               <a:t>Explosion automatically includes narrower terms beneath a heading in the tree</a:t>
             </a:r>
-            <a:endParaRPr lang="en-US" sz="1700" dirty="0"/>
+            <a:endParaRPr lang="en-US" sz="1650" dirty="0"/>
           </a:p>
           <a:p>
             <a:pPr marL="342900" indent="-342900">
               <a:lnSpc>
-                <a:spcPct val="125000"/>
+                <a:spcPct val="130000"/>
               </a:lnSpc>
               <a:spcAft>
-                <a:spcPts val="800"/>
+                <a:spcPts val="1100"/>
               </a:spcAft>
               <a:buSzPct val="100000"/>
-              <a:buChar char="•"/>
-            </a:pPr>
-            <a:r>
-              <a:rPr lang="en-US" sz="1700" dirty="0">
-                <a:solidFill>
-                  <a:srgbClr val="374151"/>
-                </a:solidFill>
+              <a:buChar char="–"/>
+            </a:pPr>
+            <a:r>
+              <a:rPr lang="en-US" sz="1650" dirty="0">
+                <a:solidFill>
+                  <a:srgbClr val="23282E"/>
+                </a:solidFill>
+                <a:latin typeface="Corbel" pitchFamily="34" charset="0"/>
+                <a:ea typeface="Corbel" pitchFamily="34" charset="-122"/>
+                <a:cs typeface="Corbel" pitchFamily="34" charset="-120"/>
               </a:rPr>
               <a:t>Major topic restricts to records where the concept is a main focus</a:t>
             </a:r>
-            <a:endParaRPr lang="en-US" sz="1700" dirty="0"/>
+            <a:endParaRPr lang="en-US" sz="1650" dirty="0"/>
           </a:p>
           <a:p>
             <a:pPr marL="342900" indent="-342900">
               <a:lnSpc>
-                <a:spcPct val="125000"/>
+                <a:spcPct val="130000"/>
               </a:lnSpc>
               <a:spcAft>
-                <a:spcPts val="800"/>
+                <a:spcPts val="1100"/>
               </a:spcAft>
               <a:buSzPct val="100000"/>
-              <a:buChar char="•"/>
-            </a:pPr>
-            <a:r>
-              <a:rPr lang="en-US" sz="1700" dirty="0">
-                <a:solidFill>
-                  <a:srgbClr val="374151"/>
-                </a:solidFill>
+              <a:buChar char="–"/>
+            </a:pPr>
+            <a:r>
+              <a:rPr lang="en-US" sz="1650" dirty="0">
+                <a:solidFill>
+                  <a:srgbClr val="23282E"/>
+                </a:solidFill>
+                <a:latin typeface="Corbel" pitchFamily="34" charset="0"/>
+                <a:ea typeface="Corbel" pitchFamily="34" charset="-122"/>
+                <a:cs typeface="Corbel" pitchFamily="34" charset="-120"/>
               </a:rPr>
               <a:t>MeSH indexing lags publication, so very recent papers are found only by free-text terms</a:t>
             </a:r>
-            <a:endParaRPr lang="en-US" sz="1700" dirty="0"/>
+            <a:endParaRPr lang="en-US" sz="1650" dirty="0"/>
           </a:p>
         </p:txBody>
       </p:sp>
@@ -8028,8 +8800,8 @@
         </p:nvSpPr>
         <p:spPr>
           <a:xfrm>
-            <a:off x="8503920" y="4709160"/>
-            <a:ext cx="800000" cy="300000"/>
+            <a:off x="566928" y="4700016"/>
+            <a:ext cx="914400" cy="274320"/>
           </a:xfrm>
           <a:prstGeom prst="rect">
             <a:avLst/>
@@ -8044,10 +8816,13 @@
           <a:bodyPr/>
           <a:lstStyle>
             <a:lvl1pPr>
-              <a:defRPr sz="1000">
-                <a:solidFill>
-                  <a:srgbClr val="6B7280"/>
-                </a:solidFill>
+              <a:defRPr sz="900">
+                <a:solidFill>
+                  <a:srgbClr val="5F6B76"/>
+                </a:solidFill>
+                <a:latin typeface="Corbel"/>
+                <a:ea typeface="Corbel"/>
+                <a:cs typeface="Corbel"/>
               </a:defRPr>
             </a:lvl1pPr>
           </a:lstStyle>
@@ -8094,8 +8869,8 @@
         </p:nvSpPr>
         <p:spPr>
           <a:xfrm>
-            <a:off x="502920" y="292608"/>
-            <a:ext cx="8046720" cy="228600"/>
+            <a:off x="566928" y="384048"/>
+            <a:ext cx="7772400" cy="237744"/>
           </a:xfrm>
           <a:prstGeom prst="rect">
             <a:avLst/>
@@ -8111,14 +8886,17 @@
               <a:buNone/>
             </a:pPr>
             <a:r>
-              <a:rPr lang="en-US" sz="1100" b="1" spc="150" kern="0" dirty="0">
-                <a:solidFill>
-                  <a:srgbClr val="0066CC"/>
-                </a:solidFill>
+              <a:rPr lang="en-US" sz="1000" spc="200" kern="0" dirty="0">
+                <a:solidFill>
+                  <a:srgbClr val="9A6A3C"/>
+                </a:solidFill>
+                <a:latin typeface="Corbel" pitchFamily="34" charset="0"/>
+                <a:ea typeface="Corbel" pitchFamily="34" charset="-122"/>
+                <a:cs typeface="Corbel" pitchFamily="34" charset="-120"/>
               </a:rPr>
               <a:t>UNIT 4</a:t>
             </a:r>
-            <a:endParaRPr lang="en-US" sz="1100" dirty="0"/>
+            <a:endParaRPr lang="en-US" sz="1000" dirty="0"/>
           </a:p>
         </p:txBody>
       </p:sp>
@@ -8130,8 +8908,8 @@
         </p:nvSpPr>
         <p:spPr>
           <a:xfrm>
-            <a:off x="502920" y="548640"/>
-            <a:ext cx="8046720" cy="640080"/>
+            <a:off x="566928" y="658368"/>
+            <a:ext cx="7772400" cy="658368"/>
           </a:xfrm>
           <a:prstGeom prst="rect">
             <a:avLst/>
@@ -8144,30 +8922,56 @@
           <a:lstStyle/>
           <a:p>
             <a:pPr indent="0" marL="0">
+              <a:lnSpc>
+                <a:spcPct val="100000"/>
+              </a:lnSpc>
               <a:buNone/>
             </a:pPr>
             <a:r>
-              <a:rPr lang="en-US" sz="2400" b="1" dirty="0">
-                <a:solidFill>
-                  <a:srgbClr val="111827"/>
-                </a:solidFill>
+              <a:rPr lang="en-US" sz="2500" dirty="0">
+                <a:solidFill>
+                  <a:srgbClr val="1C3140"/>
+                </a:solidFill>
+                <a:latin typeface="Constantia" pitchFamily="34" charset="0"/>
+                <a:ea typeface="Constantia" pitchFamily="34" charset="-122"/>
+                <a:cs typeface="Constantia" pitchFamily="34" charset="-120"/>
               </a:rPr>
               <a:t>Controlled vocabulary (2/2)</a:t>
             </a:r>
-            <a:endParaRPr lang="en-US" sz="2400" dirty="0"/>
-          </a:p>
-        </p:txBody>
-      </p:sp>
-      <p:sp>
-        <p:nvSpPr>
-          <p:cNvPr id="4" name="Text 2"/>
+            <a:endParaRPr lang="en-US" sz="2500" dirty="0"/>
+          </a:p>
+        </p:txBody>
+      </p:sp>
+      <p:sp>
+        <p:nvSpPr>
+          <p:cNvPr id="4" name="Shape 2"/>
           <p:cNvSpPr/>
           <p:nvPr/>
         </p:nvSpPr>
         <p:spPr>
           <a:xfrm>
-            <a:off x="685800" y="1325880"/>
-            <a:ext cx="7772400" cy="3200400"/>
+            <a:off x="566928" y="1335024"/>
+            <a:ext cx="566928" cy="20117"/>
+          </a:xfrm>
+          <a:prstGeom prst="rect">
+            <a:avLst/>
+          </a:prstGeom>
+          <a:solidFill>
+            <a:srgbClr val="9A6A3C"/>
+          </a:solidFill>
+          <a:ln/>
+        </p:spPr>
+      </p:sp>
+      <p:sp>
+        <p:nvSpPr>
+          <p:cNvPr id="5" name="Text 3"/>
+          <p:cNvSpPr/>
+          <p:nvPr/>
+        </p:nvSpPr>
+        <p:spPr>
+          <a:xfrm>
+            <a:off x="713232" y="1664208"/>
+            <a:ext cx="7498080" cy="2788920"/>
           </a:xfrm>
           <a:prstGeom prst="rect">
             <a:avLst/>
@@ -8181,19 +8985,22 @@
           <a:p>
             <a:pPr marL="342900" indent="-342900">
               <a:lnSpc>
-                <a:spcPct val="125000"/>
+                <a:spcPct val="130000"/>
               </a:lnSpc>
               <a:spcAft>
-                <a:spcPts val="800"/>
+                <a:spcPts val="1100"/>
               </a:spcAft>
               <a:buSzPct val="100000"/>
-              <a:buChar char="•"/>
+              <a:buChar char="–"/>
             </a:pPr>
             <a:r>
               <a:rPr lang="en-US" sz="1800" dirty="0">
                 <a:solidFill>
-                  <a:srgbClr val="374151"/>
-                </a:solidFill>
+                  <a:srgbClr val="23282E"/>
+                </a:solidFill>
+                <a:latin typeface="Corbel" pitchFamily="34" charset="0"/>
+                <a:ea typeface="Corbel" pitchFamily="34" charset="-122"/>
+                <a:cs typeface="Corbel" pitchFamily="34" charset="-120"/>
               </a:rPr>
               <a:t>The reliable strategy combines both: MeSH OR free-text, for each concept</a:t>
             </a:r>
@@ -8202,19 +9009,22 @@
           <a:p>
             <a:pPr marL="342900" indent="-342900">
               <a:lnSpc>
-                <a:spcPct val="125000"/>
+                <a:spcPct val="130000"/>
               </a:lnSpc>
               <a:spcAft>
-                <a:spcPts val="800"/>
+                <a:spcPts val="1100"/>
               </a:spcAft>
               <a:buSzPct val="100000"/>
-              <a:buChar char="•"/>
+              <a:buChar char="–"/>
             </a:pPr>
             <a:r>
               <a:rPr lang="en-US" sz="1800" dirty="0">
                 <a:solidFill>
-                  <a:srgbClr val="374151"/>
-                </a:solidFill>
+                  <a:srgbClr val="23282E"/>
+                </a:solidFill>
+                <a:latin typeface="Corbel" pitchFamily="34" charset="0"/>
+                <a:ea typeface="Corbel" pitchFamily="34" charset="-122"/>
+                <a:cs typeface="Corbel" pitchFamily="34" charset="-120"/>
               </a:rPr>
               <a:t>Emtree in EMBASE and CINAHL Headings serve the same purpose in their databases</a:t>
             </a:r>
@@ -8234,8 +9044,8 @@
         </p:nvSpPr>
         <p:spPr>
           <a:xfrm>
-            <a:off x="8503920" y="4709160"/>
-            <a:ext cx="800000" cy="300000"/>
+            <a:off x="566928" y="4700016"/>
+            <a:ext cx="914400" cy="274320"/>
           </a:xfrm>
           <a:prstGeom prst="rect">
             <a:avLst/>
@@ -8250,10 +9060,13 @@
           <a:bodyPr/>
           <a:lstStyle>
             <a:lvl1pPr>
-              <a:defRPr sz="1000">
-                <a:solidFill>
-                  <a:srgbClr val="6B7280"/>
-                </a:solidFill>
+              <a:defRPr sz="900">
+                <a:solidFill>
+                  <a:srgbClr val="5F6B76"/>
+                </a:solidFill>
+                <a:latin typeface="Corbel"/>
+                <a:ea typeface="Corbel"/>
+                <a:cs typeface="Corbel"/>
               </a:defRPr>
             </a:lvl1pPr>
           </a:lstStyle>
@@ -8318,7 +9131,7 @@
     </a:clrScheme>
     <a:fontScheme name="Office">
       <a:majorFont>
-        <a:latin typeface="Calibri Light" panose="020F0302020204030204"/>
+        <a:latin typeface="Constantia"/>
         <a:ea typeface=""/>
         <a:cs typeface=""/>
         <a:font script="Jpan" typeface="游ゴシック Light"/>
@@ -8370,7 +9183,7 @@
         <a:font script="Tfng" typeface="Ebrima"/>
       </a:majorFont>
       <a:minorFont>
-        <a:latin typeface="Calibri" panose="020F0502020204030204"/>
+        <a:latin typeface="Corbel"/>
         <a:ea typeface=""/>
         <a:cs typeface=""/>
         <a:font script="Jpan" typeface="游ゴシック"/>
